--- a/Lessons/08_unsupervised_learning/Slides/unsupervised_learning_slides.pptx
+++ b/Lessons/08_unsupervised_learning/Slides/unsupervised_learning_slides.pptx
@@ -6953,7 +6953,7 @@
             </a:pPr>
             <a:r>
               <a:rPr/>
-              <a:t>Set it explicitly and say out loud when it comes back: the first ten minutes of lesson 9, Friday 20 November.</a:t>
+              <a:t>Set it explicitly and say out loud when it comes back: the first ten minutes of lesson 9, Friday 27 November.</a:t>
             </a:r>
           </a:p>
           <a:p>
@@ -10444,7 +10444,7 @@
             </a:pPr>
             <a:r>
               <a:rPr/>
-              <a:t>13 November 2026</a:t>
+              <a:t>20 November 2026</a:t>
             </a:r>
           </a:p>
         </p:txBody>
@@ -18111,7 +18111,7 @@
             </a:r>
             <a:r>
               <a:rPr b="1"/>
-              <a:t>Friday 20 November</a:t>
+              <a:t>Friday 27 November</a:t>
             </a:r>
           </a:p>
           <a:p>

--- a/Lessons/08_unsupervised_learning/Slides/unsupervised_learning_slides.pptx
+++ b/Lessons/08_unsupervised_learning/Slides/unsupervised_learning_slides.pptx
@@ -5,7 +5,7 @@
     <p:sldMasterId id="2147483648" r:id="rId1"/>
   </p:sldMasterIdLst>
   <p:notesMasterIdLst>
-    <p:notesMasterId r:id="rId64"/>
+    <p:notesMasterId r:id="rId66"/>
   </p:notesMasterIdLst>
   <p:sldIdLst>
     <p:sldId id="256" r:id="rId2"/>
@@ -70,6 +70,8 @@
     <p:sldId id="315" r:id="rId61"/>
     <p:sldId id="316" r:id="rId62"/>
     <p:sldId id="317" r:id="rId63"/>
+    <p:sldId id="318" r:id="rId64"/>
+    <p:sldId id="319" r:id="rId65"/>
   </p:sldIdLst>
   <p:sldSz cx="9144000" cy="5143500" type="screen16x9"/>
   <p:notesSz cx="6858000" cy="9144000"/>
@@ -1275,7 +1277,7 @@
             </a:pPr>
             <a:r>
               <a:rPr/>
-              <a:t>Read the range change against the previous slide’s 374.1–1,390.4 - narrower, and reaching the optimum immediately rather than only sometimes. This is why k-means++ is the library default rather than an optional extra.</a:t>
+              <a:t>Read the range change against the previous slide’s 374.1–1,390.4: the worst case is about 300 units less bad. Be honest about what it did not do - k-means++ also reached the optimum in 29 of 30 runs, exactly as the naive starts did. On this data it made the bad case less bad, not rarer, which is why the library default is k-means++ AND ten restarts, keeping the best.</a:t>
             </a:r>
           </a:p>
           <a:p>
@@ -1385,35 +1387,21 @@
             </a:pPr>
             <a:r>
               <a:rPr/>
-              <a:t>Make the trap explicit: a student who does not think about this will be tempted to pick the k with the lowest WCSS, and the lowest WCSS is always the largest k tried, which is a useless answer.</a:t>
-            </a:r>
-          </a:p>
-          <a:p>
-            <a:pPr lvl="0" indent="0" marL="0">
-              <a:buNone/>
-            </a:pPr>
-          </a:p>
-          <a:p>
-            <a:pPr lvl="0" indent="0" marL="0">
-              <a:buNone/>
-            </a:pPr>
-            <a:r>
-              <a:rPr/>
-              <a:t>The elbow logic is a shape argument, not a threshold - ask the room how they would describe “where the curve stops falling steeply” precisely enough to automate it. The honest answer is that it is somewhat subjective, which motivates a second, more quantitative diagnostic on the next slide.</a:t>
-            </a:r>
-          </a:p>
-          <a:p>
-            <a:pPr lvl="0" indent="0" marL="0">
-              <a:buNone/>
-            </a:pPr>
-          </a:p>
-          <a:p>
-            <a:pPr lvl="0" indent="0" marL="0">
-              <a:buNone/>
-            </a:pPr>
-            <a:r>
-              <a:rPr/>
-              <a:t>Handout section 2.3.</a:t>
+              <a:t>Every one of the 60 runs from the last two slides, as a dot: naive starts on top, k-means++ below, the dashed line at the best partition found, 374.1.</a:t>
+            </a:r>
+          </a:p>
+          <a:p>
+            <a:pPr lvl="0" indent="0" marL="0">
+              <a:buNone/>
+            </a:pPr>
+          </a:p>
+          <a:p>
+            <a:pPr lvl="0" indent="0" marL="0">
+              <a:buNone/>
+            </a:pPr>
+            <a:r>
+              <a:rPr/>
+              <a:t>Let them see the pile-up first: 29 of each on the line. Then the two stragglers - 1,390.4 for the naive start, 1,088.3 for k-means++. That is the whole story of initialisation on this data: rare, and not rare enough to ignore, because a single run gives no sign of whether it was the straggler. Restarting and keeping the best is what makes it harmless. Handout section 2.2.</a:t>
             </a:r>
           </a:p>
         </p:txBody>
@@ -1495,7 +1483,21 @@
             </a:pPr>
             <a:r>
               <a:rPr/>
-              <a:t>Set up the two ingredients before showing the formula on the next slide: aᵢ measures how well a point fits its own cluster, bᵢ measures the best alternative it could have had instead.</a:t>
+              <a:t>Make the trap explicit: a student who does not think about this will be tempted to pick the k with the lowest WCSS, and the lowest WCSS is always the largest k tried, which is a useless answer.</a:t>
+            </a:r>
+          </a:p>
+          <a:p>
+            <a:pPr lvl="0" indent="0" marL="0">
+              <a:buNone/>
+            </a:pPr>
+          </a:p>
+          <a:p>
+            <a:pPr lvl="0" indent="0" marL="0">
+              <a:buNone/>
+            </a:pPr>
+            <a:r>
+              <a:rPr/>
+              <a:t>The elbow logic is a shape argument, not a threshold - ask the room how they would describe “where the curve stops falling steeply” precisely enough to automate it. The honest answer is that it is somewhat subjective, which motivates a second, more quantitative diagnostic on the next slide.</a:t>
             </a:r>
           </a:p>
           <a:p>
@@ -1591,21 +1593,7 @@
             </a:pPr>
             <a:r>
               <a:rPr/>
-              <a:t>Walk the three regimes: sᵢ → 1 when a point sits deep inside its own cluster and far from every other; sᵢ ≈ 0 on a boundary between two clusters; sᵢ &lt; 0 when a point is, on average, closer to a different cluster than its own - an assignment the silhouette treats as actively wrong.</a:t>
-            </a:r>
-          </a:p>
-          <a:p>
-            <a:pPr lvl="0" indent="0" marL="0">
-              <a:buNone/>
-            </a:pPr>
-          </a:p>
-          <a:p>
-            <a:pPr lvl="0" indent="0" marL="0">
-              <a:buNone/>
-            </a:pPr>
-            <a:r>
-              <a:rPr/>
-              <a:t>Averaged over all points, this gives one number per k that is a genuine quantity to search over, not only a shape to eyeball - a sharper diagnostic than the elbow, and one that measures something related but not identical: whether every point sits closer to its own group than to any rival.</a:t>
+              <a:t>Set up the two ingredients before showing the formula on the next slide: aᵢ measures how well a point fits its own cluster, bᵢ measures the best alternative it could have had instead.</a:t>
             </a:r>
           </a:p>
           <a:p>
@@ -1701,21 +1689,21 @@
             </a:pPr>
             <a:r>
               <a:rPr/>
-              <a:t>WCSS falls sharply through k=4 and flattens after; silhouette peaks at k=4 and then declines. Point out that the two curves are answering different questions - WCSS asks only “does adding a cluster help,” which is agnostic to what a cluster means; silhouette asks whether every point is closer to its own group than to any rival, a stronger, more geometric condition.</a:t>
-            </a:r>
-          </a:p>
-          <a:p>
-            <a:pPr lvl="0" indent="0" marL="0">
-              <a:buNone/>
-            </a:pPr>
-          </a:p>
-          <a:p>
-            <a:pPr lvl="0" indent="0" marL="0">
-              <a:buNone/>
-            </a:pPr>
-            <a:r>
-              <a:rPr/>
-              <a:t>Say plainly that the two diagnostics agreeing here is a property of this dataset’s four well-separated, comparably sized blobs - not a guarantee. Section 4 of the handout returns to a dataset where a diagnostic can be confidently wrong.</a:t>
+              <a:t>Walk the three regimes: sᵢ → 1 when a point sits deep inside its own cluster and far from every other; sᵢ ≈ 0 on a boundary between two clusters; sᵢ &lt; 0 when a point is, on average, closer to a different cluster than its own - an assignment the silhouette treats as actively wrong.</a:t>
+            </a:r>
+          </a:p>
+          <a:p>
+            <a:pPr lvl="0" indent="0" marL="0">
+              <a:buNone/>
+            </a:pPr>
+          </a:p>
+          <a:p>
+            <a:pPr lvl="0" indent="0" marL="0">
+              <a:buNone/>
+            </a:pPr>
+            <a:r>
+              <a:rPr/>
+              <a:t>Averaged over all points, this gives one number per k that is a genuine quantity to search over, not only a shape to eyeball - a sharper diagnostic than the elbow, and one that measures something related but not identical: whether every point sits closer to its own group than to any rival.</a:t>
             </a:r>
           </a:p>
           <a:p>
@@ -1907,7 +1895,21 @@
             </a:pPr>
             <a:r>
               <a:rPr/>
-              <a:t>State both numbers before the punchline. The agreement is genuinely nice for teaching, but resist letting the class walk away thinking the two diagnostics always agree - that is exactly the kind of overclaim the handout’s “predictable mistake” boxes exist to head off, and this lesson’s own section 4 will show a case where a diagnostic looks fine and is not.</a:t>
+              <a:t>WCSS falls sharply through k=4 and flattens after; silhouette peaks at k=4 and then declines. Point out that the two curves are answering different questions - WCSS asks only “does adding a cluster help,” which is agnostic to what a cluster means; silhouette asks whether every point is closer to its own group than to any rival, a stronger, more geometric condition.</a:t>
+            </a:r>
+          </a:p>
+          <a:p>
+            <a:pPr lvl="0" indent="0" marL="0">
+              <a:buNone/>
+            </a:pPr>
+          </a:p>
+          <a:p>
+            <a:pPr lvl="0" indent="0" marL="0">
+              <a:buNone/>
+            </a:pPr>
+            <a:r>
+              <a:rPr/>
+              <a:t>Say plainly that the two diagnostics agreeing here is a property of this dataset’s four well-separated, comparably sized blobs - not a guarantee. Section 4 of the handout returns to a dataset where a diagnostic can be confidently wrong.</a:t>
             </a:r>
           </a:p>
           <a:p>
@@ -2003,31 +2005,7 @@
             </a:pPr>
             <a:r>
               <a:rPr/>
-              <a:t>Left: the true segments, generated by </a:t>
-            </a:r>
-            <a:r>
-              <a:rPr>
-                <a:latin typeface="Courier"/>
-              </a:rPr>
-              <a:t>retail_data.py</a:t>
-            </a:r>
-            <a:r>
-              <a:rPr/>
-              <a:t>, never shown to k-means. Right: k-means’ own k=4 clustering, fitted centres marked. Visually near-identical - say the number on the next slide rather than here, since this slide is the figure alone.</a:t>
-            </a:r>
-          </a:p>
-          <a:p>
-            <a:pPr lvl="0" indent="0" marL="0">
-              <a:buNone/>
-            </a:pPr>
-          </a:p>
-          <a:p>
-            <a:pPr lvl="0" indent="0" marL="0">
-              <a:buNone/>
-            </a:pPr>
-            <a:r>
-              <a:rPr/>
-              <a:t>Repeat the asymmetry from earlier: this comparison exists only because the data is synthetic. Aurora’s own analysts would have the right panel and nothing else.</a:t>
+              <a:t>State both numbers before the punchline. The agreement is genuinely nice for teaching, but resist letting the class walk away thinking the two diagnostics always agree - that is exactly the kind of overclaim the handout’s “predictable mistake” boxes exist to head off, and this lesson’s own section 4 will show a case where a diagnostic looks fine and is not.</a:t>
             </a:r>
           </a:p>
           <a:p>
@@ -2123,21 +2101,31 @@
             </a:pPr>
             <a:r>
               <a:rPr/>
-              <a:t>Give the definition before the number, since ARI will recur for the rest of the lesson as the standard way to score a clustering against a truth. 0.985 is about as good as this metric gets - worth contrasting later against the bot/human numbers in section 3, which come out negative.</a:t>
-            </a:r>
-          </a:p>
-          <a:p>
-            <a:pPr lvl="0" indent="0" marL="0">
-              <a:buNone/>
-            </a:pPr>
-          </a:p>
-          <a:p>
-            <a:pPr lvl="0" indent="0" marL="0">
-              <a:buNone/>
-            </a:pPr>
-            <a:r>
-              <a:rPr/>
-              <a:t>Bridge forward explicitly: everything scored today with ARI is only checkable because this lesson knows the answer. Section 4 is about what happens when it does not.</a:t>
+              <a:t>Left: the true segments, generated by </a:t>
+            </a:r>
+            <a:r>
+              <a:rPr>
+                <a:latin typeface="Courier"/>
+              </a:rPr>
+              <a:t>retail_data.py</a:t>
+            </a:r>
+            <a:r>
+              <a:rPr/>
+              <a:t>, never shown to k-means. Right: k-means’ own k=4 clustering, fitted centres marked. Visually near-identical - say the number on the next slide rather than here, since this slide is the figure alone.</a:t>
+            </a:r>
+          </a:p>
+          <a:p>
+            <a:pPr lvl="0" indent="0" marL="0">
+              <a:buNone/>
+            </a:pPr>
+          </a:p>
+          <a:p>
+            <a:pPr lvl="0" indent="0" marL="0">
+              <a:buNone/>
+            </a:pPr>
+            <a:r>
+              <a:rPr/>
+              <a:t>Repeat the asymmetry from earlier: this comparison exists only because the data is synthetic. Aurora’s own analysts would have the right panel and nothing else.</a:t>
             </a:r>
           </a:p>
           <a:p>
@@ -2233,35 +2221,35 @@
             </a:pPr>
             <a:r>
               <a:rPr/>
-              <a:t>Run Notebooks/01_kmeans_from_scratch.ipynb. Twenty minutes.</a:t>
-            </a:r>
-          </a:p>
-          <a:p>
-            <a:pPr lvl="0" indent="0" marL="0">
-              <a:buNone/>
-            </a:pPr>
-          </a:p>
-          <a:p>
-            <a:pPr lvl="0" indent="0" marL="0">
-              <a:buNone/>
-            </a:pPr>
-            <a:r>
-              <a:rPr/>
-              <a:t>Have them watch the from-scratch assign/update loop converge on the six-point worked example before scikit-learn’s version ever runs - the agreement is checked, not assumed.</a:t>
-            </a:r>
-          </a:p>
-          <a:p>
-            <a:pPr lvl="0" indent="0" marL="0">
-              <a:buNone/>
-            </a:pPr>
-          </a:p>
-          <a:p>
-            <a:pPr lvl="0" indent="0" marL="0">
-              <a:buNone/>
-            </a:pPr>
-            <a:r>
-              <a:rPr/>
-              <a:t>The cell worth protecting if time is short is the 30-seed initialisation sweep: printing the 374.1-versus-1,390.4 gap themselves lands harder than reading it off a slide.</a:t>
+              <a:t>Give the definition before the number, since ARI will recur for the rest of the lesson as the standard way to score a clustering against a truth. 0.985 is about as good as this metric gets - worth contrasting later against the bot/human numbers in section 3, which come out negative.</a:t>
+            </a:r>
+          </a:p>
+          <a:p>
+            <a:pPr lvl="0" indent="0" marL="0">
+              <a:buNone/>
+            </a:pPr>
+          </a:p>
+          <a:p>
+            <a:pPr lvl="0" indent="0" marL="0">
+              <a:buNone/>
+            </a:pPr>
+            <a:r>
+              <a:rPr/>
+              <a:t>Bridge forward explicitly: everything scored today with ARI is only checkable because this lesson knows the answer. Section 4 is about what happens when it does not.</a:t>
+            </a:r>
+          </a:p>
+          <a:p>
+            <a:pPr lvl="0" indent="0" marL="0">
+              <a:buNone/>
+            </a:pPr>
+          </a:p>
+          <a:p>
+            <a:pPr lvl="0" indent="0" marL="0">
+              <a:buNone/>
+            </a:pPr>
+            <a:r>
+              <a:rPr/>
+              <a:t>Handout section 2.3.</a:t>
             </a:r>
           </a:p>
         </p:txBody>
@@ -2343,35 +2331,35 @@
             </a:pPr>
             <a:r>
               <a:rPr/>
-              <a:t>Set this up as a deliberate provocation, not a natural dataset. Section 2 just showed k-means recovering four clusters almost perfectly - this section is built specifically to break the assumption that made that possible.</a:t>
-            </a:r>
-          </a:p>
-          <a:p>
-            <a:pPr lvl="0" indent="0" marL="0">
-              <a:buNone/>
-            </a:pPr>
-          </a:p>
-          <a:p>
-            <a:pPr lvl="0" indent="0" marL="0">
-              <a:buNone/>
-            </a:pPr>
-            <a:r>
-              <a:rPr/>
-              <a:t>Ask the room to predict, before the figure: if the two groups share a mean, what happens when k-means tries to place two centres? The honest answer, which the next slide shows, is that there is no separating line for it to find at all.</a:t>
-            </a:r>
-          </a:p>
-          <a:p>
-            <a:pPr lvl="0" indent="0" marL="0">
-              <a:buNone/>
-            </a:pPr>
-          </a:p>
-          <a:p>
-            <a:pPr lvl="0" indent="0" marL="0">
-              <a:buNone/>
-            </a:pPr>
-            <a:r>
-              <a:rPr/>
-              <a:t>Handout section 3.1.</a:t>
+              <a:t>Run Notebooks/01_kmeans_from_scratch.ipynb. Twenty minutes.</a:t>
+            </a:r>
+          </a:p>
+          <a:p>
+            <a:pPr lvl="0" indent="0" marL="0">
+              <a:buNone/>
+            </a:pPr>
+          </a:p>
+          <a:p>
+            <a:pPr lvl="0" indent="0" marL="0">
+              <a:buNone/>
+            </a:pPr>
+            <a:r>
+              <a:rPr/>
+              <a:t>Have them watch the from-scratch assign/update loop converge on the six-point worked example before scikit-learn’s version ever runs - the agreement is checked, not assumed.</a:t>
+            </a:r>
+          </a:p>
+          <a:p>
+            <a:pPr lvl="0" indent="0" marL="0">
+              <a:buNone/>
+            </a:pPr>
+          </a:p>
+          <a:p>
+            <a:pPr lvl="0" indent="0" marL="0">
+              <a:buNone/>
+            </a:pPr>
+            <a:r>
+              <a:rPr/>
+              <a:t>The cell worth protecting if time is short is the 30-seed initialisation sweep: printing the 374.1-versus-1,390.4 gap themselves lands harder than reading it off a slide.</a:t>
             </a:r>
           </a:p>
         </p:txBody>
@@ -2453,21 +2441,21 @@
             </a:pPr>
             <a:r>
               <a:rPr/>
-              <a:t>A dense smudge sitting inside a much larger, looser cloud, both centred in roughly the same place. Let the room look for a gap a linear or round boundary could exploit - there isn’t one, and that is the point.</a:t>
-            </a:r>
-          </a:p>
-          <a:p>
-            <a:pPr lvl="0" indent="0" marL="0">
-              <a:buNone/>
-            </a:pPr>
-          </a:p>
-          <a:p>
-            <a:pPr lvl="0" indent="0" marL="0">
-              <a:buNone/>
-            </a:pPr>
-            <a:r>
-              <a:rPr/>
-              <a:t>Contrast directly with the four visible clouds from section 2’s opening figure: same task (cluster with no labels), a completely different picture, and it should not be obvious yet which algorithm handles it.</a:t>
+              <a:t>Set this up as a deliberate provocation, not a natural dataset. Section 2 just showed k-means recovering four clusters almost perfectly - this section is built specifically to break the assumption that made that possible.</a:t>
+            </a:r>
+          </a:p>
+          <a:p>
+            <a:pPr lvl="0" indent="0" marL="0">
+              <a:buNone/>
+            </a:pPr>
+          </a:p>
+          <a:p>
+            <a:pPr lvl="0" indent="0" marL="0">
+              <a:buNone/>
+            </a:pPr>
+            <a:r>
+              <a:rPr/>
+              <a:t>Ask the room to predict, before the figure: if the two groups share a mean, what happens when k-means tries to place two centres? The honest answer, which the next slide shows, is that there is no separating line for it to find at all.</a:t>
             </a:r>
           </a:p>
           <a:p>
@@ -2563,21 +2551,21 @@
             </a:pPr>
             <a:r>
               <a:rPr/>
-              <a:t>Stress “no starting point fixes it” - this is not the local-minimum problem from section 2.2, which k-means++ addresses. This is a mismatch between what k-means optimises (compactness) and what the data actually looks like (a core and a surrounding ring, same centre). Better initialisation cannot fix an objective that is the wrong shape for the data.</a:t>
-            </a:r>
-          </a:p>
-          <a:p>
-            <a:pPr lvl="0" indent="0" marL="0">
-              <a:buNone/>
-            </a:pPr>
-          </a:p>
-          <a:p>
-            <a:pPr lvl="0" indent="0" marL="0">
-              <a:buNone/>
-            </a:pPr>
-            <a:r>
-              <a:rPr/>
-              <a:t>Ask the room: what would a “cluster” need to mean for this shape to be findable at all? The answer - density, not compactness - is where the next two sections go.</a:t>
+              <a:t>A dense smudge sitting inside a much larger, looser cloud, both centred in roughly the same place. Let the room look for a gap a linear or round boundary could exploit - there isn’t one, and that is the point.</a:t>
+            </a:r>
+          </a:p>
+          <a:p>
+            <a:pPr lvl="0" indent="0" marL="0">
+              <a:buNone/>
+            </a:pPr>
+          </a:p>
+          <a:p>
+            <a:pPr lvl="0" indent="0" marL="0">
+              <a:buNone/>
+            </a:pPr>
+            <a:r>
+              <a:rPr/>
+              <a:t>Contrast directly with the four visible clouds from section 2’s opening figure: same task (cluster with no labels), a completely different picture, and it should not be obvious yet which algorithm handles it.</a:t>
             </a:r>
           </a:p>
           <a:p>
@@ -2673,35 +2661,35 @@
             </a:pPr>
             <a:r>
               <a:rPr/>
-              <a:t>Introduce the dendrogram as an object before any linkage rule - the tree itself is the useful idea, and any linkage rule can build one. Say explicitly that choosing k after the fact, by cutting the tree at a height, is a genuinely different workflow from k-means, where k has to be fixed before the algorithm starts.</a:t>
-            </a:r>
-          </a:p>
-          <a:p>
-            <a:pPr lvl="0" indent="0" marL="0">
-              <a:buNone/>
-            </a:pPr>
-          </a:p>
-          <a:p>
-            <a:pPr lvl="0" indent="0" marL="0">
-              <a:buNone/>
-            </a:pPr>
-            <a:r>
-              <a:rPr/>
-              <a:t>The linkage criterion is where the real content is, and it is the next slide.</a:t>
-            </a:r>
-          </a:p>
-          <a:p>
-            <a:pPr lvl="0" indent="0" marL="0">
-              <a:buNone/>
-            </a:pPr>
-          </a:p>
-          <a:p>
-            <a:pPr lvl="0" indent="0" marL="0">
-              <a:buNone/>
-            </a:pPr>
-            <a:r>
-              <a:rPr/>
-              <a:t>Handout section 3.2.</a:t>
+              <a:t>Stress “no starting point fixes it” - this is not the local-minimum problem from section 2.2, which k-means++ addresses. This is a mismatch between what k-means optimises (compactness) and what the data actually looks like (a core and a surrounding ring, same centre). Better initialisation cannot fix an objective that is the wrong shape for the data.</a:t>
+            </a:r>
+          </a:p>
+          <a:p>
+            <a:pPr lvl="0" indent="0" marL="0">
+              <a:buNone/>
+            </a:pPr>
+          </a:p>
+          <a:p>
+            <a:pPr lvl="0" indent="0" marL="0">
+              <a:buNone/>
+            </a:pPr>
+            <a:r>
+              <a:rPr/>
+              <a:t>Ask the room: what would a “cluster” need to mean for this shape to be findable at all? The answer - density, not compactness - is where the next two sections go.</a:t>
+            </a:r>
+          </a:p>
+          <a:p>
+            <a:pPr lvl="0" indent="0" marL="0">
+              <a:buNone/>
+            </a:pPr>
+          </a:p>
+          <a:p>
+            <a:pPr lvl="0" indent="0" marL="0">
+              <a:buNone/>
+            </a:pPr>
+            <a:r>
+              <a:rPr/>
+              <a:t>Handout section 3.1.</a:t>
             </a:r>
           </a:p>
         </p:txBody>
@@ -2783,21 +2771,21 @@
             </a:pPr>
             <a:r>
               <a:rPr/>
-              <a:t>Four rules, four different biases - worth naming what each one is built to find, since the next slide is going to show all four failing on this particular dataset for two different reasons.</a:t>
-            </a:r>
-          </a:p>
-          <a:p>
-            <a:pPr lvl="0" indent="0" marL="0">
-              <a:buNone/>
-            </a:pPr>
-          </a:p>
-          <a:p>
-            <a:pPr lvl="0" indent="0" marL="0">
-              <a:buNone/>
-            </a:pPr>
-            <a:r>
-              <a:rPr/>
-              <a:t>Ward is worth pausing on: it is not a fourth, unrelated idea, it is k-means’ own objective expressed as a merge rule, so predict out loud that it should fail on this data for the same reason k-means just did.</a:t>
+              <a:t>Introduce the dendrogram as an object before any linkage rule - the tree itself is the useful idea, and any linkage rule can build one. Say explicitly that choosing k after the fact, by cutting the tree at a height, is a genuinely different workflow from k-means, where k has to be fixed before the algorithm starts.</a:t>
+            </a:r>
+          </a:p>
+          <a:p>
+            <a:pPr lvl="0" indent="0" marL="0">
+              <a:buNone/>
+            </a:pPr>
+          </a:p>
+          <a:p>
+            <a:pPr lvl="0" indent="0" marL="0">
+              <a:buNone/>
+            </a:pPr>
+            <a:r>
+              <a:rPr/>
+              <a:t>The linkage criterion is where the real content is, and it is the next slide.</a:t>
             </a:r>
           </a:p>
           <a:p>
@@ -2893,21 +2881,21 @@
             </a:pPr>
             <a:r>
               <a:rPr/>
-              <a:t>A branch peeling off single points one at a time, rather than splitting into two comparably sized halves, is the visual signature of chaining - point it out directly on the figure, even at this small 60-session sample.</a:t>
-            </a:r>
-          </a:p>
-          <a:p>
-            <a:pPr lvl="0" indent="0" marL="0">
-              <a:buNone/>
-            </a:pPr>
-          </a:p>
-          <a:p>
-            <a:pPr lvl="0" indent="0" marL="0">
-              <a:buNone/>
-            </a:pPr>
-            <a:r>
-              <a:rPr/>
-              <a:t>This is a preview of what the full 1,500-session numbers on the next slide make precise: chaining is not a rare edge case here, it is what several of the four linkage rules do on the whole dataset.</a:t>
+              <a:t>Four rules, four different biases - worth naming what each one is built to find, since the next slide is going to show all four failing on this particular dataset for two different reasons.</a:t>
+            </a:r>
+          </a:p>
+          <a:p>
+            <a:pPr lvl="0" indent="0" marL="0">
+              <a:buNone/>
+            </a:pPr>
+          </a:p>
+          <a:p>
+            <a:pPr lvl="0" indent="0" marL="0">
+              <a:buNone/>
+            </a:pPr>
+            <a:r>
+              <a:rPr/>
+              <a:t>Ward is worth pausing on: it is not a fourth, unrelated idea, it is k-means’ own objective expressed as a merge rule, so predict out loud that it should fail on this data for the same reason k-means just did.</a:t>
             </a:r>
           </a:p>
           <a:p>
@@ -3113,29 +3101,21 @@
             </a:pPr>
             <a:r>
               <a:rPr/>
-              <a:t>Read the two failure modes separately, they are not the same failure. Ward and complete fail for the same reason k-means did - both still search for compact, comparably sized pieces, which this shape does not have. Single and average instead produce one cluster of 1,499 points and a cluster of size 1 - not a discovery, but chaining: the algorithm absorbed almost the entire dataset along its densest path before running out of points to merge.</a:t>
-            </a:r>
-          </a:p>
-          <a:p>
-            <a:pPr lvl="0" indent="0" marL="0">
-              <a:buNone/>
-            </a:pPr>
-          </a:p>
-          <a:p>
-            <a:pPr lvl="0" indent="0" marL="0">
-              <a:buNone/>
-            </a:pPr>
-            <a:r>
-              <a:rPr/>
-              <a:t>Land the summary line: </a:t>
-            </a:r>
-            <a:r>
-              <a:rPr b="1"/>
-              <a:t>all four linkage rules score at or below zero ARI</a:t>
-            </a:r>
-            <a:r>
-              <a:rPr/>
-              <a:t>. Hierarchical clustering, by itself, is not a fix for the shape problem - it needs a rule that looks for density rather than compactness or chained proximity.</a:t>
+              <a:t>Ward joins compact, comparably sized groups at every level - look how balanced the branches are. That is its variance objective at work, the same one k-means has, and it is exactly why Ward cannot follow a dense core inside a diffuse ring: it keeps making round pieces.</a:t>
+            </a:r>
+          </a:p>
+          <a:p>
+            <a:pPr lvl="0" indent="0" marL="0">
+              <a:buNone/>
+            </a:pPr>
+          </a:p>
+          <a:p>
+            <a:pPr lvl="0" indent="0" marL="0">
+              <a:buNone/>
+            </a:pPr>
+            <a:r>
+              <a:rPr/>
+              <a:t>Show how to read it: draw a horizontal line across the tree, and the number of branches it crosses is k. Then contrast with what the next slide shows for single and average linkage on all 1,500 sessions - chaining, one cluster of 1,499 and one of 1 - which this balanced Ward tree does not do.</a:t>
             </a:r>
           </a:p>
           <a:p>
@@ -3231,7 +3211,43 @@
             </a:pPr>
             <a:r>
               <a:rPr/>
-              <a:t>Twelve minutes. What comes back after the break is the method that actually solves the bot/human problem - worth saying, so the room returns with the open question fresh: what would a cluster need to mean for that ring-around-a-core shape to be findable?</a:t>
+              <a:t>Read the two failure modes separately, they are not the same failure. Ward and complete fail for the same reason k-means did - both still search for compact, comparably sized pieces, which this shape does not have. Single and average instead produce one cluster of 1,499 points and a cluster of size 1 - not a discovery, but chaining: the algorithm absorbed almost the entire dataset along its densest path before running out of points to merge.</a:t>
+            </a:r>
+          </a:p>
+          <a:p>
+            <a:pPr lvl="0" indent="0" marL="0">
+              <a:buNone/>
+            </a:pPr>
+          </a:p>
+          <a:p>
+            <a:pPr lvl="0" indent="0" marL="0">
+              <a:buNone/>
+            </a:pPr>
+            <a:r>
+              <a:rPr/>
+              <a:t>Land the summary line: </a:t>
+            </a:r>
+            <a:r>
+              <a:rPr b="1"/>
+              <a:t>all four linkage rules score at or below zero ARI</a:t>
+            </a:r>
+            <a:r>
+              <a:rPr/>
+              <a:t>. Hierarchical clustering, by itself, is not a fix for the shape problem - it needs a rule that looks for density rather than compactness or chained proximity.</a:t>
+            </a:r>
+          </a:p>
+          <a:p>
+            <a:pPr lvl="0" indent="0" marL="0">
+              <a:buNone/>
+            </a:pPr>
+          </a:p>
+          <a:p>
+            <a:pPr lvl="0" indent="0" marL="0">
+              <a:buNone/>
+            </a:pPr>
+            <a:r>
+              <a:rPr/>
+              <a:t>Handout section 3.2.</a:t>
             </a:r>
           </a:p>
         </p:txBody>
@@ -3313,35 +3329,7 @@
             </a:pPr>
             <a:r>
               <a:rPr/>
-              <a:t>Say the name in full once, then use the acronym. Walk the three point types slowly - core, border, noise - since the next slide’s definition of a cluster depends on all three.</a:t>
-            </a:r>
-          </a:p>
-          <a:p>
-            <a:pPr lvl="0" indent="0" marL="0">
-              <a:buNone/>
-            </a:pPr>
-          </a:p>
-          <a:p>
-            <a:pPr lvl="0" indent="0" marL="0">
-              <a:buNone/>
-            </a:pPr>
-            <a:r>
-              <a:rPr/>
-              <a:t>Nothing here mentions a centre or a mean - flag that explicitly as the structural difference from everything in sections 2 and 3.2.</a:t>
-            </a:r>
-          </a:p>
-          <a:p>
-            <a:pPr lvl="0" indent="0" marL="0">
-              <a:buNone/>
-            </a:pPr>
-          </a:p>
-          <a:p>
-            <a:pPr lvl="0" indent="0" marL="0">
-              <a:buNone/>
-            </a:pPr>
-            <a:r>
-              <a:rPr/>
-              <a:t>Handout section 3.3.</a:t>
+              <a:t>Twelve minutes. What comes back after the break is the method that actually solves the bot/human problem - worth saying, so the room returns with the open question fresh: what would a cluster need to mean for that ring-around-a-core shape to be findable?</a:t>
             </a:r>
           </a:p>
         </p:txBody>
@@ -3423,21 +3411,21 @@
             </a:pPr>
             <a:r>
               <a:rPr/>
-              <a:t>This is the slide that answers the question left open before the break: a cluster defined by density, rather than compactness, can be a ring around a core, because nothing in the definition forces round or convex shapes.</a:t>
-            </a:r>
-          </a:p>
-          <a:p>
-            <a:pPr lvl="0" indent="0" marL="0">
-              <a:buNone/>
-            </a:pPr>
-          </a:p>
-          <a:p>
-            <a:pPr lvl="0" indent="0" marL="0">
-              <a:buNone/>
-            </a:pPr>
-            <a:r>
-              <a:rPr/>
-              <a:t>The “noise is first-class” point matters on its own - every method in sections 2 and 3.2 must assign every point to exactly one cluster. DBSCAN does not, and section 3.3’s numbers later show exactly what that buys.</a:t>
+              <a:t>Say the name in full once, then use the acronym. Walk the three point types slowly - core, border, noise - since the next slide’s definition of a cluster depends on all three.</a:t>
+            </a:r>
+          </a:p>
+          <a:p>
+            <a:pPr lvl="0" indent="0" marL="0">
+              <a:buNone/>
+            </a:pPr>
+          </a:p>
+          <a:p>
+            <a:pPr lvl="0" indent="0" marL="0">
+              <a:buNone/>
+            </a:pPr>
+            <a:r>
+              <a:rPr/>
+              <a:t>Nothing here mentions a centre or a mean - flag that explicitly as the structural difference from everything in sections 2 and 3.2.</a:t>
             </a:r>
           </a:p>
           <a:p>
@@ -3533,31 +3521,21 @@
             </a:pPr>
             <a:r>
               <a:rPr/>
-              <a:t>Two failure directions, both bad, and </a:t>
-            </a:r>
-            <a:r>
-              <a:rPr>
-                <a:latin typeface="Courier"/>
-              </a:rPr>
-              <a:t>eps</a:t>
-            </a:r>
-            <a:r>
-              <a:rPr/>
-              <a:t> sits between them - motivate the k-distance plot as a principled way to find that middle point rather than guessing.</a:t>
-            </a:r>
-          </a:p>
-          <a:p>
-            <a:pPr lvl="0" indent="0" marL="0">
-              <a:buNone/>
-            </a:pPr>
-          </a:p>
-          <a:p>
-            <a:pPr lvl="0" indent="0" marL="0">
-              <a:buNone/>
-            </a:pPr>
-            <a:r>
-              <a:rPr/>
-              <a:t>Ask the room what shape they expect the sorted-distance curve to have before showing it. The intuition: flat while you are still inside dense regions, then a sharp climb once points start being genuinely far from their neighbours.</a:t>
+              <a:t>This is the slide that answers the question left open before the break: a cluster defined by density, rather than compactness, can be a ring around a core, because nothing in the definition forces round or convex shapes.</a:t>
+            </a:r>
+          </a:p>
+          <a:p>
+            <a:pPr lvl="0" indent="0" marL="0">
+              <a:buNone/>
+            </a:pPr>
+          </a:p>
+          <a:p>
+            <a:pPr lvl="0" indent="0" marL="0">
+              <a:buNone/>
+            </a:pPr>
+            <a:r>
+              <a:rPr/>
+              <a:t>The “noise is first-class” point matters on its own - every method in sections 2 and 3.2 must assign every point to exactly one cluster. DBSCAN does not, and section 3.3’s numbers later show exactly what that buys.</a:t>
             </a:r>
           </a:p>
           <a:p>
@@ -3653,27 +3631,31 @@
             </a:pPr>
             <a:r>
               <a:rPr/>
-              <a:t>10th-nearest-neighbour distance, sorted, for all 1,500 sessions. The curve stays low and flat through most of the range and bends sharply upward near the end.</a:t>
-            </a:r>
-          </a:p>
-          <a:p>
-            <a:pPr lvl="0" indent="0" marL="0">
-              <a:buNone/>
-            </a:pPr>
-          </a:p>
-          <a:p>
-            <a:pPr lvl="0" indent="0" marL="0">
-              <a:buNone/>
-            </a:pPr>
+              <a:t>Two failure directions, both bad, and </a:t>
+            </a:r>
             <a:r>
               <a:rPr>
                 <a:latin typeface="Courier"/>
               </a:rPr>
-              <a:t>eps = 0.30</a:t>
-            </a:r>
-            <a:r>
-              <a:rPr/>
-              <a:t> sits just past the bend, in the flat region - point at exactly where on the curve that is. This is the value used on the next slide’s results.</a:t>
+              <a:t>eps</a:t>
+            </a:r>
+            <a:r>
+              <a:rPr/>
+              <a:t> sits between them - motivate the k-distance plot as a principled way to find that middle point rather than guessing.</a:t>
+            </a:r>
+          </a:p>
+          <a:p>
+            <a:pPr lvl="0" indent="0" marL="0">
+              <a:buNone/>
+            </a:pPr>
+          </a:p>
+          <a:p>
+            <a:pPr lvl="0" indent="0" marL="0">
+              <a:buNone/>
+            </a:pPr>
+            <a:r>
+              <a:rPr/>
+              <a:t>Ask the room what shape they expect the sorted-distance curve to have before showing it. The intuition: flat while you are still inside dense regions, then a sharp climb once points start being genuinely far from their neighbours.</a:t>
             </a:r>
           </a:p>
           <a:p>
@@ -3769,21 +3751,27 @@
             </a:pPr>
             <a:r>
               <a:rPr/>
-              <a:t>0.941 against k-means’ -0.046 and Ward’s -0.062 on the identical dataset - same data, a method built for the actual shape.</a:t>
-            </a:r>
-          </a:p>
-          <a:p>
-            <a:pPr lvl="0" indent="0" marL="0">
-              <a:buNone/>
-            </a:pPr>
-          </a:p>
-          <a:p>
-            <a:pPr lvl="0" indent="0" marL="0">
-              <a:buNone/>
-            </a:pPr>
-            <a:r>
-              <a:rPr/>
-              <a:t>Worth reading the noise points individually rather than as a rounding error: checking their true label shows all 13 are genuine human sessions, not misplaced bots - sessions whose one week of browsing happened, by chance, to look almost as mechanically regular as a script’s. DBSCAN’s answer for them - not confidently either group - is more honest than a forced binary label, and it is an answer no method in section 2 or 3.2 can even give.</a:t>
+              <a:t>10th-nearest-neighbour distance, sorted, for all 1,500 sessions. The curve stays low and flat through most of the range and bends sharply upward near the end.</a:t>
+            </a:r>
+          </a:p>
+          <a:p>
+            <a:pPr lvl="0" indent="0" marL="0">
+              <a:buNone/>
+            </a:pPr>
+          </a:p>
+          <a:p>
+            <a:pPr lvl="0" indent="0" marL="0">
+              <a:buNone/>
+            </a:pPr>
+            <a:r>
+              <a:rPr>
+                <a:latin typeface="Courier"/>
+              </a:rPr>
+              <a:t>eps = 0.30</a:t>
+            </a:r>
+            <a:r>
+              <a:rPr/>
+              <a:t> sits where the climb begins, a little above the knee this week’s curve gives, 0.258 - point at exactly where on the curve that is, because section 3.4 comes back to that gap. This is the value used on the next slide’s results.</a:t>
             </a:r>
           </a:p>
           <a:p>
@@ -3879,21 +3867,21 @@
             </a:pPr>
             <a:r>
               <a:rPr/>
-              <a:t>True group, k-means, and DBSCAN on the same axes. DBSCAN’s cluster boundary follows the actual density gap; k-means’ straight cut does not exist in this data at all - point directly at the contrast rather than describing it.</a:t>
-            </a:r>
-          </a:p>
-          <a:p>
-            <a:pPr lvl="0" indent="0" marL="0">
-              <a:buNone/>
-            </a:pPr>
-          </a:p>
-          <a:p>
-            <a:pPr lvl="0" indent="0" marL="0">
-              <a:buNone/>
-            </a:pPr>
-            <a:r>
-              <a:rPr/>
-              <a:t>This is the single figure to leave up longest in this segment - it makes the whole section’s argument visible in one look.</a:t>
+              <a:t>0.941 against k-means’ -0.046 and Ward’s -0.062 on the identical dataset - same data, a method built for the actual shape.</a:t>
+            </a:r>
+          </a:p>
+          <a:p>
+            <a:pPr lvl="0" indent="0" marL="0">
+              <a:buNone/>
+            </a:pPr>
+          </a:p>
+          <a:p>
+            <a:pPr lvl="0" indent="0" marL="0">
+              <a:buNone/>
+            </a:pPr>
+            <a:r>
+              <a:rPr/>
+              <a:t>Worth reading the noise points individually rather than as a rounding error: checking their true label shows all 13 are genuine human sessions, not misplaced bots - sessions whose one week of browsing happened, by chance, to look almost as mechanically regular as a script’s. DBSCAN’s answer for them - not confidently either group - is more honest than a forced binary label, and it is an answer no method in section 2 or 3.2 can even give.</a:t>
             </a:r>
           </a:p>
           <a:p>
@@ -3989,103 +3977,35 @@
             </a:pPr>
             <a:r>
               <a:rPr/>
-              <a:t>Seven weeks regenerated from the same generator - same site, same bot fraction, same shapes, different individual sessions. Read the two ARI columns against each other before saying anything.</a:t>
-            </a:r>
-          </a:p>
-          <a:p>
-            <a:pPr lvl="0" indent="0" marL="0">
-              <a:buNone/>
-            </a:pPr>
-          </a:p>
-          <a:p>
-            <a:pPr lvl="0" indent="0" marL="0">
-              <a:buNone/>
-            </a:pPr>
-            <a:r>
-              <a:rPr b="1"/>
-              <a:t>The constant does not transfer.</a:t>
-            </a:r>
-            <a:r>
-              <a:rPr/>
-              <a:t> On two of the seven, DBSCAN returns a single cluster and an ARI of zero. Not a worse answer - no answer at all. The reason is in the knee column: 0.30 is larger than any of these weeks’ own curves suggest, and on those two draws it is large enough to bridge the density gap and swallow the ring into the core.</a:t>
-            </a:r>
-          </a:p>
-          <a:p>
-            <a:pPr lvl="0" indent="0" marL="0">
-              <a:buNone/>
-            </a:pPr>
-          </a:p>
-          <a:p>
-            <a:pPr lvl="0" indent="0" marL="0">
-              <a:buNone/>
-            </a:pPr>
-            <a:r>
-              <a:rPr b="1"/>
-              <a:t>The recipe does transfer.</a:t>
-            </a:r>
-            <a:r>
-              <a:rPr/>
-              <a:t> Re-read </a:t>
-            </a:r>
-            <a:r>
-              <a:rPr>
-                <a:latin typeface="Courier"/>
-              </a:rPr>
-              <a:t>eps</a:t>
-            </a:r>
-            <a:r>
-              <a:rPr/>
-              <a:t> off each week’s own k-distance curve and the split comes back every time, at 0.79 to 0.89.</a:t>
-            </a:r>
-          </a:p>
-          <a:p>
-            <a:pPr lvl="0" indent="0" marL="0">
-              <a:buNone/>
-            </a:pPr>
-          </a:p>
-          <a:p>
-            <a:pPr lvl="0" indent="0" marL="0">
-              <a:buNone/>
-            </a:pPr>
-            <a:r>
-              <a:rPr/>
-              <a:t>Now the row to sit on, and it is the first one. On the week we studied, the hand-picked 0.30 </a:t>
-            </a:r>
-            <a:r>
-              <a:rPr i="1"/>
-              <a:t>beats</a:t>
-            </a:r>
-            <a:r>
-              <a:rPr/>
-              <a:t> the recipe - 0.941 against 0.890. Say the consequence out loud: the tuned constant is better where it works and absent where it does not.</a:t>
-            </a:r>
-          </a:p>
-          <a:p>
-            <a:pPr lvl="0" indent="0" marL="0">
-              <a:buNone/>
-            </a:pPr>
-          </a:p>
-          <a:p>
-            <a:pPr lvl="0" indent="0" marL="0">
-              <a:buNone/>
-            </a:pPr>
-            <a:r>
-              <a:rPr/>
-              <a:t>That is not a fact about DBSCAN. It is what fitting a constant to one sample buys and costs, and lesson 5 said the same thing about trusting a single train/test split. Ask the room which of the two they would ship to Aurora’s security team, and why.</a:t>
-            </a:r>
-          </a:p>
-          <a:p>
-            <a:pPr lvl="0" indent="0" marL="0">
-              <a:buNone/>
-            </a:pPr>
-          </a:p>
-          <a:p>
-            <a:pPr lvl="0" indent="0" marL="0">
-              <a:buNone/>
-            </a:pPr>
-            <a:r>
-              <a:rPr/>
-              <a:t>Handout section 3.4.</a:t>
+              <a:t>True group, k-means, and DBSCAN on the same axes. DBSCAN’s cluster boundary follows the actual density gap; k-means’ straight cut does not exist in this data at all - point directly at the contrast rather than describing it.</a:t>
+            </a:r>
+          </a:p>
+          <a:p>
+            <a:pPr lvl="0" indent="0" marL="0">
+              <a:buNone/>
+            </a:pPr>
+          </a:p>
+          <a:p>
+            <a:pPr lvl="0" indent="0" marL="0">
+              <a:buNone/>
+            </a:pPr>
+            <a:r>
+              <a:rPr/>
+              <a:t>This is the single figure to leave up longest in this segment - it makes the whole section’s argument visible in one look.</a:t>
+            </a:r>
+          </a:p>
+          <a:p>
+            <a:pPr lvl="0" indent="0" marL="0">
+              <a:buNone/>
+            </a:pPr>
+          </a:p>
+          <a:p>
+            <a:pPr lvl="0" indent="0" marL="0">
+              <a:buNone/>
+            </a:pPr>
+            <a:r>
+              <a:rPr/>
+              <a:t>Handout section 3.3.</a:t>
             </a:r>
           </a:p>
         </p:txBody>
@@ -4167,35 +4087,103 @@
             </a:pPr>
             <a:r>
               <a:rPr/>
-              <a:t>This table is worth reading as a decision the data makes, not the analyst. The predictable mistake, from the handout: having watched k-means recover the customer segments almost perfectly in section 2, the reasonable conclusion is that clustering as a category works well. The instinct is not wrong about k-means specifically - it is wrong about clustering being one method with one assumption.</a:t>
-            </a:r>
-          </a:p>
-          <a:p>
-            <a:pPr lvl="0" indent="0" marL="0">
-              <a:buNone/>
-            </a:pPr>
-          </a:p>
-          <a:p>
-            <a:pPr lvl="0" indent="0" marL="0">
-              <a:buNone/>
-            </a:pPr>
-            <a:r>
-              <a:rPr/>
-              <a:t>k-means and Ward both optimise “compact and round”; DBSCAN optimises “densely connected” - a nested structure like today’s bot core is exactly where the two notions give opposite answers, and which definition is right is a property of the data, not the algorithm.</a:t>
-            </a:r>
-          </a:p>
-          <a:p>
-            <a:pPr lvl="0" indent="0" marL="0">
-              <a:buNone/>
-            </a:pPr>
-          </a:p>
-          <a:p>
-            <a:pPr lvl="0" indent="0" marL="0">
-              <a:buNone/>
-            </a:pPr>
-            <a:r>
-              <a:rPr/>
-              <a:t>Handout section 3.5.</a:t>
+              <a:t>Seven weeks regenerated from the same generator - same site, same bot fraction, same shapes, different individual sessions. Read the two ARI columns against each other before saying anything.</a:t>
+            </a:r>
+          </a:p>
+          <a:p>
+            <a:pPr lvl="0" indent="0" marL="0">
+              <a:buNone/>
+            </a:pPr>
+          </a:p>
+          <a:p>
+            <a:pPr lvl="0" indent="0" marL="0">
+              <a:buNone/>
+            </a:pPr>
+            <a:r>
+              <a:rPr b="1"/>
+              <a:t>The constant does not transfer.</a:t>
+            </a:r>
+            <a:r>
+              <a:rPr/>
+              <a:t> On two of the seven, DBSCAN returns a single cluster and an ARI of zero. Not a worse answer - no answer at all. The reason is in the knee column: 0.30 is larger than any of these weeks’ own curves suggest, and on those two draws it is large enough to bridge the density gap and swallow the ring into the core.</a:t>
+            </a:r>
+          </a:p>
+          <a:p>
+            <a:pPr lvl="0" indent="0" marL="0">
+              <a:buNone/>
+            </a:pPr>
+          </a:p>
+          <a:p>
+            <a:pPr lvl="0" indent="0" marL="0">
+              <a:buNone/>
+            </a:pPr>
+            <a:r>
+              <a:rPr b="1"/>
+              <a:t>The recipe does transfer.</a:t>
+            </a:r>
+            <a:r>
+              <a:rPr/>
+              <a:t> Re-read </a:t>
+            </a:r>
+            <a:r>
+              <a:rPr>
+                <a:latin typeface="Courier"/>
+              </a:rPr>
+              <a:t>eps</a:t>
+            </a:r>
+            <a:r>
+              <a:rPr/>
+              <a:t> off each week’s own k-distance curve and the split comes back every time, at 0.79 to 0.89.</a:t>
+            </a:r>
+          </a:p>
+          <a:p>
+            <a:pPr lvl="0" indent="0" marL="0">
+              <a:buNone/>
+            </a:pPr>
+          </a:p>
+          <a:p>
+            <a:pPr lvl="0" indent="0" marL="0">
+              <a:buNone/>
+            </a:pPr>
+            <a:r>
+              <a:rPr/>
+              <a:t>Now the row to sit on, and it is the first one. On the week we studied, the hand-picked 0.30 </a:t>
+            </a:r>
+            <a:r>
+              <a:rPr i="1"/>
+              <a:t>beats</a:t>
+            </a:r>
+            <a:r>
+              <a:rPr/>
+              <a:t> the recipe - 0.941 against 0.890. Say the consequence out loud: the tuned constant is better where it works and absent where it does not.</a:t>
+            </a:r>
+          </a:p>
+          <a:p>
+            <a:pPr lvl="0" indent="0" marL="0">
+              <a:buNone/>
+            </a:pPr>
+          </a:p>
+          <a:p>
+            <a:pPr lvl="0" indent="0" marL="0">
+              <a:buNone/>
+            </a:pPr>
+            <a:r>
+              <a:rPr/>
+              <a:t>That is not a fact about DBSCAN. It is what fitting a constant to one sample buys and costs, and lesson 5 said the same thing about trusting a single train/test split. Ask the room which of the two they would ship to Aurora’s security team, and why.</a:t>
+            </a:r>
+          </a:p>
+          <a:p>
+            <a:pPr lvl="0" indent="0" marL="0">
+              <a:buNone/>
+            </a:pPr>
+          </a:p>
+          <a:p>
+            <a:pPr lvl="0" indent="0" marL="0">
+              <a:buNone/>
+            </a:pPr>
+            <a:r>
+              <a:rPr/>
+              <a:t>Handout section 3.4.</a:t>
             </a:r>
           </a:p>
         </p:txBody>
@@ -4387,55 +4375,35 @@
             </a:pPr>
             <a:r>
               <a:rPr/>
-              <a:t>Run Notebooks/02_hierarchical_and_dbscan.ipynb. Twenty minutes.</a:t>
-            </a:r>
-          </a:p>
-          <a:p>
-            <a:pPr lvl="0" indent="0" marL="0">
-              <a:buNone/>
-            </a:pPr>
-          </a:p>
-          <a:p>
-            <a:pPr lvl="0" indent="0" marL="0">
-              <a:buNone/>
-            </a:pPr>
-            <a:r>
-              <a:rPr/>
-              <a:t>Protect the </a:t>
-            </a:r>
-            <a:r>
-              <a:rPr>
-                <a:latin typeface="Courier"/>
-              </a:rPr>
-              <a:t>eps</a:t>
-            </a:r>
-            <a:r>
-              <a:rPr/>
-              <a:t> sweep if time is short - watching ARI rise and then fall again as </a:t>
-            </a:r>
-            <a:r>
-              <a:rPr>
-                <a:latin typeface="Courier"/>
-              </a:rPr>
-              <a:t>eps</a:t>
-            </a:r>
-            <a:r>
-              <a:rPr/>
-              <a:t> moves past the bend makes the “too small fractures, too large merges” argument concrete rather than asserted.</a:t>
-            </a:r>
-          </a:p>
-          <a:p>
-            <a:pPr lvl="0" indent="0" marL="0">
-              <a:buNone/>
-            </a:pPr>
-          </a:p>
-          <a:p>
-            <a:pPr lvl="0" indent="0" marL="0">
-              <a:buNone/>
-            </a:pPr>
-            <a:r>
-              <a:rPr/>
-              <a:t>Have them check the 13 noise points’ true labels themselves rather than reading the number off a slide.</a:t>
+              <a:t>This table is worth reading as a decision the data makes, not the analyst. The predictable mistake, from the handout: having watched k-means recover the customer segments almost perfectly in section 2, the reasonable conclusion is that clustering as a category works well. The instinct is not wrong about k-means specifically - it is wrong about clustering being one method with one assumption.</a:t>
+            </a:r>
+          </a:p>
+          <a:p>
+            <a:pPr lvl="0" indent="0" marL="0">
+              <a:buNone/>
+            </a:pPr>
+          </a:p>
+          <a:p>
+            <a:pPr lvl="0" indent="0" marL="0">
+              <a:buNone/>
+            </a:pPr>
+            <a:r>
+              <a:rPr/>
+              <a:t>k-means and Ward both optimise “compact and round”; DBSCAN optimises “densely connected” - a nested structure like today’s bot core is exactly where the two notions give opposite answers, and which definition is right is a property of the data, not the algorithm.</a:t>
+            </a:r>
+          </a:p>
+          <a:p>
+            <a:pPr lvl="0" indent="0" marL="0">
+              <a:buNone/>
+            </a:pPr>
+          </a:p>
+          <a:p>
+            <a:pPr lvl="0" indent="0" marL="0">
+              <a:buNone/>
+            </a:pPr>
+            <a:r>
+              <a:rPr/>
+              <a:t>Handout section 3.5.</a:t>
             </a:r>
           </a:p>
         </p:txBody>
@@ -4517,35 +4485,55 @@
             </a:pPr>
             <a:r>
               <a:rPr/>
-              <a:t>Return explicitly to the asymmetry flagged in section 1: everything scored with ARI today is checkable only because the truth is published. This section is about what is left when it is not.</a:t>
-            </a:r>
-          </a:p>
-          <a:p>
-            <a:pPr lvl="0" indent="0" marL="0">
-              <a:buNone/>
-            </a:pPr>
-          </a:p>
-          <a:p>
-            <a:pPr lvl="0" indent="0" marL="0">
-              <a:buNone/>
-            </a:pPr>
-            <a:r>
-              <a:rPr/>
-              <a:t>Set up the two-way split before naming either family - internal (only the clustering and the data) versus external (an outside answer key) - the next two slides take one each.</a:t>
-            </a:r>
-          </a:p>
-          <a:p>
-            <a:pPr lvl="0" indent="0" marL="0">
-              <a:buNone/>
-            </a:pPr>
-          </a:p>
-          <a:p>
-            <a:pPr lvl="0" indent="0" marL="0">
-              <a:buNone/>
-            </a:pPr>
-            <a:r>
-              <a:rPr/>
-              <a:t>Handout section 4.</a:t>
+              <a:t>Run Notebooks/02_hierarchical_and_dbscan.ipynb. Twenty minutes.</a:t>
+            </a:r>
+          </a:p>
+          <a:p>
+            <a:pPr lvl="0" indent="0" marL="0">
+              <a:buNone/>
+            </a:pPr>
+          </a:p>
+          <a:p>
+            <a:pPr lvl="0" indent="0" marL="0">
+              <a:buNone/>
+            </a:pPr>
+            <a:r>
+              <a:rPr/>
+              <a:t>Protect the </a:t>
+            </a:r>
+            <a:r>
+              <a:rPr>
+                <a:latin typeface="Courier"/>
+              </a:rPr>
+              <a:t>eps</a:t>
+            </a:r>
+            <a:r>
+              <a:rPr/>
+              <a:t> sweep if time is short - watching ARI rise and then fall again as </a:t>
+            </a:r>
+            <a:r>
+              <a:rPr>
+                <a:latin typeface="Courier"/>
+              </a:rPr>
+              <a:t>eps</a:t>
+            </a:r>
+            <a:r>
+              <a:rPr/>
+              <a:t> moves past the bend makes the “too small fractures, too large merges” argument concrete rather than asserted.</a:t>
+            </a:r>
+          </a:p>
+          <a:p>
+            <a:pPr lvl="0" indent="0" marL="0">
+              <a:buNone/>
+            </a:pPr>
+          </a:p>
+          <a:p>
+            <a:pPr lvl="0" indent="0" marL="0">
+              <a:buNone/>
+            </a:pPr>
+            <a:r>
+              <a:rPr/>
+              <a:t>Have them check the 13 noise points’ true labels themselves rather than reading the number off a slide.</a:t>
             </a:r>
           </a:p>
         </p:txBody>
@@ -4627,21 +4615,21 @@
             </a:pPr>
             <a:r>
               <a:rPr/>
-              <a:t>Silhouette already appeared in section 2.3 as a way to choose k - here it is being recast as one member of a broader category, “internal metrics,” which is the useful generalisation.</a:t>
-            </a:r>
-          </a:p>
-          <a:p>
-            <a:pPr lvl="0" indent="0" marL="0">
-              <a:buNone/>
-            </a:pPr>
-          </a:p>
-          <a:p>
-            <a:pPr lvl="0" indent="0" marL="0">
-              <a:buNone/>
-            </a:pPr>
-            <a:r>
-              <a:rPr/>
-              <a:t>The WCSS caveat is worth spelling out: it cannot be used to compare k-means against DBSCAN, because DBSCAN does not even define centres the way WCSS needs. That limitation is part of why a family of alternatives exists at all.</a:t>
+              <a:t>Return explicitly to the asymmetry flagged in section 1: everything scored with ARI today is checkable only because the truth is published. This section is about what is left when it is not.</a:t>
+            </a:r>
+          </a:p>
+          <a:p>
+            <a:pPr lvl="0" indent="0" marL="0">
+              <a:buNone/>
+            </a:pPr>
+          </a:p>
+          <a:p>
+            <a:pPr lvl="0" indent="0" marL="0">
+              <a:buNone/>
+            </a:pPr>
+            <a:r>
+              <a:rPr/>
+              <a:t>Set up the two-way split before naming either family - internal (only the clustering and the data) versus external (an outside answer key) - the next two slides take one each.</a:t>
             </a:r>
           </a:p>
           <a:p>
@@ -4737,21 +4725,21 @@
             </a:pPr>
             <a:r>
               <a:rPr/>
-              <a:t>The examples of a real-world external signal matter more than the definition here - a downstream outcome (blocked and never returned) is the kind of proxy label that is available far more often than a clean, hand-verified truth, and it is worth spending a moment on that it counts even when partial or noisy.</a:t>
-            </a:r>
-          </a:p>
-          <a:p>
-            <a:pPr lvl="0" indent="0" marL="0">
-              <a:buNone/>
-            </a:pPr>
-          </a:p>
-          <a:p>
-            <a:pPr lvl="0" indent="0" marL="0">
-              <a:buNone/>
-            </a:pPr>
-            <a:r>
-              <a:rPr/>
-              <a:t>Set up the punchline explicitly: internal metrics can be confidently wrong, because they have no way to know the clustering’s underlying assumption is the wrong one for this data - only whether it is self-consistent. That is the next slide.</a:t>
+              <a:t>Silhouette already appeared in section 2.3 as a way to choose k - here it is being recast as one member of a broader category, “internal metrics,” which is the useful generalisation.</a:t>
+            </a:r>
+          </a:p>
+          <a:p>
+            <a:pPr lvl="0" indent="0" marL="0">
+              <a:buNone/>
+            </a:pPr>
+          </a:p>
+          <a:p>
+            <a:pPr lvl="0" indent="0" marL="0">
+              <a:buNone/>
+            </a:pPr>
+            <a:r>
+              <a:rPr/>
+              <a:t>The WCSS caveat is worth spelling out: it cannot be used to compare k-means against DBSCAN, because DBSCAN does not even define centres the way WCSS needs. That limitation is part of why a family of alternatives exists at all.</a:t>
             </a:r>
           </a:p>
           <a:p>
@@ -4847,21 +4835,21 @@
             </a:pPr>
             <a:r>
               <a:rPr/>
-              <a:t>This is the handout’s named predictable mistake, and it deserves to be said slowly. Ask the room directly: if you only had the silhouette score and not the ARI, would you have any hint that k-means’ clustering on the session data is worthless? The honest answer is no - the internal metric alone gives no warning.</a:t>
-            </a:r>
-          </a:p>
-          <a:p>
-            <a:pPr lvl="0" indent="0" marL="0">
-              <a:buNone/>
-            </a:pPr>
-          </a:p>
-          <a:p>
-            <a:pPr lvl="0" indent="0" marL="0">
-              <a:buNone/>
-            </a:pPr>
-            <a:r>
-              <a:rPr/>
-              <a:t>That is the whole reason external validation matters whenever any signal for it exists, even a rough one, and it is why this section sits between the clustering methods and PCA rather than being a footnote to section 2.</a:t>
+              <a:t>The examples of a real-world external signal matter more than the definition here - a downstream outcome (blocked and never returned) is the kind of proxy label that is available far more often than a clean, hand-verified truth, and it is worth spending a moment on that it counts even when partial or noisy.</a:t>
+            </a:r>
+          </a:p>
+          <a:p>
+            <a:pPr lvl="0" indent="0" marL="0">
+              <a:buNone/>
+            </a:pPr>
+          </a:p>
+          <a:p>
+            <a:pPr lvl="0" indent="0" marL="0">
+              <a:buNone/>
+            </a:pPr>
+            <a:r>
+              <a:rPr/>
+              <a:t>Set up the punchline explicitly: internal metrics can be confidently wrong, because they have no way to know the clustering’s underlying assumption is the wrong one for this data - only whether it is self-consistent. That is the next slide.</a:t>
             </a:r>
           </a:p>
           <a:p>
@@ -4957,35 +4945,35 @@
             </a:pPr>
             <a:r>
               <a:rPr/>
-              <a:t>Aurora’s account table has 8 columns. The block of warm cells among spend-related columns, and the separate block among engagement-related columns, is the correlation structure PCA is about to compress - point at both blocks directly.</a:t>
-            </a:r>
-          </a:p>
-          <a:p>
-            <a:pPr lvl="0" indent="0" marL="0">
-              <a:buNone/>
-            </a:pPr>
-          </a:p>
-          <a:p>
-            <a:pPr lvl="0" indent="0" marL="0">
-              <a:buNone/>
-            </a:pPr>
-            <a:r>
-              <a:rPr/>
-              <a:t>Say plainly what this figure is doing here: it is the motivation for everything that follows, not a result. Spend, basket value and mobile session count all move together because they partly reflect the same underlying tendency to spend - PCA is about to find that underlying tendency directly.</a:t>
-            </a:r>
-          </a:p>
-          <a:p>
-            <a:pPr lvl="0" indent="0" marL="0">
-              <a:buNone/>
-            </a:pPr>
-          </a:p>
-          <a:p>
-            <a:pPr lvl="0" indent="0" marL="0">
-              <a:buNone/>
-            </a:pPr>
-            <a:r>
-              <a:rPr/>
-              <a:t>Handout section 5.1.</a:t>
+              <a:t>This is the handout’s named predictable mistake, and it deserves to be said slowly. Ask the room directly: if you only had the silhouette score and not the ARI, would you have any hint that k-means’ clustering on the session data is worthless? The honest answer is no - the internal metric alone gives no warning. Worse, it points the wrong way: k-means’ useless split scores 0.401, DBSCAN’s correct one -0.106, because two compact halves are rounder than a core inside a ring.</a:t>
+            </a:r>
+          </a:p>
+          <a:p>
+            <a:pPr lvl="0" indent="0" marL="0">
+              <a:buNone/>
+            </a:pPr>
+          </a:p>
+          <a:p>
+            <a:pPr lvl="0" indent="0" marL="0">
+              <a:buNone/>
+            </a:pPr>
+            <a:r>
+              <a:rPr/>
+              <a:t>That is the whole reason external validation matters whenever any signal for it exists, even a rough one, and it is why this section sits between the clustering methods and PCA rather than being a footnote to section 2.</a:t>
+            </a:r>
+          </a:p>
+          <a:p>
+            <a:pPr lvl="0" indent="0" marL="0">
+              <a:buNone/>
+            </a:pPr>
+          </a:p>
+          <a:p>
+            <a:pPr lvl="0" indent="0" marL="0">
+              <a:buNone/>
+            </a:pPr>
+            <a:r>
+              <a:rPr/>
+              <a:t>Handout section 4.</a:t>
             </a:r>
           </a:p>
         </p:txBody>
@@ -5067,21 +5055,21 @@
             </a:pPr>
             <a:r>
               <a:rPr/>
-              <a:t>Give the intuition before any algebra, exactly as the handout does: PCA is looking for the direction that best tells points apart, not a mysterious transform. “Safe to discard” is the key phrase - it is what makes dimensionality reduction a defensible operation rather than just throwing information away.</a:t>
-            </a:r>
-          </a:p>
-          <a:p>
-            <a:pPr lvl="0" indent="0" marL="0">
-              <a:buNone/>
-            </a:pPr>
-          </a:p>
-          <a:p>
-            <a:pPr lvl="0" indent="0" marL="0">
-              <a:buNone/>
-            </a:pPr>
-            <a:r>
-              <a:rPr/>
-              <a:t>The next few slides give the two derivations the handout works through in full - state results here, point to the handout for the steps.</a:t>
+              <a:t>Aurora’s account table has 8 columns. The block of warm cells among spend-related columns, and the separate block among engagement-related columns, is the correlation structure PCA is about to compress - point at both blocks directly.</a:t>
+            </a:r>
+          </a:p>
+          <a:p>
+            <a:pPr lvl="0" indent="0" marL="0">
+              <a:buNone/>
+            </a:pPr>
+          </a:p>
+          <a:p>
+            <a:pPr lvl="0" indent="0" marL="0">
+              <a:buNone/>
+            </a:pPr>
+            <a:r>
+              <a:rPr/>
+              <a:t>Say plainly what this figure is doing here: it is the motivation for everything that follows, not a result. Spend, basket value and mobile session count all move together because they partly reflect the same underlying tendency to spend - PCA is about to find that underlying tendency directly.</a:t>
             </a:r>
           </a:p>
           <a:p>
@@ -5177,21 +5165,35 @@
             </a:pPr>
             <a:r>
               <a:rPr/>
-              <a:t>“Maximise variance” is meaningless until direction is separated from length - that is what the unit-length constraint buys. The handout works the constrained optimisation through a Lagrange multiplier in full - worth saying that word exists, not deriving it here.</a:t>
-            </a:r>
-          </a:p>
-          <a:p>
-            <a:pPr lvl="0" indent="0" marL="0">
-              <a:buNone/>
-            </a:pPr>
-          </a:p>
-          <a:p>
-            <a:pPr lvl="0" indent="0" marL="0">
-              <a:buNone/>
-            </a:pPr>
-            <a:r>
-              <a:rPr/>
-              <a:t>Handout section 5.2.</a:t>
+              <a:t>Give the intuition before any algebra, exactly as the handout does: PCA is looking for the direction that best tells points apart, not a mysterious transform. “Safe to discard” is the key phrase - it is what makes dimensionality reduction a defensible operation rather than just throwing information away.</a:t>
+            </a:r>
+          </a:p>
+          <a:p>
+            <a:pPr lvl="0" indent="0" marL="0">
+              <a:buNone/>
+            </a:pPr>
+          </a:p>
+          <a:p>
+            <a:pPr lvl="0" indent="0" marL="0">
+              <a:buNone/>
+            </a:pPr>
+            <a:r>
+              <a:rPr/>
+              <a:t>The next few slides give the two derivations the handout works through in full - state results here, point to the handout for the steps.</a:t>
+            </a:r>
+          </a:p>
+          <a:p>
+            <a:pPr lvl="0" indent="0" marL="0">
+              <a:buNone/>
+            </a:pPr>
+          </a:p>
+          <a:p>
+            <a:pPr lvl="0" indent="0" marL="0">
+              <a:buNone/>
+            </a:pPr>
+            <a:r>
+              <a:rPr/>
+              <a:t>Handout section 5.1.</a:t>
             </a:r>
           </a:p>
         </p:txBody>
@@ -5273,7 +5275,7 @@
             </a:pPr>
             <a:r>
               <a:rPr/>
-              <a:t>Σ is the sample covariance matrix - for standardised columns, its diagonal is 1 and its off-diagonal entries are correlations, the same numbers the previous figure showed as colours.</a:t>
+              <a:t>“Maximise variance” is meaningless until direction is separated from length - that is what the unit-length constraint buys. The handout works the constrained optimisation through a Lagrange multiplier in full - worth saying that word exists, not deriving it here.</a:t>
             </a:r>
           </a:p>
           <a:p>
@@ -5369,29 +5371,7 @@
             </a:pPr>
             <a:r>
               <a:rPr/>
-              <a:t>State the result, not the Lagrangian steps that get there - those are handout section 5.2, in full. Say what this equation means in words: directions that solve the constrained maximisation are exactly the eigenvectors of the covariance matrix, with λ the corresponding eigenvalue.</a:t>
-            </a:r>
-          </a:p>
-          <a:p>
-            <a:pPr lvl="0" indent="0" marL="0">
-              <a:buNone/>
-            </a:pPr>
-          </a:p>
-          <a:p>
-            <a:pPr lvl="0" indent="0" marL="0">
-              <a:buNone/>
-            </a:pPr>
-            <a:r>
-              <a:rPr/>
-              <a:t>Substituting back gives vᵀΣv = λ - the variance a direction captures </a:t>
-            </a:r>
-            <a:r>
-              <a:rPr b="1"/>
-              <a:t>is</a:t>
-            </a:r>
-            <a:r>
-              <a:rPr/>
-              <a:t> its eigenvalue. That single fact is the bridge from “an eigenvector” to “a principal component,” and it is the fact worth the class actually remembering.</a:t>
+              <a:t>Σ is the sample covariance matrix - for standardised columns, its diagonal is 1 and its off-diagonal entries are correlations, the same numbers the previous figure showed as colours.</a:t>
             </a:r>
           </a:p>
           <a:p>
@@ -5583,29 +5563,29 @@
             </a:pPr>
             <a:r>
               <a:rPr/>
-              <a:t>This slide turns the previous slide’s single equation into the actual recipe: sort eigenvalues, keep eigenvectors in that order, and that ordered list </a:t>
-            </a:r>
-            <a:r>
-              <a:rPr i="1"/>
+              <a:t>State the result, not the Lagrangian steps that get there - those are handout section 5.2, in full. Say what this equation means in words: directions that solve the constrained maximisation are exactly the eigenvectors of the covariance matrix, with λ the corresponding eigenvalue.</a:t>
+            </a:r>
+          </a:p>
+          <a:p>
+            <a:pPr lvl="0" indent="0" marL="0">
+              <a:buNone/>
+            </a:pPr>
+          </a:p>
+          <a:p>
+            <a:pPr lvl="0" indent="0" marL="0">
+              <a:buNone/>
+            </a:pPr>
+            <a:r>
+              <a:rPr/>
+              <a:t>Substituting back gives vᵀΣv = λ - the variance a direction captures </a:t>
+            </a:r>
+            <a:r>
+              <a:rPr b="1"/>
               <a:t>is</a:t>
             </a:r>
             <a:r>
               <a:rPr/>
-              <a:t> PCA. Worth saying explicitly that this is the entire algorithm once the eigendecomposition is in hand - everything before this was justifying why eigenvectors are the right thing to compute at all.</a:t>
-            </a:r>
-          </a:p>
-          <a:p>
-            <a:pPr lvl="0" indent="0" marL="0">
-              <a:buNone/>
-            </a:pPr>
-          </a:p>
-          <a:p>
-            <a:pPr lvl="0" indent="0" marL="0">
-              <a:buNone/>
-            </a:pPr>
-            <a:r>
-              <a:rPr/>
-              <a:t>The automatic-orthogonality point is worth a beat: it is not a separate constraint PCA has to enforce, it falls out of Σ being symmetric.</a:t>
+              <a:t> its eigenvalue. That single fact is the bridge from “an eigenvector” to “a principal component,” and it is the fact worth the class actually remembering.</a:t>
             </a:r>
           </a:p>
           <a:p>
@@ -5701,31 +5681,29 @@
             </a:pPr>
             <a:r>
               <a:rPr/>
-              <a:t>Two standardised features from section 2 - spend and visit frequency. For this symmetric 2×2 form, the eigenvalues are exactly 1+r and 1-r for correlation r, checkable directly from Σv = λv with no numerical solver - with r = 0.171: 1.171 and 0.829, matching </a:t>
-            </a:r>
-            <a:r>
-              <a:rPr>
-                <a:latin typeface="Courier"/>
-              </a:rPr>
-              <a:t>numpy.linalg.eigh</a:t>
-            </a:r>
-            <a:r>
-              <a:rPr/>
-              <a:t> to three decimal places.</a:t>
-            </a:r>
-          </a:p>
-          <a:p>
-            <a:pPr lvl="0" indent="0" marL="0">
-              <a:buNone/>
-            </a:pPr>
-          </a:p>
-          <a:p>
-            <a:pPr lvl="0" indent="0" marL="0">
-              <a:buNone/>
-            </a:pPr>
-            <a:r>
-              <a:rPr/>
-              <a:t>The direction (1,1)/√2 is the “spend and visit often together” diagonal, not either axis alone - say why that makes sense: customers who spend more also tend to visit more, so the greatest joint variation runs along the diagonal between the two original features.</a:t>
+              <a:t>This slide turns the previous slide’s single equation into the actual recipe: sort eigenvalues, keep eigenvectors in that order, and that ordered list </a:t>
+            </a:r>
+            <a:r>
+              <a:rPr i="1"/>
+              <a:t>is</a:t>
+            </a:r>
+            <a:r>
+              <a:rPr/>
+              <a:t> PCA. Worth saying explicitly that this is the entire algorithm once the eigendecomposition is in hand - everything before this was justifying why eigenvectors are the right thing to compute at all.</a:t>
+            </a:r>
+          </a:p>
+          <a:p>
+            <a:pPr lvl="0" indent="0" marL="0">
+              <a:buNone/>
+            </a:pPr>
+          </a:p>
+          <a:p>
+            <a:pPr lvl="0" indent="0" marL="0">
+              <a:buNone/>
+            </a:pPr>
+            <a:r>
+              <a:rPr/>
+              <a:t>The automatic-orthogonality point is worth a beat: it is not a separate constraint PCA has to enforce, it falls out of Σ being symmetric.</a:t>
             </a:r>
           </a:p>
           <a:p>
@@ -5821,35 +5799,45 @@
             </a:pPr>
             <a:r>
               <a:rPr/>
-              <a:t>Callback to lesson 3 deliberately - condition number squaring is the same argument that motivated preferring gradient-based or QR-based solvers over the raw normal equation there, and it is worth naming that connection out loud so the pattern generalises for students.</a:t>
-            </a:r>
-          </a:p>
-          <a:p>
-            <a:pPr lvl="0" indent="0" marL="0">
-              <a:buNone/>
-            </a:pPr>
-          </a:p>
-          <a:p>
-            <a:pPr lvl="0" indent="0" marL="0">
-              <a:buNone/>
-            </a:pPr>
-            <a:r>
-              <a:rPr/>
-              <a:t>The equation is on the next slide.</a:t>
-            </a:r>
-          </a:p>
-          <a:p>
-            <a:pPr lvl="0" indent="0" marL="0">
-              <a:buNone/>
-            </a:pPr>
-          </a:p>
-          <a:p>
-            <a:pPr lvl="0" indent="0" marL="0">
-              <a:buNone/>
-            </a:pPr>
-            <a:r>
-              <a:rPr/>
-              <a:t>Handout section 5.3.</a:t>
+              <a:t>Two standardised features from section 2 - spend and visit frequency. For this symmetric 2×2 form, the eigenvalues are exactly 1+r and 1-r for correlation r, checkable directly from Σv = λv with no numerical solver - with r = 0.171: 1.171 and 0.829. </a:t>
+            </a:r>
+            <a:r>
+              <a:rPr>
+                <a:latin typeface="Courier"/>
+              </a:rPr>
+              <a:t>numpy.linalg.eigh</a:t>
+            </a:r>
+            <a:r>
+              <a:rPr/>
+              <a:t> gives 1.171 and 0.830; the last digit moves because np.cov divides by m - 1, so the diagonal is 1.0005 rather than 1.</a:t>
+            </a:r>
+          </a:p>
+          <a:p>
+            <a:pPr lvl="0" indent="0" marL="0">
+              <a:buNone/>
+            </a:pPr>
+          </a:p>
+          <a:p>
+            <a:pPr lvl="0" indent="0" marL="0">
+              <a:buNone/>
+            </a:pPr>
+            <a:r>
+              <a:rPr/>
+              <a:t>The direction (1,1)/√2 is the “spend and visit often together” diagonal, not either axis alone - say why that makes sense: customers who spend more also tend to visit more, so the greatest joint variation runs along the diagonal between the two original features.</a:t>
+            </a:r>
+          </a:p>
+          <a:p>
+            <a:pPr lvl="0" indent="0" marL="0">
+              <a:buNone/>
+            </a:pPr>
+          </a:p>
+          <a:p>
+            <a:pPr lvl="0" indent="0" marL="0">
+              <a:buNone/>
+            </a:pPr>
+            <a:r>
+              <a:rPr/>
+              <a:t>Handout section 5.2.</a:t>
             </a:r>
           </a:p>
         </p:txBody>
@@ -5931,21 +5919,21 @@
             </a:pPr>
             <a:r>
               <a:rPr/>
-              <a:t>Say what the equation means: U and V orthogonal, S diagonal with non-negative singular values s₁ ≥ s₂ ≥ …; the columns of V are exactly the eigenvectors of XᵀX, and λᵢ = sᵢ²/(m-1) recovers the eigenvalues without ever forming Σ.</a:t>
-            </a:r>
-          </a:p>
-          <a:p>
-            <a:pPr lvl="0" indent="0" marL="0">
-              <a:buNone/>
-            </a:pPr>
-          </a:p>
-          <a:p>
-            <a:pPr lvl="0" indent="0" marL="0">
-              <a:buNone/>
-            </a:pPr>
-            <a:r>
-              <a:rPr/>
-              <a:t>Handout section 5.3.</a:t>
+              <a:t>Left: the two components on spend and visits, each arrow two standard deviations long. PC1 runs along the diagonal with variance 1.171, PC2 across it with 0.830 - the previous slide’s numbers, as directions.</a:t>
+            </a:r>
+          </a:p>
+          <a:p>
+            <a:pPr lvl="0" indent="0" marL="0">
+              <a:buNone/>
+            </a:pPr>
+          </a:p>
+          <a:p>
+            <a:pPr lvl="0" indent="0" marL="0">
+              <a:buNone/>
+            </a:pPr>
+            <a:r>
+              <a:rPr/>
+              <a:t>Right: previewing the anomaly section. The customer furthest off the diagonal, customer 13, and its reconstruction from PC1 alone - the closest point on the line. The residual meets the line at a right angle; that is what makes the reconstruction the closest point, and its squared length, 6.37, is the reconstruction error. In section 6 the same measurement, in eight dimensions with three components kept, catches 37 of 40 disguised accounts. Handout sections 5.2 and 6.1.</a:t>
             </a:r>
           </a:p>
         </p:txBody>
@@ -6027,21 +6015,21 @@
             </a:pPr>
             <a:r>
               <a:rPr/>
-              <a:t>This is a genuine cross-check, in the same spirit as the k-means++ notebook agreeing with scikit-learn to 10⁻⁴ earlier - three independent computational routes to the same mathematical object, converging to sixteen significant figures.</a:t>
-            </a:r>
-          </a:p>
-          <a:p>
-            <a:pPr lvl="0" indent="0" marL="0">
-              <a:buNone/>
-            </a:pPr>
-          </a:p>
-          <a:p>
-            <a:pPr lvl="0" indent="0" marL="0">
-              <a:buNone/>
-            </a:pPr>
-            <a:r>
-              <a:rPr/>
-              <a:t>Worth a sentence on why this matters pedagogically: it is one thing to prove eigendecomposition and SVD give the same eigenvalues on paper, and another to watch three separate library calls confirm it to floating-point precision on real data.</a:t>
+              <a:t>Callback to lesson 3 deliberately - condition number squaring is the same argument that motivated preferring gradient-based or QR-based solvers over the raw normal equation there, and it is worth naming that connection out loud so the pattern generalises for students.</a:t>
+            </a:r>
+          </a:p>
+          <a:p>
+            <a:pPr lvl="0" indent="0" marL="0">
+              <a:buNone/>
+            </a:pPr>
+          </a:p>
+          <a:p>
+            <a:pPr lvl="0" indent="0" marL="0">
+              <a:buNone/>
+            </a:pPr>
+            <a:r>
+              <a:rPr/>
+              <a:t>The equation is on the next slide.</a:t>
             </a:r>
           </a:p>
           <a:p>
@@ -6137,35 +6125,21 @@
             </a:pPr>
             <a:r>
               <a:rPr/>
-              <a:t>Per-component and cumulative explained variance for the 8 account features. The first 3 components explain 93.5% of total variance; the 4th adds only 2.4% more - point at exactly where the sharp elbow sits.</a:t>
-            </a:r>
-          </a:p>
-          <a:p>
-            <a:pPr lvl="0" indent="0" marL="0">
-              <a:buNone/>
-            </a:pPr>
-          </a:p>
-          <a:p>
-            <a:pPr lvl="0" indent="0" marL="0">
-              <a:buNone/>
-            </a:pPr>
-            <a:r>
-              <a:rPr/>
-              <a:t>Ask the room to predict the number before you say it - most will read the bend correctly from the shape alone, which is the whole point of a scree plot as a diagnostic.</a:t>
-            </a:r>
-          </a:p>
-          <a:p>
-            <a:pPr lvl="0" indent="0" marL="0">
-              <a:buNone/>
-            </a:pPr>
-          </a:p>
-          <a:p>
-            <a:pPr lvl="0" indent="0" marL="0">
-              <a:buNone/>
-            </a:pPr>
-            <a:r>
-              <a:rPr/>
-              <a:t>Handout section 5.4.</a:t>
+              <a:t>Say what the equation means: U and V orthogonal, S diagonal with non-negative singular values s₁ ≥ s₂ ≥ …; the columns of V are exactly the eigenvectors of XᵀX, and λᵢ = sᵢ²/(m-1) recovers the eigenvalues without ever forming Σ.</a:t>
+            </a:r>
+          </a:p>
+          <a:p>
+            <a:pPr lvl="0" indent="0" marL="0">
+              <a:buNone/>
+            </a:pPr>
+          </a:p>
+          <a:p>
+            <a:pPr lvl="0" indent="0" marL="0">
+              <a:buNone/>
+            </a:pPr>
+            <a:r>
+              <a:rPr/>
+              <a:t>Handout section 5.3.</a:t>
             </a:r>
           </a:p>
         </p:txBody>
@@ -6247,45 +6221,35 @@
             </a:pPr>
             <a:r>
               <a:rPr/>
-              <a:t>3 is not an arbitrary read of the elbow - it is the exact number of latent factors (</a:t>
-            </a:r>
-            <a:r>
-              <a:rPr>
-                <a:latin typeface="Courier"/>
-              </a:rPr>
-              <a:t>retail_data.py</a:t>
-            </a:r>
-            <a:r>
-              <a:rPr/>
-              <a:t>’s spending propensity, engagement, price sensitivity) that generated all 8 observed columns. The scree plot recovered, from the data alone, a number this lesson deliberately withheld from every method until now.</a:t>
-            </a:r>
-          </a:p>
-          <a:p>
-            <a:pPr lvl="0" indent="0" marL="0">
-              <a:buNone/>
-            </a:pPr>
-          </a:p>
-          <a:p>
-            <a:pPr lvl="0" indent="0" marL="0">
-              <a:buNone/>
-            </a:pPr>
-            <a:r>
-              <a:rPr/>
-              <a:t>Say clearly that this clean an elbow will not appear on every dataset students meet later - it exists here because the generator built 8 columns as noisy linear combinations of exactly 3 signals. The next slide is what to do when it is not this clean.</a:t>
-            </a:r>
-          </a:p>
-          <a:p>
-            <a:pPr lvl="0" indent="0" marL="0">
-              <a:buNone/>
-            </a:pPr>
-          </a:p>
-          <a:p>
-            <a:pPr lvl="0" indent="0" marL="0">
-              <a:buNone/>
-            </a:pPr>
-            <a:r>
-              <a:rPr/>
-              <a:t>Handout section 5.4.</a:t>
+              <a:t>This is a genuine cross-check, in the same spirit as the k-means++ notebook agreeing with scikit-learn to 10⁻⁴ earlier - three independent computational routes to the same mathematical object, converging to sixteen significant figures.</a:t>
+            </a:r>
+          </a:p>
+          <a:p>
+            <a:pPr lvl="0" indent="0" marL="0">
+              <a:buNone/>
+            </a:pPr>
+          </a:p>
+          <a:p>
+            <a:pPr lvl="0" indent="0" marL="0">
+              <a:buNone/>
+            </a:pPr>
+            <a:r>
+              <a:rPr/>
+              <a:t>Worth a sentence on why this matters pedagogically: it is one thing to prove eigendecomposition and SVD give the same eigenvalues on paper, and another to watch three separate library calls confirm it to floating-point precision on real data.</a:t>
+            </a:r>
+          </a:p>
+          <a:p>
+            <a:pPr lvl="0" indent="0" marL="0">
+              <a:buNone/>
+            </a:pPr>
+          </a:p>
+          <a:p>
+            <a:pPr lvl="0" indent="0" marL="0">
+              <a:buNone/>
+            </a:pPr>
+            <a:r>
+              <a:rPr/>
+              <a:t>Handout section 5.3.</a:t>
             </a:r>
           </a:p>
         </p:txBody>
@@ -6367,21 +6331,21 @@
             </a:pPr>
             <a:r>
               <a:rPr/>
-              <a:t>Close the PCA segment by generalising beyond this lesson’s convenient dataset - students will not always get a number this clean, and this slide is explicitly about what changes when they don’t.</a:t>
-            </a:r>
-          </a:p>
-          <a:p>
-            <a:pPr lvl="0" indent="0" marL="0">
-              <a:buNone/>
-            </a:pPr>
-          </a:p>
-          <a:p>
-            <a:pPr lvl="0" indent="0" marL="0">
-              <a:buNone/>
-            </a:pPr>
-            <a:r>
-              <a:rPr/>
-              <a:t>Frame the cross-validation option as a callback to lesson 5: choosing the number of components is a model-selection decision like any other, and the same honest-validation discipline that lesson used for hyperparameters applies here too.</a:t>
+              <a:t>Per-component and cumulative explained variance for the 8 account features. The first 3 components explain 93.5% of total variance; the 4th adds only 2.4% more - point at exactly where the sharp elbow sits.</a:t>
+            </a:r>
+          </a:p>
+          <a:p>
+            <a:pPr lvl="0" indent="0" marL="0">
+              <a:buNone/>
+            </a:pPr>
+          </a:p>
+          <a:p>
+            <a:pPr lvl="0" indent="0" marL="0">
+              <a:buNone/>
+            </a:pPr>
+            <a:r>
+              <a:rPr/>
+              <a:t>Ask the room to predict the number before you say it - most will read the bend correctly from the shape alone, which is the whole point of a scree plot as a diagnostic.</a:t>
             </a:r>
           </a:p>
           <a:p>
@@ -6477,57 +6441,45 @@
             </a:pPr>
             <a:r>
               <a:rPr/>
-              <a:t>Run Notebooks/03_pca_and_anomaly_detection.ipynb. Twenty minutes.</a:t>
-            </a:r>
-          </a:p>
-          <a:p>
-            <a:pPr lvl="0" indent="0" marL="0">
-              <a:buNone/>
-            </a:pPr>
-          </a:p>
-          <a:p>
-            <a:pPr lvl="0" indent="0" marL="0">
-              <a:buNone/>
-            </a:pPr>
-            <a:r>
-              <a:rPr/>
-              <a:t>This is the lesson’s headline number and it is delivered live in the notebook rather than pre-built on a slide - reconstructing accounts from the top 3 components and watching genuine accounts snap back almost exactly, while planted anomalies do not, is more convincing run than described.</a:t>
-            </a:r>
-          </a:p>
-          <a:p>
-            <a:pPr lvl="0" indent="0" marL="0">
-              <a:buNone/>
-            </a:pPr>
-          </a:p>
-          <a:p>
-            <a:pPr lvl="0" indent="0" marL="0">
-              <a:buNone/>
-            </a:pPr>
-            <a:r>
-              <a:rPr/>
-              <a:t>Protect the reconstruction-error histogram and the 2-D scatter comparison if time is short: the point that anomalies sit </a:t>
-            </a:r>
-            <a:r>
-              <a:rPr b="1"/>
-              <a:t>closer</a:t>
-            </a:r>
-            <a:r>
-              <a:rPr/>
-              <a:t> to the centre than genuine accounts, on average, in both the PCA and t-SNE projections, is the section’s real content, and it needs to be seen, not just quoted.</a:t>
-            </a:r>
-          </a:p>
-          <a:p>
-            <a:pPr lvl="0" indent="0" marL="0">
-              <a:buNone/>
-            </a:pPr>
-          </a:p>
-          <a:p>
-            <a:pPr lvl="0" indent="0" marL="0">
-              <a:buNone/>
-            </a:pPr>
-            <a:r>
-              <a:rPr/>
-              <a:t>Handout sections 6.1, 6.2.</a:t>
+              <a:t>3 is not an arbitrary read of the elbow - it is the exact number of latent factors (</a:t>
+            </a:r>
+            <a:r>
+              <a:rPr>
+                <a:latin typeface="Courier"/>
+              </a:rPr>
+              <a:t>retail_data.py</a:t>
+            </a:r>
+            <a:r>
+              <a:rPr/>
+              <a:t>’s spending propensity, engagement, price sensitivity) that generated all 8 observed columns. The scree plot recovered, from the data alone, a number this lesson deliberately withheld from every method until now.</a:t>
+            </a:r>
+          </a:p>
+          <a:p>
+            <a:pPr lvl="0" indent="0" marL="0">
+              <a:buNone/>
+            </a:pPr>
+          </a:p>
+          <a:p>
+            <a:pPr lvl="0" indent="0" marL="0">
+              <a:buNone/>
+            </a:pPr>
+            <a:r>
+              <a:rPr/>
+              <a:t>Say clearly that this clean an elbow will not appear on every dataset students meet later - it exists here because the generator built 8 columns as noisy linear combinations of exactly 3 signals. The next slide is what to do when it is not this clean.</a:t>
+            </a:r>
+          </a:p>
+          <a:p>
+            <a:pPr lvl="0" indent="0" marL="0">
+              <a:buNone/>
+            </a:pPr>
+          </a:p>
+          <a:p>
+            <a:pPr lvl="0" indent="0" marL="0">
+              <a:buNone/>
+            </a:pPr>
+            <a:r>
+              <a:rPr/>
+              <a:t>Handout section 5.4.</a:t>
             </a:r>
           </a:p>
         </p:txBody>
@@ -6609,35 +6561,35 @@
             </a:pPr>
             <a:r>
               <a:rPr/>
-              <a:t>Position t-SNE precisely: a visualisation tool, not a measurement tool, and the two limitations on this slide are the reason. Two clusters drawn far apart in a t-SNE plot are not necessarily more different than two drawn close together - resist any temptation to read distance off the picture the way a PCA plot’s axes can be read.</a:t>
-            </a:r>
-          </a:p>
-          <a:p>
-            <a:pPr lvl="0" indent="0" marL="0">
-              <a:buNone/>
-            </a:pPr>
-          </a:p>
-          <a:p>
-            <a:pPr lvl="0" indent="0" marL="0">
-              <a:buNone/>
-            </a:pPr>
-            <a:r>
-              <a:rPr/>
-              <a:t>Tie back directly to notebook 03: t-SNE inherited the exact same blind spot PCA’s 2-D projection had for the fraud anomalies - good for looking, not a substitute for reconstruction error. The full KL-divergence derivation is deliberately out of scope; point to the further reading.</a:t>
-            </a:r>
-          </a:p>
-          <a:p>
-            <a:pPr lvl="0" indent="0" marL="0">
-              <a:buNone/>
-            </a:pPr>
-          </a:p>
-          <a:p>
-            <a:pPr lvl="0" indent="0" marL="0">
-              <a:buNone/>
-            </a:pPr>
-            <a:r>
-              <a:rPr/>
-              <a:t>Handout section 7.</a:t>
+              <a:t>Close the PCA segment by generalising beyond this lesson’s convenient dataset - students will not always get a number this clean, and this slide is explicitly about what changes when they don’t.</a:t>
+            </a:r>
+          </a:p>
+          <a:p>
+            <a:pPr lvl="0" indent="0" marL="0">
+              <a:buNone/>
+            </a:pPr>
+          </a:p>
+          <a:p>
+            <a:pPr lvl="0" indent="0" marL="0">
+              <a:buNone/>
+            </a:pPr>
+            <a:r>
+              <a:rPr/>
+              <a:t>Frame the cross-validation option as a callback to lesson 5: choosing the number of components is a model-selection decision like any other, and the same honest-validation discipline that lesson used for hyperparameters applies here too.</a:t>
+            </a:r>
+          </a:p>
+          <a:p>
+            <a:pPr lvl="0" indent="0" marL="0">
+              <a:buNone/>
+            </a:pPr>
+          </a:p>
+          <a:p>
+            <a:pPr lvl="0" indent="0" marL="0">
+              <a:buNone/>
+            </a:pPr>
+            <a:r>
+              <a:rPr/>
+              <a:t>Handout section 5.4.</a:t>
             </a:r>
           </a:p>
         </p:txBody>
@@ -6829,49 +6781,57 @@
             </a:pPr>
             <a:r>
               <a:rPr/>
-              <a:t>This is the number to carry out of the room: 37 of 40, using nothing but the relationship between eight individually ordinary-looking columns, on a detection problem neither of the standard 2-D visualisation tools could solve.</a:t>
-            </a:r>
-          </a:p>
-          <a:p>
-            <a:pPr lvl="0" indent="0" marL="0">
-              <a:buNone/>
-            </a:pPr>
-          </a:p>
-          <a:p>
-            <a:pPr lvl="0" indent="0" marL="0">
-              <a:buNone/>
-            </a:pPr>
-            <a:r>
-              <a:rPr/>
-              <a:t>Ask them to write it down - the fourth lesson this course has produced one of these carry-home numbers: 77% accuracy on coin-flip labels, 94 of 128 imputed rows that borrowed from the test set, a coefficient of 365 where an unpenalised fit wanted billions, and now this.</a:t>
-            </a:r>
-          </a:p>
-          <a:p>
-            <a:pPr lvl="0" indent="0" marL="0">
-              <a:buNone/>
-            </a:pPr>
-          </a:p>
-          <a:p>
-            <a:pPr lvl="0" indent="0" marL="0">
-              <a:buNone/>
-            </a:pPr>
-            <a:r>
-              <a:rPr/>
-              <a:t>If one habit should survive from today: before trusting an unlabelled result, ask what the metric or the picture in front of you is actually capable of seeing - a silhouette score cannot see a wrong shape assumption, and a 2-D scatter cannot see what the discarded dimensions would have shown.</a:t>
-            </a:r>
-          </a:p>
-          <a:p>
-            <a:pPr lvl="0" indent="0" marL="0">
-              <a:buNone/>
-            </a:pPr>
-          </a:p>
-          <a:p>
-            <a:pPr lvl="0" indent="0" marL="0">
-              <a:buNone/>
-            </a:pPr>
-            <a:r>
-              <a:rPr/>
-              <a:t>Handout summary and notation table.</a:t>
+              <a:t>Run Notebooks/03_pca_and_anomaly_detection.ipynb. Twenty minutes.</a:t>
+            </a:r>
+          </a:p>
+          <a:p>
+            <a:pPr lvl="0" indent="0" marL="0">
+              <a:buNone/>
+            </a:pPr>
+          </a:p>
+          <a:p>
+            <a:pPr lvl="0" indent="0" marL="0">
+              <a:buNone/>
+            </a:pPr>
+            <a:r>
+              <a:rPr/>
+              <a:t>This is the lesson’s headline number and it is delivered live in the notebook rather than pre-built on a slide - reconstructing accounts from the top 3 components and watching genuine accounts snap back almost exactly, while planted anomalies do not, is more convincing run than described.</a:t>
+            </a:r>
+          </a:p>
+          <a:p>
+            <a:pPr lvl="0" indent="0" marL="0">
+              <a:buNone/>
+            </a:pPr>
+          </a:p>
+          <a:p>
+            <a:pPr lvl="0" indent="0" marL="0">
+              <a:buNone/>
+            </a:pPr>
+            <a:r>
+              <a:rPr/>
+              <a:t>Protect the reconstruction-error histogram and the 2-D scatter comparison if time is short: the point that anomalies sit </a:t>
+            </a:r>
+            <a:r>
+              <a:rPr b="1"/>
+              <a:t>closer</a:t>
+            </a:r>
+            <a:r>
+              <a:rPr/>
+              <a:t> to the centre than genuine accounts, on average, in both the PCA and t-SNE projections, is the section’s real content, and it needs to be seen, not just quoted.</a:t>
+            </a:r>
+          </a:p>
+          <a:p>
+            <a:pPr lvl="0" indent="0" marL="0">
+              <a:buNone/>
+            </a:pPr>
+          </a:p>
+          <a:p>
+            <a:pPr lvl="0" indent="0" marL="0">
+              <a:buNone/>
+            </a:pPr>
+            <a:r>
+              <a:rPr/>
+              <a:t>Handout sections 6.1, 6.2.</a:t>
             </a:r>
           </a:p>
         </p:txBody>
@@ -6953,35 +6913,35 @@
             </a:pPr>
             <a:r>
               <a:rPr/>
-              <a:t>Set it explicitly and say out loud when it comes back: the first ten minutes of lesson 9, Friday 27 November.</a:t>
-            </a:r>
-          </a:p>
-          <a:p>
-            <a:pPr lvl="0" indent="0" marL="0">
-              <a:buNone/>
-            </a:pPr>
-          </a:p>
-          <a:p>
-            <a:pPr lvl="0" indent="0" marL="0">
-              <a:buNone/>
-            </a:pPr>
-            <a:r>
-              <a:rPr/>
-              <a:t>Remind them of the standing rule from lesson 5, still in force with no labels at all: every reported number needs a check against what the method could and could not see - an ARI needs a ground truth to be meaningful, a silhouette score needs to be read as roundness rather than correctness, and a reconstruction-error threshold needs its false-positive rate reported alongside its catch rate, not instead of it.</a:t>
-            </a:r>
-          </a:p>
-          <a:p>
-            <a:pPr lvl="0" indent="0" marL="0">
-              <a:buNone/>
-            </a:pPr>
-          </a:p>
-          <a:p>
-            <a:pPr lvl="0" indent="0" marL="0">
-              <a:buNone/>
-            </a:pPr>
-            <a:r>
-              <a:rPr/>
-              <a:t>Next lesson moves to a different question this course has not yet asked. Close the loop on today: four lessons in a row have each produced one number worth remembering - encourage them to notice that pattern themselves before it is pointed out again.</a:t>
+              <a:t>Position t-SNE precisely: a visualisation tool, not a measurement tool, and the two limitations on this slide are the reason. Two clusters drawn far apart in a t-SNE plot are not necessarily more different than two drawn close together - resist any temptation to read distance off the picture the way a PCA plot’s axes can be read.</a:t>
+            </a:r>
+          </a:p>
+          <a:p>
+            <a:pPr lvl="0" indent="0" marL="0">
+              <a:buNone/>
+            </a:pPr>
+          </a:p>
+          <a:p>
+            <a:pPr lvl="0" indent="0" marL="0">
+              <a:buNone/>
+            </a:pPr>
+            <a:r>
+              <a:rPr/>
+              <a:t>Tie back directly to notebook 03: t-SNE inherited the exact same blind spot PCA’s 2-D projection had for the fraud anomalies - good for looking, not a substitute for reconstruction error. The full KL-divergence derivation is deliberately out of scope; point to the further reading.</a:t>
+            </a:r>
+          </a:p>
+          <a:p>
+            <a:pPr lvl="0" indent="0" marL="0">
+              <a:buNone/>
+            </a:pPr>
+          </a:p>
+          <a:p>
+            <a:pPr lvl="0" indent="0" marL="0">
+              <a:buNone/>
+            </a:pPr>
+            <a:r>
+              <a:rPr/>
+              <a:t>Handout section 7.</a:t>
             </a:r>
           </a:p>
         </p:txBody>
@@ -7004,6 +6964,240 @@
             <a:fld id="{18BDFEC3-8487-43E8-A154-7C12CBC1FFF2}" type="slidenum">
               <a:rPr lang="en-US"/>
               <a:t>62</a:t>
+            </a:fld>
+            <a:endParaRPr lang="en-US"/>
+          </a:p>
+        </p:txBody>
+      </p:sp>
+    </p:spTree>
+  </p:cSld>
+</p:notes>
+</file>
+
+<file path=ppt/notesSlides/notesSlide62.xml><?xml version="1.0" encoding="utf-8"?>
+<p:notes xmlns:a="http://schemas.openxmlformats.org/drawingml/2006/main" xmlns:r="http://schemas.openxmlformats.org/officeDocument/2006/relationships" xmlns:p="http://schemas.openxmlformats.org/presentationml/2006/main">
+  <p:cSld>
+    <p:spTree>
+      <p:nvGrpSpPr>
+        <p:cNvPr id="1" name=""/>
+        <p:cNvGrpSpPr/>
+        <p:nvPr/>
+      </p:nvGrpSpPr>
+      <p:grpSpPr>
+        <a:xfrm>
+          <a:off x="0" y="0"/>
+          <a:ext cx="0" cy="0"/>
+          <a:chOff x="0" y="0"/>
+          <a:chExt cx="0" cy="0"/>
+        </a:xfrm>
+      </p:grpSpPr>
+      <p:sp>
+        <p:nvSpPr>
+          <p:cNvPr id="2" name="Slide Image Placeholder 1"/>
+          <p:cNvSpPr>
+            <a:spLocks noGrp="1" noRot="1" noChangeAspect="1"/>
+          </p:cNvSpPr>
+          <p:nvPr>
+            <p:ph type="sldImg"/>
+          </p:nvPr>
+        </p:nvSpPr>
+        <p:spPr/>
+      </p:sp>
+      <p:sp>
+        <p:nvSpPr>
+          <p:cNvPr id="3" name="Notes Placeholder 2"/>
+          <p:cNvSpPr>
+            <a:spLocks noGrp="1"/>
+          </p:cNvSpPr>
+          <p:nvPr>
+            <p:ph type="body" idx="1"/>
+          </p:nvPr>
+        </p:nvSpPr>
+        <p:spPr/>
+        <p:txBody>
+          <a:bodyPr/>
+          <a:lstStyle/>
+          <a:p>
+            <a:pPr lvl="0" indent="0" marL="0">
+              <a:buNone/>
+            </a:pPr>
+            <a:r>
+              <a:rPr/>
+              <a:t>This is the number to carry out of the room: 37 of 40, using nothing but the relationship between eight individually ordinary-looking columns, on a detection problem neither of the standard 2-D visualisation tools could solve.</a:t>
+            </a:r>
+          </a:p>
+          <a:p>
+            <a:pPr lvl="0" indent="0" marL="0">
+              <a:buNone/>
+            </a:pPr>
+          </a:p>
+          <a:p>
+            <a:pPr lvl="0" indent="0" marL="0">
+              <a:buNone/>
+            </a:pPr>
+            <a:r>
+              <a:rPr/>
+              <a:t>Ask them to write it down - the fourth lesson this course has produced one of these carry-home numbers: 77% accuracy on coin-flip labels, 94 of 128 imputed rows that borrowed from the test set, a coefficient of 365 where an unpenalised fit wanted billions, and now this.</a:t>
+            </a:r>
+          </a:p>
+          <a:p>
+            <a:pPr lvl="0" indent="0" marL="0">
+              <a:buNone/>
+            </a:pPr>
+          </a:p>
+          <a:p>
+            <a:pPr lvl="0" indent="0" marL="0">
+              <a:buNone/>
+            </a:pPr>
+            <a:r>
+              <a:rPr/>
+              <a:t>If one habit should survive from today: before trusting an unlabelled result, ask what the metric or the picture in front of you is actually capable of seeing - a silhouette score cannot see a wrong shape assumption, and a 2-D scatter cannot see what the discarded dimensions would have shown.</a:t>
+            </a:r>
+          </a:p>
+          <a:p>
+            <a:pPr lvl="0" indent="0" marL="0">
+              <a:buNone/>
+            </a:pPr>
+          </a:p>
+          <a:p>
+            <a:pPr lvl="0" indent="0" marL="0">
+              <a:buNone/>
+            </a:pPr>
+            <a:r>
+              <a:rPr/>
+              <a:t>Handout summary and notation table.</a:t>
+            </a:r>
+          </a:p>
+        </p:txBody>
+      </p:sp>
+      <p:sp>
+        <p:nvSpPr>
+          <p:cNvPr id="4" name="Slide Number Placeholder 3"/>
+          <p:cNvSpPr>
+            <a:spLocks noGrp="1"/>
+          </p:cNvSpPr>
+          <p:nvPr>
+            <p:ph type="sldNum" sz="quarter" idx="10"/>
+          </p:nvPr>
+        </p:nvSpPr>
+        <p:spPr/>
+        <p:txBody>
+          <a:bodyPr/>
+          <a:lstStyle/>
+          <a:p>
+            <a:fld id="{18BDFEC3-8487-43E8-A154-7C12CBC1FFF2}" type="slidenum">
+              <a:rPr lang="en-US"/>
+              <a:t>63</a:t>
+            </a:fld>
+            <a:endParaRPr lang="en-US"/>
+          </a:p>
+        </p:txBody>
+      </p:sp>
+    </p:spTree>
+  </p:cSld>
+</p:notes>
+</file>
+
+<file path=ppt/notesSlides/notesSlide63.xml><?xml version="1.0" encoding="utf-8"?>
+<p:notes xmlns:a="http://schemas.openxmlformats.org/drawingml/2006/main" xmlns:r="http://schemas.openxmlformats.org/officeDocument/2006/relationships" xmlns:p="http://schemas.openxmlformats.org/presentationml/2006/main">
+  <p:cSld>
+    <p:spTree>
+      <p:nvGrpSpPr>
+        <p:cNvPr id="1" name=""/>
+        <p:cNvGrpSpPr/>
+        <p:nvPr/>
+      </p:nvGrpSpPr>
+      <p:grpSpPr>
+        <a:xfrm>
+          <a:off x="0" y="0"/>
+          <a:ext cx="0" cy="0"/>
+          <a:chOff x="0" y="0"/>
+          <a:chExt cx="0" cy="0"/>
+        </a:xfrm>
+      </p:grpSpPr>
+      <p:sp>
+        <p:nvSpPr>
+          <p:cNvPr id="2" name="Slide Image Placeholder 1"/>
+          <p:cNvSpPr>
+            <a:spLocks noGrp="1" noRot="1" noChangeAspect="1"/>
+          </p:cNvSpPr>
+          <p:nvPr>
+            <p:ph type="sldImg"/>
+          </p:nvPr>
+        </p:nvSpPr>
+        <p:spPr/>
+      </p:sp>
+      <p:sp>
+        <p:nvSpPr>
+          <p:cNvPr id="3" name="Notes Placeholder 2"/>
+          <p:cNvSpPr>
+            <a:spLocks noGrp="1"/>
+          </p:cNvSpPr>
+          <p:nvPr>
+            <p:ph type="body" idx="1"/>
+          </p:nvPr>
+        </p:nvSpPr>
+        <p:spPr/>
+        <p:txBody>
+          <a:bodyPr/>
+          <a:lstStyle/>
+          <a:p>
+            <a:pPr lvl="0" indent="0" marL="0">
+              <a:buNone/>
+            </a:pPr>
+            <a:r>
+              <a:rPr/>
+              <a:t>Set it explicitly and say out loud when it comes back: the first ten minutes of lesson 9, Friday 27 November.</a:t>
+            </a:r>
+          </a:p>
+          <a:p>
+            <a:pPr lvl="0" indent="0" marL="0">
+              <a:buNone/>
+            </a:pPr>
+          </a:p>
+          <a:p>
+            <a:pPr lvl="0" indent="0" marL="0">
+              <a:buNone/>
+            </a:pPr>
+            <a:r>
+              <a:rPr/>
+              <a:t>Remind them of the standing rule from lesson 5, still in force with no labels at all: every reported number needs a check against what the method could and could not see - an ARI needs a ground truth to be meaningful, a silhouette score needs to be read as roundness rather than correctness, and a reconstruction-error threshold needs its false-positive rate reported alongside its catch rate, not instead of it.</a:t>
+            </a:r>
+          </a:p>
+          <a:p>
+            <a:pPr lvl="0" indent="0" marL="0">
+              <a:buNone/>
+            </a:pPr>
+          </a:p>
+          <a:p>
+            <a:pPr lvl="0" indent="0" marL="0">
+              <a:buNone/>
+            </a:pPr>
+            <a:r>
+              <a:rPr/>
+              <a:t>Next lesson moves to a different question this course has not yet asked. Close the loop on today: four lessons in a row have each produced one number worth remembering - encourage them to notice that pattern themselves before it is pointed out again.</a:t>
+            </a:r>
+          </a:p>
+        </p:txBody>
+      </p:sp>
+      <p:sp>
+        <p:nvSpPr>
+          <p:cNvPr id="4" name="Slide Number Placeholder 3"/>
+          <p:cNvSpPr>
+            <a:spLocks noGrp="1"/>
+          </p:cNvSpPr>
+          <p:nvPr>
+            <p:ph type="sldNum" sz="quarter" idx="10"/>
+          </p:nvPr>
+        </p:nvSpPr>
+        <p:spPr/>
+        <p:txBody>
+          <a:bodyPr/>
+          <a:lstStyle/>
+          <a:p>
+            <a:fld id="{18BDFEC3-8487-43E8-A154-7C12CBC1FFF2}" type="slidenum">
+              <a:rPr lang="en-US"/>
+              <a:t>64</a:t>
             </a:fld>
             <a:endParaRPr lang="en-US"/>
           </a:p>
@@ -11234,15 +11428,11 @@
             <a:pPr lvl="0"/>
             <a:r>
               <a:rPr/>
-              <a:t>This happened on the very </a:t>
+              <a:t>One start in 30 ended there; the other 29 all found </a:t>
             </a:r>
             <a:r>
               <a:rPr b="1"/>
-              <a:t>first</a:t>
-            </a:r>
-            <a:r>
-              <a:rPr/>
-              <a:t> attempt (worst of 30), not a rare one-in-a-thousand pathology</a:t>
+              <a:t>374.1</a:t>
             </a:r>
           </a:p>
           <a:p>
@@ -11433,11 +11623,15 @@
             <a:pPr lvl="0"/>
             <a:r>
               <a:rPr/>
-              <a:t>Reaches the </a:t>
+              <a:t>Also </a:t>
             </a:r>
             <a:r>
               <a:rPr b="1"/>
-              <a:t>global optimum on the first attempt</a:t>
+              <a:t>29 of 30</a:t>
+            </a:r>
+            <a:r>
+              <a:rPr/>
+              <a:t> at the optimum: the bad case is less bad, not rarer</a:t>
             </a:r>
           </a:p>
           <a:p>
@@ -11509,72 +11703,41 @@
             </a:pPr>
             <a:r>
               <a:rPr/>
-              <a:t>Choosing k</a:t>
-            </a:r>
-          </a:p>
-        </p:txBody>
-      </p:sp>
-      <p:sp>
-        <p:nvSpPr>
-          <p:cNvPr id="3" name="Content Placeholder 2"/>
-          <p:cNvSpPr>
-            <a:spLocks noGrp="1"/>
-          </p:cNvSpPr>
-          <p:nvPr>
-            <p:ph idx="1"/>
-          </p:nvPr>
-        </p:nvSpPr>
-        <p:spPr>
+              <a:t>Sixty starts: where each one ended</a:t>
+            </a:r>
+          </a:p>
+        </p:txBody>
+      </p:sp>
+      <p:pic>
+        <p:nvPicPr>
+          <p:cNvPr descr="kmeans_init_spread.png" id="0" name="Picture 1"/>
+          <p:cNvPicPr>
+            <a:picLocks noGrp="1" noChangeAspect="1"/>
+          </p:cNvPicPr>
+          <p:nvPr/>
+        </p:nvPicPr>
+        <p:blipFill>
+          <a:blip r:embed="rId3"/>
+          <a:stretch>
+            <a:fillRect/>
+          </a:stretch>
+        </p:blipFill>
+        <p:spPr bwMode="auto">
           <a:xfrm>
-            <a:off x="457200" y="1200151"/>
-            <a:ext cx="8229600" cy="3394472"/>
+            <a:off x="1243281" y="1166099"/>
+            <a:ext cx="6657437" cy="3360181"/>
           </a:xfrm>
+          <a:prstGeom prst="rect">
+            <a:avLst/>
+          </a:prstGeom>
+          <a:noFill/>
+          <a:ln w="9525">
+            <a:noFill/>
+            <a:headEnd/>
+            <a:tailEnd/>
+          </a:ln>
         </p:spPr>
-        <p:txBody>
-          <a:bodyPr/>
-          <a:lstStyle/>
-          <a:p>
-            <a:pPr lvl="0"/>
-            <a:r>
-              <a:rPr/>
-              <a:t>k is an </a:t>
-            </a:r>
-            <a:r>
-              <a:rPr b="1"/>
-              <a:t>input</a:t>
-            </a:r>
-            <a:r>
-              <a:rPr/>
-              <a:t> to k-means, not something the algorithm discovers</a:t>
-            </a:r>
-          </a:p>
-          <a:p>
-            <a:pPr lvl="0"/>
-            <a:r>
-              <a:rPr/>
-              <a:t>WCSS is monotonically non-increasing in k: at k=m, J=0 exactly</a:t>
-            </a:r>
-          </a:p>
-          <a:p>
-            <a:pPr lvl="0"/>
-            <a:r>
-              <a:rPr/>
-              <a:t>So the raw value of J at the “best” k is not the signal</a:t>
-            </a:r>
-          </a:p>
-          <a:p>
-            <a:pPr lvl="0"/>
-            <a:r>
-              <a:rPr b="1"/>
-              <a:t>The elbow</a:t>
-            </a:r>
-            <a:r>
-              <a:rPr/>
-              <a:t>: where the WCSS curve stops falling steeply, past the true count, an extra centre only subdivides an already-coherent group</a:t>
-            </a:r>
-          </a:p>
-        </p:txBody>
-      </p:sp>
+      </p:pic>
     </p:spTree>
   </p:cSld>
 </p:sld>
@@ -11622,7 +11785,7 @@
             </a:pPr>
             <a:r>
               <a:rPr/>
-              <a:t>The silhouette score</a:t>
+              <a:t>Choosing k</a:t>
             </a:r>
           </a:p>
         </p:txBody>
@@ -11650,37 +11813,40 @@
             <a:pPr lvl="0"/>
             <a:r>
               <a:rPr/>
-              <a:t>For point i: aᵢ is its mean distance to every other point in its </a:t>
+              <a:t>k is an </a:t>
             </a:r>
             <a:r>
               <a:rPr b="1"/>
-              <a:t>own</a:t>
-            </a:r>
-            <a:r>
-              <a:rPr/>
-              <a:t> cluster</a:t>
+              <a:t>input</a:t>
+            </a:r>
+            <a:r>
+              <a:rPr/>
+              <a:t> to k-means, not something the algorithm discovers</a:t>
             </a:r>
           </a:p>
           <a:p>
             <a:pPr lvl="0"/>
             <a:r>
               <a:rPr/>
-              <a:t>bᵢ is its mean distance to the points of the </a:t>
-            </a:r>
+              <a:t>WCSS is monotonically non-increasing in k: at k=m, J=0 exactly</a:t>
+            </a:r>
+          </a:p>
+          <a:p>
+            <a:pPr lvl="0"/>
+            <a:r>
+              <a:rPr/>
+              <a:t>So the raw value of J at the “best” k is not the signal</a:t>
+            </a:r>
+          </a:p>
+          <a:p>
+            <a:pPr lvl="0"/>
             <a:r>
               <a:rPr b="1"/>
-              <a:t>nearest other</a:t>
-            </a:r>
-            <a:r>
-              <a:rPr/>
-              <a:t> cluster</a:t>
-            </a:r>
-          </a:p>
-          <a:p>
-            <a:pPr lvl="0"/>
-            <a:r>
-              <a:rPr/>
-              <a:t>Combine the two into a single number per point</a:t>
+              <a:t>The elbow</a:t>
+            </a:r>
+            <a:r>
+              <a:rPr/>
+              <a:t>: where the WCSS curve stops falling steeply, past the true count, an extra centre only subdivides an already-coherent group</a:t>
             </a:r>
           </a:p>
         </p:txBody>
@@ -11691,6 +11857,224 @@
 </file>
 
 <file path=ppt/slides/slide19.xml><?xml version="1.0" encoding="utf-8"?>
+<p:sld xmlns:a="http://schemas.openxmlformats.org/drawingml/2006/main" xmlns:r="http://schemas.openxmlformats.org/officeDocument/2006/relationships" xmlns:p="http://schemas.openxmlformats.org/presentationml/2006/main">
+  <p:cSld>
+    <p:spTree>
+      <p:nvGrpSpPr>
+        <p:cNvPr id="1" name=""/>
+        <p:cNvGrpSpPr/>
+        <p:nvPr/>
+      </p:nvGrpSpPr>
+      <p:grpSpPr>
+        <a:xfrm>
+          <a:off x="0" y="0"/>
+          <a:ext cx="0" cy="0"/>
+          <a:chOff x="0" y="0"/>
+          <a:chExt cx="0" cy="0"/>
+        </a:xfrm>
+      </p:grpSpPr>
+      <p:sp>
+        <p:nvSpPr>
+          <p:cNvPr id="2" name="Title 1"/>
+          <p:cNvSpPr>
+            <a:spLocks noGrp="1"/>
+          </p:cNvSpPr>
+          <p:nvPr>
+            <p:ph type="title"/>
+          </p:nvPr>
+        </p:nvSpPr>
+        <p:spPr>
+          <a:xfrm>
+            <a:off x="457200" y="205979"/>
+            <a:ext cx="8229600" cy="857250"/>
+          </a:xfrm>
+        </p:spPr>
+        <p:txBody>
+          <a:bodyPr/>
+          <a:lstStyle/>
+          <a:p>
+            <a:pPr lvl="0" indent="0" marL="0">
+              <a:buNone/>
+            </a:pPr>
+            <a:r>
+              <a:rPr/>
+              <a:t>The silhouette score</a:t>
+            </a:r>
+          </a:p>
+        </p:txBody>
+      </p:sp>
+      <p:sp>
+        <p:nvSpPr>
+          <p:cNvPr id="3" name="Content Placeholder 2"/>
+          <p:cNvSpPr>
+            <a:spLocks noGrp="1"/>
+          </p:cNvSpPr>
+          <p:nvPr>
+            <p:ph idx="1"/>
+          </p:nvPr>
+        </p:nvSpPr>
+        <p:spPr>
+          <a:xfrm>
+            <a:off x="457200" y="1200151"/>
+            <a:ext cx="8229600" cy="3394472"/>
+          </a:xfrm>
+        </p:spPr>
+        <p:txBody>
+          <a:bodyPr/>
+          <a:lstStyle/>
+          <a:p>
+            <a:pPr lvl="0"/>
+            <a:r>
+              <a:rPr/>
+              <a:t>For point i: aᵢ is its mean distance to every other point in its </a:t>
+            </a:r>
+            <a:r>
+              <a:rPr b="1"/>
+              <a:t>own</a:t>
+            </a:r>
+            <a:r>
+              <a:rPr/>
+              <a:t> cluster</a:t>
+            </a:r>
+          </a:p>
+          <a:p>
+            <a:pPr lvl="0"/>
+            <a:r>
+              <a:rPr/>
+              <a:t>bᵢ is its mean distance to the points of the </a:t>
+            </a:r>
+            <a:r>
+              <a:rPr b="1"/>
+              <a:t>nearest other</a:t>
+            </a:r>
+            <a:r>
+              <a:rPr/>
+              <a:t> cluster</a:t>
+            </a:r>
+          </a:p>
+          <a:p>
+            <a:pPr lvl="0"/>
+            <a:r>
+              <a:rPr/>
+              <a:t>Combine the two into a single number per point</a:t>
+            </a:r>
+          </a:p>
+        </p:txBody>
+      </p:sp>
+    </p:spTree>
+  </p:cSld>
+</p:sld>
+</file>
+
+<file path=ppt/slides/slide2.xml><?xml version="1.0" encoding="utf-8"?>
+<p:sld xmlns:a="http://schemas.openxmlformats.org/drawingml/2006/main" xmlns:r="http://schemas.openxmlformats.org/officeDocument/2006/relationships" xmlns:p="http://schemas.openxmlformats.org/presentationml/2006/main">
+  <p:cSld>
+    <p:spTree>
+      <p:nvGrpSpPr>
+        <p:cNvPr id="1" name=""/>
+        <p:cNvGrpSpPr/>
+        <p:nvPr/>
+      </p:nvGrpSpPr>
+      <p:grpSpPr>
+        <a:xfrm>
+          <a:off x="0" y="0"/>
+          <a:ext cx="0" cy="0"/>
+          <a:chOff x="0" y="0"/>
+          <a:chExt cx="0" cy="0"/>
+        </a:xfrm>
+      </p:grpSpPr>
+      <p:sp>
+        <p:nvSpPr>
+          <p:cNvPr id="2" name="Title 1"/>
+          <p:cNvSpPr>
+            <a:spLocks noGrp="1"/>
+          </p:cNvSpPr>
+          <p:nvPr>
+            <p:ph type="title"/>
+          </p:nvPr>
+        </p:nvSpPr>
+        <p:spPr>
+          <a:xfrm>
+            <a:off x="457200" y="205979"/>
+            <a:ext cx="8229600" cy="857250"/>
+          </a:xfrm>
+        </p:spPr>
+        <p:txBody>
+          <a:bodyPr/>
+          <a:lstStyle/>
+          <a:p>
+            <a:pPr lvl="0" indent="0" marL="0">
+              <a:buNone/>
+            </a:pPr>
+            <a:r>
+              <a:rPr/>
+              <a:t>Agenda</a:t>
+            </a:r>
+          </a:p>
+        </p:txBody>
+      </p:sp>
+      <p:sp>
+        <p:nvSpPr>
+          <p:cNvPr id="3" name="Content Placeholder 2"/>
+          <p:cNvSpPr>
+            <a:spLocks noGrp="1"/>
+          </p:cNvSpPr>
+          <p:nvPr>
+            <p:ph idx="1"/>
+          </p:nvPr>
+        </p:nvSpPr>
+        <p:spPr>
+          <a:xfrm>
+            <a:off x="457200" y="1200151"/>
+            <a:ext cx="8229600" cy="3394472"/>
+          </a:xfrm>
+        </p:spPr>
+        <p:txBody>
+          <a:bodyPr/>
+          <a:lstStyle/>
+          <a:p>
+            <a:pPr lvl="0"/>
+            <a:r>
+              <a:rPr/>
+              <a:t>A fourth question this course asks of data: no target at all</a:t>
+            </a:r>
+          </a:p>
+          <a:p>
+            <a:pPr lvl="0"/>
+            <a:r>
+              <a:rPr/>
+              <a:t>k-means: the objective, Lloyd’s algorithm, choosing k</a:t>
+            </a:r>
+          </a:p>
+          <a:p>
+            <a:pPr lvl="0"/>
+            <a:r>
+              <a:rPr/>
+              <a:t>Hierarchical clustering and DBSCAN: shape versus density</a:t>
+            </a:r>
+          </a:p>
+          <a:p>
+            <a:pPr lvl="0"/>
+            <a:r>
+              <a:rPr/>
+              <a:t>Validating a clustering with no labels</a:t>
+            </a:r>
+          </a:p>
+          <a:p>
+            <a:pPr lvl="0"/>
+            <a:r>
+              <a:rPr/>
+              <a:t>Principal component analysis (PCA) and t-SNE</a:t>
+            </a:r>
+          </a:p>
+        </p:txBody>
+      </p:sp>
+    </p:spTree>
+  </p:cSld>
+</p:sld>
+</file>
+
+<file path=ppt/slides/slide20.xml><?xml version="1.0" encoding="utf-8"?>
 <p:sld xmlns:a="http://schemas.openxmlformats.org/drawingml/2006/main" xmlns:r="http://schemas.openxmlformats.org/officeDocument/2006/relationships" xmlns:p="http://schemas.openxmlformats.org/presentationml/2006/main">
   <p:cSld>
     <p:spTree>
@@ -11772,115 +12156,7 @@
 </p:sld>
 </file>
 
-<file path=ppt/slides/slide2.xml><?xml version="1.0" encoding="utf-8"?>
-<p:sld xmlns:a="http://schemas.openxmlformats.org/drawingml/2006/main" xmlns:r="http://schemas.openxmlformats.org/officeDocument/2006/relationships" xmlns:p="http://schemas.openxmlformats.org/presentationml/2006/main">
-  <p:cSld>
-    <p:spTree>
-      <p:nvGrpSpPr>
-        <p:cNvPr id="1" name=""/>
-        <p:cNvGrpSpPr/>
-        <p:nvPr/>
-      </p:nvGrpSpPr>
-      <p:grpSpPr>
-        <a:xfrm>
-          <a:off x="0" y="0"/>
-          <a:ext cx="0" cy="0"/>
-          <a:chOff x="0" y="0"/>
-          <a:chExt cx="0" cy="0"/>
-        </a:xfrm>
-      </p:grpSpPr>
-      <p:sp>
-        <p:nvSpPr>
-          <p:cNvPr id="2" name="Title 1"/>
-          <p:cNvSpPr>
-            <a:spLocks noGrp="1"/>
-          </p:cNvSpPr>
-          <p:nvPr>
-            <p:ph type="title"/>
-          </p:nvPr>
-        </p:nvSpPr>
-        <p:spPr>
-          <a:xfrm>
-            <a:off x="457200" y="205979"/>
-            <a:ext cx="8229600" cy="857250"/>
-          </a:xfrm>
-        </p:spPr>
-        <p:txBody>
-          <a:bodyPr/>
-          <a:lstStyle/>
-          <a:p>
-            <a:pPr lvl="0" indent="0" marL="0">
-              <a:buNone/>
-            </a:pPr>
-            <a:r>
-              <a:rPr/>
-              <a:t>Agenda</a:t>
-            </a:r>
-          </a:p>
-        </p:txBody>
-      </p:sp>
-      <p:sp>
-        <p:nvSpPr>
-          <p:cNvPr id="3" name="Content Placeholder 2"/>
-          <p:cNvSpPr>
-            <a:spLocks noGrp="1"/>
-          </p:cNvSpPr>
-          <p:nvPr>
-            <p:ph idx="1"/>
-          </p:nvPr>
-        </p:nvSpPr>
-        <p:spPr>
-          <a:xfrm>
-            <a:off x="457200" y="1200151"/>
-            <a:ext cx="8229600" cy="3394472"/>
-          </a:xfrm>
-        </p:spPr>
-        <p:txBody>
-          <a:bodyPr/>
-          <a:lstStyle/>
-          <a:p>
-            <a:pPr lvl="0"/>
-            <a:r>
-              <a:rPr/>
-              <a:t>A fourth question this course asks of data: no target at all</a:t>
-            </a:r>
-          </a:p>
-          <a:p>
-            <a:pPr lvl="0"/>
-            <a:r>
-              <a:rPr/>
-              <a:t>k-means: the objective, Lloyd’s algorithm, choosing k</a:t>
-            </a:r>
-          </a:p>
-          <a:p>
-            <a:pPr lvl="0"/>
-            <a:r>
-              <a:rPr/>
-              <a:t>Hierarchical clustering and DBSCAN: shape versus density</a:t>
-            </a:r>
-          </a:p>
-          <a:p>
-            <a:pPr lvl="0"/>
-            <a:r>
-              <a:rPr/>
-              <a:t>Validating a clustering with no labels</a:t>
-            </a:r>
-          </a:p>
-          <a:p>
-            <a:pPr lvl="0"/>
-            <a:r>
-              <a:rPr/>
-              <a:t>Principal component analysis (PCA) and t-SNE</a:t>
-            </a:r>
-          </a:p>
-        </p:txBody>
-      </p:sp>
-    </p:spTree>
-  </p:cSld>
-</p:sld>
-</file>
-
-<file path=ppt/slides/slide20.xml><?xml version="1.0" encoding="utf-8"?>
+<file path=ppt/slides/slide21.xml><?xml version="1.0" encoding="utf-8"?>
 <p:sld xmlns:a="http://schemas.openxmlformats.org/drawingml/2006/main" xmlns:r="http://schemas.openxmlformats.org/officeDocument/2006/relationships" xmlns:p="http://schemas.openxmlformats.org/presentationml/2006/main">
   <p:cSld>
     <p:spTree>
@@ -11962,7 +12238,7 @@
 </p:sld>
 </file>
 
-<file path=ppt/slides/slide21.xml><?xml version="1.0" encoding="utf-8"?>
+<file path=ppt/slides/slide22.xml><?xml version="1.0" encoding="utf-8"?>
 <p:sld xmlns:a="http://schemas.openxmlformats.org/drawingml/2006/main" xmlns:r="http://schemas.openxmlformats.org/officeDocument/2006/relationships" xmlns:p="http://schemas.openxmlformats.org/presentationml/2006/main">
   <p:cSld>
     <p:spTree>
@@ -12087,7 +12363,7 @@
 </p:sld>
 </file>
 
-<file path=ppt/slides/slide22.xml><?xml version="1.0" encoding="utf-8"?>
+<file path=ppt/slides/slide23.xml><?xml version="1.0" encoding="utf-8"?>
 <p:sld xmlns:a="http://schemas.openxmlformats.org/drawingml/2006/main" xmlns:r="http://schemas.openxmlformats.org/officeDocument/2006/relationships" xmlns:p="http://schemas.openxmlformats.org/presentationml/2006/main">
   <p:cSld>
     <p:spTree>
@@ -12169,139 +12445,6 @@
 </p:sld>
 </file>
 
-<file path=ppt/slides/slide23.xml><?xml version="1.0" encoding="utf-8"?>
-<p:sld xmlns:a="http://schemas.openxmlformats.org/drawingml/2006/main" xmlns:r="http://schemas.openxmlformats.org/officeDocument/2006/relationships" xmlns:p="http://schemas.openxmlformats.org/presentationml/2006/main">
-  <p:cSld>
-    <p:spTree>
-      <p:nvGrpSpPr>
-        <p:cNvPr id="1" name=""/>
-        <p:cNvGrpSpPr/>
-        <p:nvPr/>
-      </p:nvGrpSpPr>
-      <p:grpSpPr>
-        <a:xfrm>
-          <a:off x="0" y="0"/>
-          <a:ext cx="0" cy="0"/>
-          <a:chOff x="0" y="0"/>
-          <a:chExt cx="0" cy="0"/>
-        </a:xfrm>
-      </p:grpSpPr>
-      <p:sp>
-        <p:nvSpPr>
-          <p:cNvPr id="2" name="Title 1"/>
-          <p:cNvSpPr>
-            <a:spLocks noGrp="1"/>
-          </p:cNvSpPr>
-          <p:nvPr>
-            <p:ph type="title"/>
-          </p:nvPr>
-        </p:nvSpPr>
-        <p:spPr>
-          <a:xfrm>
-            <a:off x="457200" y="205979"/>
-            <a:ext cx="8229600" cy="857250"/>
-          </a:xfrm>
-        </p:spPr>
-        <p:txBody>
-          <a:bodyPr/>
-          <a:lstStyle/>
-          <a:p>
-            <a:pPr lvl="0" indent="0" marL="0">
-              <a:buNone/>
-            </a:pPr>
-            <a:r>
-              <a:rPr/>
-              <a:t>The adjusted Rand index</a:t>
-            </a:r>
-          </a:p>
-        </p:txBody>
-      </p:sp>
-      <p:sp>
-        <p:nvSpPr>
-          <p:cNvPr id="3" name="Content Placeholder 2"/>
-          <p:cNvSpPr>
-            <a:spLocks noGrp="1"/>
-          </p:cNvSpPr>
-          <p:nvPr>
-            <p:ph idx="1"/>
-          </p:nvPr>
-        </p:nvSpPr>
-        <p:spPr>
-          <a:xfrm>
-            <a:off x="457200" y="1200151"/>
-            <a:ext cx="8229600" cy="3394472"/>
-          </a:xfrm>
-        </p:spPr>
-        <p:txBody>
-          <a:bodyPr/>
-          <a:lstStyle/>
-          <a:p>
-            <a:pPr lvl="0"/>
-            <a:r>
-              <a:rPr/>
-              <a:t>Compares two labellings: a </a:t>
-            </a:r>
-            <a:r>
-              <a:rPr b="1"/>
-              <a:t>random</a:t>
-            </a:r>
-            <a:r>
-              <a:rPr/>
-              <a:t> assignment scores 0, </a:t>
-            </a:r>
-            <a:r>
-              <a:rPr b="1"/>
-              <a:t>identical</a:t>
-            </a:r>
-            <a:r>
-              <a:rPr/>
-              <a:t> labellings score 1</a:t>
-            </a:r>
-          </a:p>
-          <a:p>
-            <a:pPr lvl="0"/>
-            <a:r>
-              <a:rPr/>
-              <a:t>Cluster “0” need not mean the same thing on both sides: relabelling is handled</a:t>
-            </a:r>
-          </a:p>
-          <a:p>
-            <a:pPr lvl="0"/>
-            <a:r>
-              <a:rPr/>
-              <a:t>k-means vs. the true segments: </a:t>
-            </a:r>
-            <a:r>
-              <a:rPr b="1"/>
-              <a:t>0.985</a:t>
-            </a:r>
-            <a:r>
-              <a:rPr/>
-              <a:t>, near-perfect</a:t>
-            </a:r>
-          </a:p>
-          <a:p>
-            <a:pPr lvl="0"/>
-            <a:r>
-              <a:rPr/>
-              <a:t>An </a:t>
-            </a:r>
-            <a:r>
-              <a:rPr b="1"/>
-              <a:t>external</a:t>
-            </a:r>
-            <a:r>
-              <a:rPr/>
-              <a:t> metric: needs a ground truth, which section 4 asks about when there isn’t one</a:t>
-            </a:r>
-          </a:p>
-        </p:txBody>
-      </p:sp>
-    </p:spTree>
-  </p:cSld>
-</p:sld>
-</file>
-
 <file path=ppt/slides/slide24.xml><?xml version="1.0" encoding="utf-8"?>
 <p:sld xmlns:a="http://schemas.openxmlformats.org/drawingml/2006/main" xmlns:r="http://schemas.openxmlformats.org/officeDocument/2006/relationships" xmlns:p="http://schemas.openxmlformats.org/presentationml/2006/main">
   <p:cSld>
@@ -12344,7 +12487,7 @@
             </a:pPr>
             <a:r>
               <a:rPr/>
-              <a:t>Notebook 1, live</a:t>
+              <a:t>The adjusted Rand index</a:t>
             </a:r>
           </a:p>
         </p:txBody>
@@ -12372,21 +12515,60 @@
             <a:pPr lvl="0"/>
             <a:r>
               <a:rPr/>
-              <a:t>k-means from scratch, checked against scikit-learn’s k-means++ and 10-restart defaults</a:t>
+              <a:t>Compares two labellings: a </a:t>
+            </a:r>
+            <a:r>
+              <a:rPr b="1"/>
+              <a:t>random</a:t>
+            </a:r>
+            <a:r>
+              <a:rPr/>
+              <a:t> assignment scores 0, </a:t>
+            </a:r>
+            <a:r>
+              <a:rPr b="1"/>
+              <a:t>identical</a:t>
+            </a:r>
+            <a:r>
+              <a:rPr/>
+              <a:t> labellings score 1</a:t>
             </a:r>
           </a:p>
           <a:p>
             <a:pPr lvl="0"/>
             <a:r>
               <a:rPr/>
-              <a:t>The 30-seed initialisation comparison, reproduced live</a:t>
+              <a:t>Cluster “0” need not mean the same thing on both sides: relabelling is handled</a:t>
             </a:r>
           </a:p>
           <a:p>
             <a:pPr lvl="0"/>
             <a:r>
               <a:rPr/>
-              <a:t>The elbow and silhouette curves, computed directly from the data</a:t>
+              <a:t>k-means vs. the true segments: </a:t>
+            </a:r>
+            <a:r>
+              <a:rPr b="1"/>
+              <a:t>0.985</a:t>
+            </a:r>
+            <a:r>
+              <a:rPr/>
+              <a:t>, near-perfect</a:t>
+            </a:r>
+          </a:p>
+          <a:p>
+            <a:pPr lvl="0"/>
+            <a:r>
+              <a:rPr/>
+              <a:t>An </a:t>
+            </a:r>
+            <a:r>
+              <a:rPr b="1"/>
+              <a:t>external</a:t>
+            </a:r>
+            <a:r>
+              <a:rPr/>
+              <a:t> metric: needs a ground truth, which section 4 asks about when there isn’t one</a:t>
             </a:r>
           </a:p>
         </p:txBody>
@@ -12438,7 +12620,7 @@
             </a:pPr>
             <a:r>
               <a:rPr/>
-              <a:t>A dataset built to defeat k-means</a:t>
+              <a:t>Notebook 1, live</a:t>
             </a:r>
           </a:p>
         </p:txBody>
@@ -12466,55 +12648,21 @@
             <a:pPr lvl="0"/>
             <a:r>
               <a:rPr/>
-              <a:t>Security suspects some of 1,500 sessions were automated</a:t>
+              <a:t>k-means from scratch, checked against scikit-learn’s k-means++ and 10-restart defaults</a:t>
             </a:r>
           </a:p>
           <a:p>
             <a:pPr lvl="0"/>
             <a:r>
               <a:rPr/>
-              <a:t>Two features: duration in minutes, pages viewed</a:t>
+              <a:t>The 30-seed initialisation comparison, reproduced live</a:t>
             </a:r>
           </a:p>
           <a:p>
             <a:pPr lvl="0"/>
             <a:r>
-              <a:rPr b="1"/>
-              <a:t>12%</a:t>
-            </a:r>
-            <a:r>
-              <a:rPr/>
-              <a:t> are, by construction, </a:t>
-            </a:r>
-            <a:r>
-              <a:rPr b="1"/>
-              <a:t>bots</a:t>
-            </a:r>
-            <a:r>
-              <a:rPr/>
-              <a:t>: scripted and consistent</a:t>
-            </a:r>
-          </a:p>
-          <a:p>
-            <a:pPr lvl="0"/>
-            <a:r>
-              <a:rPr/>
-              <a:t>Bots and humans share the </a:t>
-            </a:r>
-            <a:r>
-              <a:rPr b="1"/>
-              <a:t>same mean</a:t>
-            </a:r>
-            <a:r>
-              <a:rPr/>
-              <a:t>: a tight cloud inside a diffuse ring</a:t>
-            </a:r>
-          </a:p>
-          <a:p>
-            <a:pPr lvl="0"/>
-            <a:r>
-              <a:rPr/>
-              <a:t>No straight cut separates them: there are no two offset clouds</a:t>
+              <a:rPr/>
+              <a:t>The elbow and silhouette curves, computed directly from the data</a:t>
             </a:r>
           </a:p>
         </p:txBody>
@@ -12525,6 +12673,134 @@
 </file>
 
 <file path=ppt/slides/slide26.xml><?xml version="1.0" encoding="utf-8"?>
+<p:sld xmlns:a="http://schemas.openxmlformats.org/drawingml/2006/main" xmlns:r="http://schemas.openxmlformats.org/officeDocument/2006/relationships" xmlns:p="http://schemas.openxmlformats.org/presentationml/2006/main">
+  <p:cSld>
+    <p:spTree>
+      <p:nvGrpSpPr>
+        <p:cNvPr id="1" name=""/>
+        <p:cNvGrpSpPr/>
+        <p:nvPr/>
+      </p:nvGrpSpPr>
+      <p:grpSpPr>
+        <a:xfrm>
+          <a:off x="0" y="0"/>
+          <a:ext cx="0" cy="0"/>
+          <a:chOff x="0" y="0"/>
+          <a:chExt cx="0" cy="0"/>
+        </a:xfrm>
+      </p:grpSpPr>
+      <p:sp>
+        <p:nvSpPr>
+          <p:cNvPr id="2" name="Title 1"/>
+          <p:cNvSpPr>
+            <a:spLocks noGrp="1"/>
+          </p:cNvSpPr>
+          <p:nvPr>
+            <p:ph type="title"/>
+          </p:nvPr>
+        </p:nvSpPr>
+        <p:spPr>
+          <a:xfrm>
+            <a:off x="457200" y="205979"/>
+            <a:ext cx="8229600" cy="857250"/>
+          </a:xfrm>
+        </p:spPr>
+        <p:txBody>
+          <a:bodyPr/>
+          <a:lstStyle/>
+          <a:p>
+            <a:pPr lvl="0" indent="0" marL="0">
+              <a:buNone/>
+            </a:pPr>
+            <a:r>
+              <a:rPr/>
+              <a:t>A dataset built to defeat k-means</a:t>
+            </a:r>
+          </a:p>
+        </p:txBody>
+      </p:sp>
+      <p:sp>
+        <p:nvSpPr>
+          <p:cNvPr id="3" name="Content Placeholder 2"/>
+          <p:cNvSpPr>
+            <a:spLocks noGrp="1"/>
+          </p:cNvSpPr>
+          <p:nvPr>
+            <p:ph idx="1"/>
+          </p:nvPr>
+        </p:nvSpPr>
+        <p:spPr>
+          <a:xfrm>
+            <a:off x="457200" y="1200151"/>
+            <a:ext cx="8229600" cy="3394472"/>
+          </a:xfrm>
+        </p:spPr>
+        <p:txBody>
+          <a:bodyPr/>
+          <a:lstStyle/>
+          <a:p>
+            <a:pPr lvl="0"/>
+            <a:r>
+              <a:rPr/>
+              <a:t>Security suspects some of 1,500 sessions were automated</a:t>
+            </a:r>
+          </a:p>
+          <a:p>
+            <a:pPr lvl="0"/>
+            <a:r>
+              <a:rPr/>
+              <a:t>Two features: duration in minutes, pages viewed</a:t>
+            </a:r>
+          </a:p>
+          <a:p>
+            <a:pPr lvl="0"/>
+            <a:r>
+              <a:rPr b="1"/>
+              <a:t>12%</a:t>
+            </a:r>
+            <a:r>
+              <a:rPr/>
+              <a:t> are, by construction, </a:t>
+            </a:r>
+            <a:r>
+              <a:rPr b="1"/>
+              <a:t>bots</a:t>
+            </a:r>
+            <a:r>
+              <a:rPr/>
+              <a:t>: scripted and consistent</a:t>
+            </a:r>
+          </a:p>
+          <a:p>
+            <a:pPr lvl="0"/>
+            <a:r>
+              <a:rPr/>
+              <a:t>Bots and humans share the </a:t>
+            </a:r>
+            <a:r>
+              <a:rPr b="1"/>
+              <a:t>same mean</a:t>
+            </a:r>
+            <a:r>
+              <a:rPr/>
+              <a:t>: a tight cloud inside a diffuse ring</a:t>
+            </a:r>
+          </a:p>
+          <a:p>
+            <a:pPr lvl="0"/>
+            <a:r>
+              <a:rPr/>
+              <a:t>No straight cut separates them: there are no two offset clouds</a:t>
+            </a:r>
+          </a:p>
+        </p:txBody>
+      </p:sp>
+    </p:spTree>
+  </p:cSld>
+</p:sld>
+</file>
+
+<file path=ppt/slides/slide27.xml><?xml version="1.0" encoding="utf-8"?>
 <p:sld xmlns:a="http://schemas.openxmlformats.org/drawingml/2006/main" xmlns:r="http://schemas.openxmlformats.org/officeDocument/2006/relationships" xmlns:p="http://schemas.openxmlformats.org/presentationml/2006/main">
   <p:cSld>
     <p:spTree>
@@ -12606,123 +12882,6 @@
 </p:sld>
 </file>
 
-<file path=ppt/slides/slide27.xml><?xml version="1.0" encoding="utf-8"?>
-<p:sld xmlns:a="http://schemas.openxmlformats.org/drawingml/2006/main" xmlns:r="http://schemas.openxmlformats.org/officeDocument/2006/relationships" xmlns:p="http://schemas.openxmlformats.org/presentationml/2006/main">
-  <p:cSld>
-    <p:spTree>
-      <p:nvGrpSpPr>
-        <p:cNvPr id="1" name=""/>
-        <p:cNvGrpSpPr/>
-        <p:nvPr/>
-      </p:nvGrpSpPr>
-      <p:grpSpPr>
-        <a:xfrm>
-          <a:off x="0" y="0"/>
-          <a:ext cx="0" cy="0"/>
-          <a:chOff x="0" y="0"/>
-          <a:chExt cx="0" cy="0"/>
-        </a:xfrm>
-      </p:grpSpPr>
-      <p:sp>
-        <p:nvSpPr>
-          <p:cNvPr id="2" name="Title 1"/>
-          <p:cNvSpPr>
-            <a:spLocks noGrp="1"/>
-          </p:cNvSpPr>
-          <p:nvPr>
-            <p:ph type="title"/>
-          </p:nvPr>
-        </p:nvSpPr>
-        <p:spPr>
-          <a:xfrm>
-            <a:off x="457200" y="205979"/>
-            <a:ext cx="8229600" cy="857250"/>
-          </a:xfrm>
-        </p:spPr>
-        <p:txBody>
-          <a:bodyPr/>
-          <a:lstStyle/>
-          <a:p>
-            <a:pPr lvl="0" indent="0" marL="0">
-              <a:buNone/>
-            </a:pPr>
-            <a:r>
-              <a:rPr/>
-              <a:t>k-means on this shape</a:t>
-            </a:r>
-          </a:p>
-        </p:txBody>
-      </p:sp>
-      <p:sp>
-        <p:nvSpPr>
-          <p:cNvPr id="3" name="Content Placeholder 2"/>
-          <p:cNvSpPr>
-            <a:spLocks noGrp="1"/>
-          </p:cNvSpPr>
-          <p:nvPr>
-            <p:ph idx="1"/>
-          </p:nvPr>
-        </p:nvSpPr>
-        <p:spPr>
-          <a:xfrm>
-            <a:off x="457200" y="1200151"/>
-            <a:ext cx="8229600" cy="3394472"/>
-          </a:xfrm>
-        </p:spPr>
-        <p:txBody>
-          <a:bodyPr/>
-          <a:lstStyle/>
-          <a:p>
-            <a:pPr lvl="0"/>
-            <a:r>
-              <a:rPr/>
-              <a:t>Run k-means with k=2 on the session data</a:t>
-            </a:r>
-          </a:p>
-          <a:p>
-            <a:pPr lvl="0"/>
-            <a:r>
-              <a:rPr/>
-              <a:t>ARI: </a:t>
-            </a:r>
-            <a:r>
-              <a:rPr b="1"/>
-              <a:t>-0.046</a:t>
-            </a:r>
-            <a:r>
-              <a:rPr/>
-              <a:t>, indistinguishable from a random split</a:t>
-            </a:r>
-          </a:p>
-          <a:p>
-            <a:pPr lvl="0"/>
-            <a:r>
-              <a:rPr/>
-              <a:t>Not a tuning or initialisation failure, no starting point fixes it</a:t>
-            </a:r>
-          </a:p>
-          <a:p>
-            <a:pPr lvl="0"/>
-            <a:r>
-              <a:rPr/>
-              <a:t>WCSS wants round, compact clusters; the only cut through this cloud slices </a:t>
-            </a:r>
-            <a:r>
-              <a:rPr b="1"/>
-              <a:t>both</a:t>
-            </a:r>
-            <a:r>
-              <a:rPr/>
-              <a:t> the bot core and the human ring in half</a:t>
-            </a:r>
-          </a:p>
-        </p:txBody>
-      </p:sp>
-    </p:spTree>
-  </p:cSld>
-</p:sld>
-</file>
-
 <file path=ppt/slides/slide28.xml><?xml version="1.0" encoding="utf-8"?>
 <p:sld xmlns:a="http://schemas.openxmlformats.org/drawingml/2006/main" xmlns:r="http://schemas.openxmlformats.org/officeDocument/2006/relationships" xmlns:p="http://schemas.openxmlformats.org/presentationml/2006/main">
   <p:cSld>
@@ -12765,7 +12924,7 @@
             </a:pPr>
             <a:r>
               <a:rPr/>
-              <a:t>Merge the two closest</a:t>
+              <a:t>k-means on this shape</a:t>
             </a:r>
           </a:p>
         </p:txBody>
@@ -12793,60 +12952,44 @@
             <a:pPr lvl="0"/>
             <a:r>
               <a:rPr/>
-              <a:t>Start with every point as its </a:t>
+              <a:t>Run k-means with k=2 on the session data</a:t>
+            </a:r>
+          </a:p>
+          <a:p>
+            <a:pPr lvl="0"/>
+            <a:r>
+              <a:rPr/>
+              <a:t>ARI: </a:t>
             </a:r>
             <a:r>
               <a:rPr b="1"/>
-              <a:t>own</a:t>
-            </a:r>
-            <a:r>
-              <a:rPr/>
-              <a:t> cluster</a:t>
+              <a:t>-0.046</a:t>
+            </a:r>
+            <a:r>
+              <a:rPr/>
+              <a:t>, indistinguishable from a random split</a:t>
             </a:r>
           </a:p>
           <a:p>
             <a:pPr lvl="0"/>
             <a:r>
               <a:rPr/>
-              <a:t>Repeatedly merge the two </a:t>
+              <a:t>Not a tuning or initialisation failure, no starting point fixes it</a:t>
+            </a:r>
+          </a:p>
+          <a:p>
+            <a:pPr lvl="0"/>
+            <a:r>
+              <a:rPr/>
+              <a:t>WCSS wants round, compact clusters; the only cut through this cloud slices </a:t>
             </a:r>
             <a:r>
               <a:rPr b="1"/>
-              <a:t>closest</a:t>
-            </a:r>
-            <a:r>
-              <a:rPr/>
-              <a:t> clusters, recording every merge as a branch in a tree: a </a:t>
-            </a:r>
-            <a:r>
-              <a:rPr b="1"/>
-              <a:t>dendrogram</a:t>
-            </a:r>
-          </a:p>
-          <a:p>
-            <a:pPr lvl="0"/>
-            <a:r>
-              <a:rPr/>
-              <a:t>Cutting the tree at a height is equivalent to choosing k: branches crossed = cluster count</a:t>
-            </a:r>
-          </a:p>
-          <a:p>
-            <a:pPr lvl="0"/>
-            <a:r>
-              <a:rPr/>
-              <a:t>“Closest” needs a rule for distance </a:t>
-            </a:r>
-            <a:r>
-              <a:rPr b="1"/>
-              <a:t>between clusters</a:t>
-            </a:r>
-            <a:r>
-              <a:rPr/>
-              <a:t>: the </a:t>
-            </a:r>
-            <a:r>
-              <a:rPr b="1"/>
-              <a:t>linkage criterion</a:t>
+              <a:t>both</a:t>
+            </a:r>
+            <a:r>
+              <a:rPr/>
+              <a:t> the bot core and the human ring in half</a:t>
             </a:r>
           </a:p>
         </p:txBody>
@@ -12898,7 +13041,7 @@
             </a:pPr>
             <a:r>
               <a:rPr/>
-              <a:t>Four notions of “closest”</a:t>
+              <a:t>Merge the two closest</a:t>
             </a:r>
           </a:p>
         </p:txBody>
@@ -12925,53 +13068,61 @@
           <a:p>
             <a:pPr lvl="0"/>
             <a:r>
+              <a:rPr/>
+              <a:t>Start with every point as its </a:t>
+            </a:r>
+            <a:r>
               <a:rPr b="1"/>
-              <a:t>Single</a:t>
-            </a:r>
-            <a:r>
-              <a:rPr/>
-              <a:t>: closest pair, which can chain a winding path, or bridge two groups at one touching point</a:t>
+              <a:t>own</a:t>
+            </a:r>
+            <a:r>
+              <a:rPr/>
+              <a:t> cluster</a:t>
             </a:r>
           </a:p>
           <a:p>
             <a:pPr lvl="0"/>
             <a:r>
+              <a:rPr/>
+              <a:t>Repeatedly merge the two </a:t>
+            </a:r>
+            <a:r>
               <a:rPr b="1"/>
-              <a:t>Complete</a:t>
-            </a:r>
-            <a:r>
-              <a:rPr/>
-              <a:t>: farthest pair, which favours compact groups</a:t>
+              <a:t>closest</a:t>
+            </a:r>
+            <a:r>
+              <a:rPr/>
+              <a:t> clusters, recording every merge as a branch in a tree: a </a:t>
+            </a:r>
+            <a:r>
+              <a:rPr b="1"/>
+              <a:t>dendrogram</a:t>
             </a:r>
           </a:p>
           <a:p>
             <a:pPr lvl="0"/>
             <a:r>
+              <a:rPr/>
+              <a:t>Cutting the tree at a height is equivalent to choosing k: branches crossed = cluster count</a:t>
+            </a:r>
+          </a:p>
+          <a:p>
+            <a:pPr lvl="0"/>
+            <a:r>
+              <a:rPr/>
+              <a:t>“Closest” needs a rule for distance </a:t>
+            </a:r>
+            <a:r>
               <a:rPr b="1"/>
-              <a:t>Average</a:t>
-            </a:r>
-            <a:r>
-              <a:rPr/>
-              <a:t>: mean distance over every cross-pair, a compromise</a:t>
-            </a:r>
-          </a:p>
-          <a:p>
-            <a:pPr lvl="0"/>
+              <a:t>between clusters</a:t>
+            </a:r>
+            <a:r>
+              <a:rPr/>
+              <a:t>: the </a:t>
+            </a:r>
             <a:r>
               <a:rPr b="1"/>
-              <a:t>Ward</a:t>
-            </a:r>
-            <a:r>
-              <a:rPr/>
-              <a:t>: least added variance, the </a:t>
-            </a:r>
-            <a:r>
-              <a:rPr i="1"/>
-              <a:t>same</a:t>
-            </a:r>
-            <a:r>
-              <a:rPr/>
-              <a:t> objective k-means minimises</a:t>
+              <a:t>linkage criterion</a:t>
             </a:r>
           </a:p>
         </p:txBody>
@@ -13084,6 +13235,131 @@
 </file>
 
 <file path=ppt/slides/slide30.xml><?xml version="1.0" encoding="utf-8"?>
+<p:sld xmlns:a="http://schemas.openxmlformats.org/drawingml/2006/main" xmlns:r="http://schemas.openxmlformats.org/officeDocument/2006/relationships" xmlns:p="http://schemas.openxmlformats.org/presentationml/2006/main">
+  <p:cSld>
+    <p:spTree>
+      <p:nvGrpSpPr>
+        <p:cNvPr id="1" name=""/>
+        <p:cNvGrpSpPr/>
+        <p:nvPr/>
+      </p:nvGrpSpPr>
+      <p:grpSpPr>
+        <a:xfrm>
+          <a:off x="0" y="0"/>
+          <a:ext cx="0" cy="0"/>
+          <a:chOff x="0" y="0"/>
+          <a:chExt cx="0" cy="0"/>
+        </a:xfrm>
+      </p:grpSpPr>
+      <p:sp>
+        <p:nvSpPr>
+          <p:cNvPr id="2" name="Title 1"/>
+          <p:cNvSpPr>
+            <a:spLocks noGrp="1"/>
+          </p:cNvSpPr>
+          <p:nvPr>
+            <p:ph type="title"/>
+          </p:nvPr>
+        </p:nvSpPr>
+        <p:spPr>
+          <a:xfrm>
+            <a:off x="457200" y="205979"/>
+            <a:ext cx="8229600" cy="857250"/>
+          </a:xfrm>
+        </p:spPr>
+        <p:txBody>
+          <a:bodyPr/>
+          <a:lstStyle/>
+          <a:p>
+            <a:pPr lvl="0" indent="0" marL="0">
+              <a:buNone/>
+            </a:pPr>
+            <a:r>
+              <a:rPr/>
+              <a:t>Four notions of “closest”</a:t>
+            </a:r>
+          </a:p>
+        </p:txBody>
+      </p:sp>
+      <p:sp>
+        <p:nvSpPr>
+          <p:cNvPr id="3" name="Content Placeholder 2"/>
+          <p:cNvSpPr>
+            <a:spLocks noGrp="1"/>
+          </p:cNvSpPr>
+          <p:nvPr>
+            <p:ph idx="1"/>
+          </p:nvPr>
+        </p:nvSpPr>
+        <p:spPr>
+          <a:xfrm>
+            <a:off x="457200" y="1200151"/>
+            <a:ext cx="8229600" cy="3394472"/>
+          </a:xfrm>
+        </p:spPr>
+        <p:txBody>
+          <a:bodyPr/>
+          <a:lstStyle/>
+          <a:p>
+            <a:pPr lvl="0"/>
+            <a:r>
+              <a:rPr b="1"/>
+              <a:t>Single</a:t>
+            </a:r>
+            <a:r>
+              <a:rPr/>
+              <a:t>: closest pair, which can chain a winding path, or bridge two groups at one touching point</a:t>
+            </a:r>
+          </a:p>
+          <a:p>
+            <a:pPr lvl="0"/>
+            <a:r>
+              <a:rPr b="1"/>
+              <a:t>Complete</a:t>
+            </a:r>
+            <a:r>
+              <a:rPr/>
+              <a:t>: farthest pair, which favours compact groups</a:t>
+            </a:r>
+          </a:p>
+          <a:p>
+            <a:pPr lvl="0"/>
+            <a:r>
+              <a:rPr b="1"/>
+              <a:t>Average</a:t>
+            </a:r>
+            <a:r>
+              <a:rPr/>
+              <a:t>: mean distance over every cross-pair, a compromise</a:t>
+            </a:r>
+          </a:p>
+          <a:p>
+            <a:pPr lvl="0"/>
+            <a:r>
+              <a:rPr b="1"/>
+              <a:t>Ward</a:t>
+            </a:r>
+            <a:r>
+              <a:rPr/>
+              <a:t>: least added variance, the </a:t>
+            </a:r>
+            <a:r>
+              <a:rPr i="1"/>
+              <a:t>same</a:t>
+            </a:r>
+            <a:r>
+              <a:rPr/>
+              <a:t> objective k-means minimises</a:t>
+            </a:r>
+          </a:p>
+        </p:txBody>
+      </p:sp>
+    </p:spTree>
+  </p:cSld>
+</p:sld>
+</file>
+
+<file path=ppt/slides/slide31.xml><?xml version="1.0" encoding="utf-8"?>
 <p:sld xmlns:a="http://schemas.openxmlformats.org/drawingml/2006/main" xmlns:r="http://schemas.openxmlformats.org/officeDocument/2006/relationships" xmlns:p="http://schemas.openxmlformats.org/presentationml/2006/main">
   <p:cSld>
     <p:spTree>
@@ -13165,7 +13441,7 @@
 </p:sld>
 </file>
 
-<file path=ppt/slides/slide31.xml><?xml version="1.0" encoding="utf-8"?>
+<file path=ppt/slides/slide32.xml><?xml version="1.0" encoding="utf-8"?>
 <p:sld xmlns:a="http://schemas.openxmlformats.org/drawingml/2006/main" xmlns:r="http://schemas.openxmlformats.org/officeDocument/2006/relationships" xmlns:p="http://schemas.openxmlformats.org/presentationml/2006/main">
   <p:cSld>
     <p:spTree>
@@ -13484,86 +13760,6 @@
 </p:sld>
 </file>
 
-<file path=ppt/slides/slide32.xml><?xml version="1.0" encoding="utf-8"?>
-<p:sld xmlns:a="http://schemas.openxmlformats.org/drawingml/2006/main" xmlns:r="http://schemas.openxmlformats.org/officeDocument/2006/relationships" xmlns:p="http://schemas.openxmlformats.org/presentationml/2006/main">
-  <p:cSld>
-    <p:spTree>
-      <p:nvGrpSpPr>
-        <p:cNvPr id="1" name=""/>
-        <p:cNvGrpSpPr/>
-        <p:nvPr/>
-      </p:nvGrpSpPr>
-      <p:grpSpPr>
-        <a:xfrm>
-          <a:off x="0" y="0"/>
-          <a:ext cx="0" cy="0"/>
-          <a:chOff x="0" y="0"/>
-          <a:chExt cx="0" cy="0"/>
-        </a:xfrm>
-      </p:grpSpPr>
-      <p:sp>
-        <p:nvSpPr>
-          <p:cNvPr id="2" name="Title 1"/>
-          <p:cNvSpPr>
-            <a:spLocks noGrp="1"/>
-          </p:cNvSpPr>
-          <p:nvPr>
-            <p:ph type="title"/>
-          </p:nvPr>
-        </p:nvSpPr>
-        <p:spPr>
-          <a:xfrm>
-            <a:off x="457200" y="205979"/>
-            <a:ext cx="8229600" cy="857250"/>
-          </a:xfrm>
-        </p:spPr>
-        <p:txBody>
-          <a:bodyPr/>
-          <a:lstStyle/>
-          <a:p>
-            <a:pPr lvl="0" indent="0" marL="0">
-              <a:buNone/>
-            </a:pPr>
-            <a:r>
-              <a:rPr/>
-              <a:t>Break</a:t>
-            </a:r>
-          </a:p>
-        </p:txBody>
-      </p:sp>
-      <p:sp>
-        <p:nvSpPr>
-          <p:cNvPr id="3" name="Content Placeholder 2"/>
-          <p:cNvSpPr>
-            <a:spLocks noGrp="1"/>
-          </p:cNvSpPr>
-          <p:nvPr>
-            <p:ph idx="1"/>
-          </p:nvPr>
-        </p:nvSpPr>
-        <p:spPr>
-          <a:xfrm>
-            <a:off x="457200" y="1200151"/>
-            <a:ext cx="8229600" cy="3394472"/>
-          </a:xfrm>
-        </p:spPr>
-        <p:txBody>
-          <a:bodyPr/>
-          <a:lstStyle/>
-          <a:p>
-            <a:pPr lvl="0"/>
-            <a:r>
-              <a:rPr/>
-              <a:t>Twelve minutes</a:t>
-            </a:r>
-          </a:p>
-        </p:txBody>
-      </p:sp>
-    </p:spTree>
-  </p:cSld>
-</p:sld>
-</file>
-
 <file path=ppt/slides/slide33.xml><?xml version="1.0" encoding="utf-8"?>
 <p:sld xmlns:a="http://schemas.openxmlformats.org/drawingml/2006/main" xmlns:r="http://schemas.openxmlformats.org/officeDocument/2006/relationships" xmlns:p="http://schemas.openxmlformats.org/presentationml/2006/main">
   <p:cSld>
@@ -13606,7 +13802,7 @@
             </a:pPr>
             <a:r>
               <a:rPr/>
-              <a:t>DBSCAN: density instead of shape</a:t>
+              <a:t>Break</a:t>
             </a:r>
           </a:p>
         </p:txBody>
@@ -13633,94 +13829,8 @@
           <a:p>
             <a:pPr lvl="0"/>
             <a:r>
-              <a:rPr b="1"/>
-              <a:t>DBSCAN</a:t>
-            </a:r>
-            <a:r>
-              <a:rPr/>
-              <a:t>: density-based spatial clustering of applications with noise</a:t>
-            </a:r>
-          </a:p>
-          <a:p>
-            <a:pPr lvl="0"/>
-            <a:r>
-              <a:rPr/>
-              <a:t>Classifies points by neighbourhood crowding: radius </a:t>
-            </a:r>
-            <a:r>
-              <a:rPr>
-                <a:latin typeface="Courier"/>
-              </a:rPr>
-              <a:t>eps</a:t>
-            </a:r>
-            <a:r>
-              <a:rPr/>
-              <a:t>, minimum count </a:t>
-            </a:r>
-            <a:r>
-              <a:rPr>
-                <a:latin typeface="Courier"/>
-              </a:rPr>
-              <a:t>min_samples</a:t>
-            </a:r>
-          </a:p>
-          <a:p>
-            <a:pPr lvl="0"/>
-            <a:r>
-              <a:rPr b="1"/>
-              <a:t>Core point</a:t>
-            </a:r>
-            <a:r>
-              <a:rPr/>
-              <a:t>: at least </a:t>
-            </a:r>
-            <a:r>
-              <a:rPr>
-                <a:latin typeface="Courier"/>
-              </a:rPr>
-              <a:t>min_samples</a:t>
-            </a:r>
-            <a:r>
-              <a:rPr/>
-              <a:t> others within </a:t>
-            </a:r>
-            <a:r>
-              <a:rPr>
-                <a:latin typeface="Courier"/>
-              </a:rPr>
-              <a:t>eps</a:t>
-            </a:r>
-          </a:p>
-          <a:p>
-            <a:pPr lvl="0"/>
-            <a:r>
-              <a:rPr b="1"/>
-              <a:t>Border point</a:t>
-            </a:r>
-            <a:r>
-              <a:rPr/>
-              <a:t>: within </a:t>
-            </a:r>
-            <a:r>
-              <a:rPr>
-                <a:latin typeface="Courier"/>
-              </a:rPr>
-              <a:t>eps</a:t>
-            </a:r>
-            <a:r>
-              <a:rPr/>
-              <a:t> of a core, but not core itself</a:t>
-            </a:r>
-          </a:p>
-          <a:p>
-            <a:pPr lvl="0"/>
-            <a:r>
-              <a:rPr/>
-              <a:t>Everything else: </a:t>
-            </a:r>
-            <a:r>
-              <a:rPr b="1"/>
-              <a:t>noise</a:t>
+              <a:rPr/>
+              <a:t>Twelve minutes</a:t>
             </a:r>
           </a:p>
         </p:txBody>
@@ -13772,7 +13882,7 @@
             </a:pPr>
             <a:r>
               <a:rPr/>
-              <a:t>What counts as a cluster</a:t>
+              <a:t>DBSCAN: density instead of shape</a:t>
             </a:r>
           </a:p>
         </p:txBody>
@@ -13799,16 +13909,19 @@
           <a:p>
             <a:pPr lvl="0"/>
             <a:r>
-              <a:rPr/>
-              <a:t>A </a:t>
-            </a:r>
-            <a:r>
               <a:rPr b="1"/>
-              <a:t>maximal set of core points</a:t>
-            </a:r>
-            <a:r>
-              <a:rPr/>
-              <a:t>, chained by mutual </a:t>
+              <a:t>DBSCAN</a:t>
+            </a:r>
+            <a:r>
+              <a:rPr/>
+              <a:t>: density-based spatial clustering of applications with noise</a:t>
+            </a:r>
+          </a:p>
+          <a:p>
+            <a:pPr lvl="0"/>
+            <a:r>
+              <a:rPr/>
+              <a:t>Classifies points by neighbourhood crowding: radius </a:t>
             </a:r>
             <a:r>
               <a:rPr>
@@ -13818,21 +13931,34 @@
             </a:r>
             <a:r>
               <a:rPr/>
-              <a:t>-closeness, plus every attached border point</a:t>
+              <a:t>, minimum count </a:t>
+            </a:r>
+            <a:r>
+              <a:rPr>
+                <a:latin typeface="Courier"/>
+              </a:rPr>
+              <a:t>min_samples</a:t>
             </a:r>
           </a:p>
           <a:p>
             <a:pPr lvl="0"/>
             <a:r>
-              <a:rPr/>
-              <a:t>No centre, no mean, no shape assumption in the definition</a:t>
-            </a:r>
-          </a:p>
-          <a:p>
-            <a:pPr lvl="0"/>
-            <a:r>
-              <a:rPr/>
-              <a:t>A compact core and a diffuse ring both count, if dense enough at the scale </a:t>
+              <a:rPr b="1"/>
+              <a:t>Core point</a:t>
+            </a:r>
+            <a:r>
+              <a:rPr/>
+              <a:t>: at least </a:t>
+            </a:r>
+            <a:r>
+              <a:rPr>
+                <a:latin typeface="Courier"/>
+              </a:rPr>
+              <a:t>min_samples</a:t>
+            </a:r>
+            <a:r>
+              <a:rPr/>
+              <a:t> others within </a:t>
             </a:r>
             <a:r>
               <a:rPr>
@@ -13840,24 +13966,37 @@
               </a:rPr>
               <a:t>eps</a:t>
             </a:r>
-            <a:r>
-              <a:rPr/>
-              <a:t> measures</a:t>
-            </a:r>
           </a:p>
           <a:p>
             <a:pPr lvl="0"/>
             <a:r>
-              <a:rPr/>
-              <a:t>Points can belong to </a:t>
-            </a:r>
-            <a:r>
               <a:rPr b="1"/>
-              <a:t>nothing</a:t>
-            </a:r>
-            <a:r>
-              <a:rPr/>
-              <a:t>: noise is first-class, not an error</a:t>
+              <a:t>Border point</a:t>
+            </a:r>
+            <a:r>
+              <a:rPr/>
+              <a:t>: within </a:t>
+            </a:r>
+            <a:r>
+              <a:rPr>
+                <a:latin typeface="Courier"/>
+              </a:rPr>
+              <a:t>eps</a:t>
+            </a:r>
+            <a:r>
+              <a:rPr/>
+              <a:t> of a core, but not core itself</a:t>
+            </a:r>
+          </a:p>
+          <a:p>
+            <a:pPr lvl="0"/>
+            <a:r>
+              <a:rPr/>
+              <a:t>Everything else: </a:t>
+            </a:r>
+            <a:r>
+              <a:rPr b="1"/>
+              <a:t>noise</a:t>
             </a:r>
           </a:p>
         </p:txBody>
@@ -13909,7 +14048,7 @@
             </a:pPr>
             <a:r>
               <a:rPr/>
-              <a:t>Choosing eps: the parameter that matters most</a:t>
+              <a:t>What counts as a cluster</a:t>
             </a:r>
           </a:p>
         </p:txBody>
@@ -13937,46 +14076,64 @@
             <a:pPr lvl="0"/>
             <a:r>
               <a:rPr/>
-              <a:t>Too small: even the dense bot core fractures into isolated noise points</a:t>
-            </a:r>
-          </a:p>
-          <a:p>
-            <a:pPr lvl="0"/>
-            <a:r>
-              <a:rPr/>
-              <a:t>Too large: the ring bridges back into the core, everything merges, as Ward linkage did</a:t>
-            </a:r>
-          </a:p>
-          <a:p>
-            <a:pPr lvl="0"/>
-            <a:r>
-              <a:rPr/>
               <a:t>A </a:t>
             </a:r>
             <a:r>
               <a:rPr b="1"/>
-              <a:t>k-distance plot</a:t>
-            </a:r>
-            <a:r>
-              <a:rPr/>
-              <a:t>: distance from every point to its </a:t>
+              <a:t>maximal set of core points</a:t>
+            </a:r>
+            <a:r>
+              <a:rPr/>
+              <a:t>, chained by mutual </a:t>
             </a:r>
             <a:r>
               <a:rPr>
                 <a:latin typeface="Courier"/>
               </a:rPr>
-              <a:t>min_samples</a:t>
-            </a:r>
-            <a:r>
-              <a:rPr/>
-              <a:t>-th nearest neighbour, sorted</a:t>
+              <a:t>eps</a:t>
+            </a:r>
+            <a:r>
+              <a:rPr/>
+              <a:t>-closeness, plus every attached border point</a:t>
             </a:r>
           </a:p>
           <a:p>
             <a:pPr lvl="0"/>
             <a:r>
               <a:rPr/>
-              <a:t>Dense regions give a small distance, sparse ones a large one: the plot typically bends sharply between the two</a:t>
+              <a:t>No centre, no mean, no shape assumption in the definition</a:t>
+            </a:r>
+          </a:p>
+          <a:p>
+            <a:pPr lvl="0"/>
+            <a:r>
+              <a:rPr/>
+              <a:t>A compact core and a diffuse ring both count, if dense enough at the scale </a:t>
+            </a:r>
+            <a:r>
+              <a:rPr>
+                <a:latin typeface="Courier"/>
+              </a:rPr>
+              <a:t>eps</a:t>
+            </a:r>
+            <a:r>
+              <a:rPr/>
+              <a:t> measures</a:t>
+            </a:r>
+          </a:p>
+          <a:p>
+            <a:pPr lvl="0"/>
+            <a:r>
+              <a:rPr/>
+              <a:t>Points can belong to </a:t>
+            </a:r>
+            <a:r>
+              <a:rPr b="1"/>
+              <a:t>nothing</a:t>
+            </a:r>
+            <a:r>
+              <a:rPr/>
+              <a:t>: noise is first-class, not an error</a:t>
             </a:r>
           </a:p>
         </p:txBody>
@@ -13987,6 +14144,125 @@
 </file>
 
 <file path=ppt/slides/slide36.xml><?xml version="1.0" encoding="utf-8"?>
+<p:sld xmlns:a="http://schemas.openxmlformats.org/drawingml/2006/main" xmlns:r="http://schemas.openxmlformats.org/officeDocument/2006/relationships" xmlns:p="http://schemas.openxmlformats.org/presentationml/2006/main">
+  <p:cSld>
+    <p:spTree>
+      <p:nvGrpSpPr>
+        <p:cNvPr id="1" name=""/>
+        <p:cNvGrpSpPr/>
+        <p:nvPr/>
+      </p:nvGrpSpPr>
+      <p:grpSpPr>
+        <a:xfrm>
+          <a:off x="0" y="0"/>
+          <a:ext cx="0" cy="0"/>
+          <a:chOff x="0" y="0"/>
+          <a:chExt cx="0" cy="0"/>
+        </a:xfrm>
+      </p:grpSpPr>
+      <p:sp>
+        <p:nvSpPr>
+          <p:cNvPr id="2" name="Title 1"/>
+          <p:cNvSpPr>
+            <a:spLocks noGrp="1"/>
+          </p:cNvSpPr>
+          <p:nvPr>
+            <p:ph type="title"/>
+          </p:nvPr>
+        </p:nvSpPr>
+        <p:spPr>
+          <a:xfrm>
+            <a:off x="457200" y="205979"/>
+            <a:ext cx="8229600" cy="857250"/>
+          </a:xfrm>
+        </p:spPr>
+        <p:txBody>
+          <a:bodyPr/>
+          <a:lstStyle/>
+          <a:p>
+            <a:pPr lvl="0" indent="0" marL="0">
+              <a:buNone/>
+            </a:pPr>
+            <a:r>
+              <a:rPr/>
+              <a:t>Choosing eps: the parameter that matters most</a:t>
+            </a:r>
+          </a:p>
+        </p:txBody>
+      </p:sp>
+      <p:sp>
+        <p:nvSpPr>
+          <p:cNvPr id="3" name="Content Placeholder 2"/>
+          <p:cNvSpPr>
+            <a:spLocks noGrp="1"/>
+          </p:cNvSpPr>
+          <p:nvPr>
+            <p:ph idx="1"/>
+          </p:nvPr>
+        </p:nvSpPr>
+        <p:spPr>
+          <a:xfrm>
+            <a:off x="457200" y="1200151"/>
+            <a:ext cx="8229600" cy="3394472"/>
+          </a:xfrm>
+        </p:spPr>
+        <p:txBody>
+          <a:bodyPr/>
+          <a:lstStyle/>
+          <a:p>
+            <a:pPr lvl="0"/>
+            <a:r>
+              <a:rPr/>
+              <a:t>Too small: even the dense bot core fractures into isolated noise points</a:t>
+            </a:r>
+          </a:p>
+          <a:p>
+            <a:pPr lvl="0"/>
+            <a:r>
+              <a:rPr/>
+              <a:t>Too large: the ring bridges back into the core, everything merges, as Ward linkage did</a:t>
+            </a:r>
+          </a:p>
+          <a:p>
+            <a:pPr lvl="0"/>
+            <a:r>
+              <a:rPr/>
+              <a:t>A </a:t>
+            </a:r>
+            <a:r>
+              <a:rPr b="1"/>
+              <a:t>k-distance plot</a:t>
+            </a:r>
+            <a:r>
+              <a:rPr/>
+              <a:t>: distance from every point to its </a:t>
+            </a:r>
+            <a:r>
+              <a:rPr>
+                <a:latin typeface="Courier"/>
+              </a:rPr>
+              <a:t>min_samples</a:t>
+            </a:r>
+            <a:r>
+              <a:rPr/>
+              <a:t>-th nearest neighbour, sorted</a:t>
+            </a:r>
+          </a:p>
+          <a:p>
+            <a:pPr lvl="0"/>
+            <a:r>
+              <a:rPr/>
+              <a:t>Dense regions give a small distance, sparse ones a large one: the plot typically bends sharply between the two</a:t>
+            </a:r>
+          </a:p>
+        </p:txBody>
+      </p:sp>
+    </p:spTree>
+  </p:cSld>
+</p:sld>
+</file>
+
+<file path=ppt/slides/slide37.xml><?xml version="1.0" encoding="utf-8"?>
 <p:sld xmlns:a="http://schemas.openxmlformats.org/drawingml/2006/main" xmlns:r="http://schemas.openxmlformats.org/officeDocument/2006/relationships" xmlns:p="http://schemas.openxmlformats.org/presentationml/2006/main">
   <p:cSld>
     <p:spTree>
@@ -14068,7 +14344,7 @@
 </p:sld>
 </file>
 
-<file path=ppt/slides/slide37.xml><?xml version="1.0" encoding="utf-8"?>
+<file path=ppt/slides/slide38.xml><?xml version="1.0" encoding="utf-8"?>
 <p:sld xmlns:a="http://schemas.openxmlformats.org/drawingml/2006/main" xmlns:r="http://schemas.openxmlformats.org/officeDocument/2006/relationships" xmlns:p="http://schemas.openxmlformats.org/presentationml/2006/main">
   <p:cSld>
     <p:spTree>
@@ -14272,7 +14548,7 @@
 </p:sld>
 </file>
 
-<file path=ppt/slides/slide38.xml><?xml version="1.0" encoding="utf-8"?>
+<file path=ppt/slides/slide39.xml><?xml version="1.0" encoding="utf-8"?>
 <p:sld xmlns:a="http://schemas.openxmlformats.org/drawingml/2006/main" xmlns:r="http://schemas.openxmlformats.org/officeDocument/2006/relationships" xmlns:p="http://schemas.openxmlformats.org/presentationml/2006/main">
   <p:cSld>
     <p:spTree>
@@ -14354,7 +14630,127 @@
 </p:sld>
 </file>
 
-<file path=ppt/slides/slide39.xml><?xml version="1.0" encoding="utf-8"?>
+<file path=ppt/slides/slide4.xml><?xml version="1.0" encoding="utf-8"?>
+<p:sld xmlns:a="http://schemas.openxmlformats.org/drawingml/2006/main" xmlns:r="http://schemas.openxmlformats.org/officeDocument/2006/relationships" xmlns:p="http://schemas.openxmlformats.org/presentationml/2006/main">
+  <p:cSld>
+    <p:spTree>
+      <p:nvGrpSpPr>
+        <p:cNvPr id="1" name=""/>
+        <p:cNvGrpSpPr/>
+        <p:nvPr/>
+      </p:nvGrpSpPr>
+      <p:grpSpPr>
+        <a:xfrm>
+          <a:off x="0" y="0"/>
+          <a:ext cx="0" cy="0"/>
+          <a:chOff x="0" y="0"/>
+          <a:chExt cx="0" cy="0"/>
+        </a:xfrm>
+      </p:grpSpPr>
+      <p:sp>
+        <p:nvSpPr>
+          <p:cNvPr id="2" name="Title 1"/>
+          <p:cNvSpPr>
+            <a:spLocks noGrp="1"/>
+          </p:cNvSpPr>
+          <p:nvPr>
+            <p:ph type="title"/>
+          </p:nvPr>
+        </p:nvSpPr>
+        <p:spPr>
+          <a:xfrm>
+            <a:off x="457200" y="205979"/>
+            <a:ext cx="8229600" cy="857250"/>
+          </a:xfrm>
+        </p:spPr>
+        <p:txBody>
+          <a:bodyPr/>
+          <a:lstStyle/>
+          <a:p>
+            <a:pPr lvl="0" indent="0" marL="0">
+              <a:buNone/>
+            </a:pPr>
+            <a:r>
+              <a:rPr/>
+              <a:t>No y at all</a:t>
+            </a:r>
+          </a:p>
+        </p:txBody>
+      </p:sp>
+      <p:sp>
+        <p:nvSpPr>
+          <p:cNvPr id="3" name="Content Placeholder 2"/>
+          <p:cNvSpPr>
+            <a:spLocks noGrp="1"/>
+          </p:cNvSpPr>
+          <p:nvPr>
+            <p:ph idx="1"/>
+          </p:nvPr>
+        </p:nvSpPr>
+        <p:spPr>
+          <a:xfrm>
+            <a:off x="457200" y="1200151"/>
+            <a:ext cx="8229600" cy="3394472"/>
+          </a:xfrm>
+        </p:spPr>
+        <p:txBody>
+          <a:bodyPr/>
+          <a:lstStyle/>
+          <a:p>
+            <a:pPr lvl="0"/>
+            <a:r>
+              <a:rPr/>
+              <a:t>Every method so far learned from pairs: input x, target y</a:t>
+            </a:r>
+          </a:p>
+          <a:p>
+            <a:pPr lvl="0"/>
+            <a:r>
+              <a:rPr b="1"/>
+              <a:t>Unsupervised learning</a:t>
+            </a:r>
+            <a:r>
+              <a:rPr/>
+              <a:t> removes y: measurements, no answer key</a:t>
+            </a:r>
+          </a:p>
+          <a:p>
+            <a:pPr lvl="0"/>
+            <a:r>
+              <a:rPr/>
+              <a:t>The question: not “predict the label” but “describe the structure”</a:t>
+            </a:r>
+          </a:p>
+          <a:p>
+            <a:pPr lvl="0"/>
+            <a:r>
+              <a:rPr/>
+              <a:t>Most organisational data was never labelled: expensive, slow, often not well-defined</a:t>
+            </a:r>
+          </a:p>
+          <a:p>
+            <a:pPr lvl="0"/>
+            <a:r>
+              <a:rPr/>
+              <a:t>Often the </a:t>
+            </a:r>
+            <a:r>
+              <a:rPr i="1"/>
+              <a:t>first</a:t>
+            </a:r>
+            <a:r>
+              <a:rPr/>
+              <a:t> pass on a dataset</a:t>
+            </a:r>
+          </a:p>
+        </p:txBody>
+      </p:sp>
+    </p:spTree>
+  </p:cSld>
+</p:sld>
+</file>
+
+<file path=ppt/slides/slide40.xml><?xml version="1.0" encoding="utf-8"?>
 <p:sld xmlns:a="http://schemas.openxmlformats.org/drawingml/2006/main" xmlns:r="http://schemas.openxmlformats.org/officeDocument/2006/relationships" xmlns:p="http://schemas.openxmlformats.org/presentationml/2006/main">
   <p:cSld>
     <p:spTree>
@@ -14788,127 +15184,7 @@
 </p:sld>
 </file>
 
-<file path=ppt/slides/slide4.xml><?xml version="1.0" encoding="utf-8"?>
-<p:sld xmlns:a="http://schemas.openxmlformats.org/drawingml/2006/main" xmlns:r="http://schemas.openxmlformats.org/officeDocument/2006/relationships" xmlns:p="http://schemas.openxmlformats.org/presentationml/2006/main">
-  <p:cSld>
-    <p:spTree>
-      <p:nvGrpSpPr>
-        <p:cNvPr id="1" name=""/>
-        <p:cNvGrpSpPr/>
-        <p:nvPr/>
-      </p:nvGrpSpPr>
-      <p:grpSpPr>
-        <a:xfrm>
-          <a:off x="0" y="0"/>
-          <a:ext cx="0" cy="0"/>
-          <a:chOff x="0" y="0"/>
-          <a:chExt cx="0" cy="0"/>
-        </a:xfrm>
-      </p:grpSpPr>
-      <p:sp>
-        <p:nvSpPr>
-          <p:cNvPr id="2" name="Title 1"/>
-          <p:cNvSpPr>
-            <a:spLocks noGrp="1"/>
-          </p:cNvSpPr>
-          <p:nvPr>
-            <p:ph type="title"/>
-          </p:nvPr>
-        </p:nvSpPr>
-        <p:spPr>
-          <a:xfrm>
-            <a:off x="457200" y="205979"/>
-            <a:ext cx="8229600" cy="857250"/>
-          </a:xfrm>
-        </p:spPr>
-        <p:txBody>
-          <a:bodyPr/>
-          <a:lstStyle/>
-          <a:p>
-            <a:pPr lvl="0" indent="0" marL="0">
-              <a:buNone/>
-            </a:pPr>
-            <a:r>
-              <a:rPr/>
-              <a:t>No y at all</a:t>
-            </a:r>
-          </a:p>
-        </p:txBody>
-      </p:sp>
-      <p:sp>
-        <p:nvSpPr>
-          <p:cNvPr id="3" name="Content Placeholder 2"/>
-          <p:cNvSpPr>
-            <a:spLocks noGrp="1"/>
-          </p:cNvSpPr>
-          <p:nvPr>
-            <p:ph idx="1"/>
-          </p:nvPr>
-        </p:nvSpPr>
-        <p:spPr>
-          <a:xfrm>
-            <a:off x="457200" y="1200151"/>
-            <a:ext cx="8229600" cy="3394472"/>
-          </a:xfrm>
-        </p:spPr>
-        <p:txBody>
-          <a:bodyPr/>
-          <a:lstStyle/>
-          <a:p>
-            <a:pPr lvl="0"/>
-            <a:r>
-              <a:rPr/>
-              <a:t>Every method so far learned from pairs: input x, target y</a:t>
-            </a:r>
-          </a:p>
-          <a:p>
-            <a:pPr lvl="0"/>
-            <a:r>
-              <a:rPr b="1"/>
-              <a:t>Unsupervised learning</a:t>
-            </a:r>
-            <a:r>
-              <a:rPr/>
-              <a:t> removes y: measurements, no answer key</a:t>
-            </a:r>
-          </a:p>
-          <a:p>
-            <a:pPr lvl="0"/>
-            <a:r>
-              <a:rPr/>
-              <a:t>The question: not “predict the label” but “describe the structure”</a:t>
-            </a:r>
-          </a:p>
-          <a:p>
-            <a:pPr lvl="0"/>
-            <a:r>
-              <a:rPr/>
-              <a:t>Most organisational data was never labelled: expensive, slow, often not well-defined</a:t>
-            </a:r>
-          </a:p>
-          <a:p>
-            <a:pPr lvl="0"/>
-            <a:r>
-              <a:rPr/>
-              <a:t>Often the </a:t>
-            </a:r>
-            <a:r>
-              <a:rPr i="1"/>
-              <a:t>first</a:t>
-            </a:r>
-            <a:r>
-              <a:rPr/>
-              <a:t> pass on a dataset</a:t>
-            </a:r>
-          </a:p>
-        </p:txBody>
-      </p:sp>
-    </p:spTree>
-  </p:cSld>
-</p:sld>
-</file>
-
-<file path=ppt/slides/slide40.xml><?xml version="1.0" encoding="utf-8"?>
+<file path=ppt/slides/slide41.xml><?xml version="1.0" encoding="utf-8"?>
 <p:sld xmlns:a="http://schemas.openxmlformats.org/drawingml/2006/main" xmlns:r="http://schemas.openxmlformats.org/officeDocument/2006/relationships" xmlns:p="http://schemas.openxmlformats.org/presentationml/2006/main">
   <p:cSld>
     <p:spTree>
@@ -15150,110 +15426,6 @@
 </p:sld>
 </file>
 
-<file path=ppt/slides/slide41.xml><?xml version="1.0" encoding="utf-8"?>
-<p:sld xmlns:a="http://schemas.openxmlformats.org/drawingml/2006/main" xmlns:r="http://schemas.openxmlformats.org/officeDocument/2006/relationships" xmlns:p="http://schemas.openxmlformats.org/presentationml/2006/main">
-  <p:cSld>
-    <p:spTree>
-      <p:nvGrpSpPr>
-        <p:cNvPr id="1" name=""/>
-        <p:cNvGrpSpPr/>
-        <p:nvPr/>
-      </p:nvGrpSpPr>
-      <p:grpSpPr>
-        <a:xfrm>
-          <a:off x="0" y="0"/>
-          <a:ext cx="0" cy="0"/>
-          <a:chOff x="0" y="0"/>
-          <a:chExt cx="0" cy="0"/>
-        </a:xfrm>
-      </p:grpSpPr>
-      <p:sp>
-        <p:nvSpPr>
-          <p:cNvPr id="2" name="Title 1"/>
-          <p:cNvSpPr>
-            <a:spLocks noGrp="1"/>
-          </p:cNvSpPr>
-          <p:nvPr>
-            <p:ph type="title"/>
-          </p:nvPr>
-        </p:nvSpPr>
-        <p:spPr>
-          <a:xfrm>
-            <a:off x="457200" y="205979"/>
-            <a:ext cx="8229600" cy="857250"/>
-          </a:xfrm>
-        </p:spPr>
-        <p:txBody>
-          <a:bodyPr/>
-          <a:lstStyle/>
-          <a:p>
-            <a:pPr lvl="0" indent="0" marL="0">
-              <a:buNone/>
-            </a:pPr>
-            <a:r>
-              <a:rPr/>
-              <a:t>Notebook 2, live</a:t>
-            </a:r>
-          </a:p>
-        </p:txBody>
-      </p:sp>
-      <p:sp>
-        <p:nvSpPr>
-          <p:cNvPr id="3" name="Content Placeholder 2"/>
-          <p:cNvSpPr>
-            <a:spLocks noGrp="1"/>
-          </p:cNvSpPr>
-          <p:nvPr>
-            <p:ph idx="1"/>
-          </p:nvPr>
-        </p:nvSpPr>
-        <p:spPr>
-          <a:xfrm>
-            <a:off x="457200" y="1200151"/>
-            <a:ext cx="8229600" cy="3394472"/>
-          </a:xfrm>
-        </p:spPr>
-        <p:txBody>
-          <a:bodyPr/>
-          <a:lstStyle/>
-          <a:p>
-            <a:pPr lvl="0"/>
-            <a:r>
-              <a:rPr/>
-              <a:t>Agglomerative clustering, all four linkage rules, and the dendrogram</a:t>
-            </a:r>
-          </a:p>
-          <a:p>
-            <a:pPr lvl="0"/>
-            <a:r>
-              <a:rPr/>
-              <a:t>DBSCAN, the k-distance plot, and the </a:t>
-            </a:r>
-            <a:r>
-              <a:rPr>
-                <a:latin typeface="Courier"/>
-              </a:rPr>
-              <a:t>eps</a:t>
-            </a:r>
-            <a:r>
-              <a:rPr/>
-              <a:t> sweep</a:t>
-            </a:r>
-          </a:p>
-          <a:p>
-            <a:pPr lvl="0"/>
-            <a:r>
-              <a:rPr/>
-              <a:t>Every result checked against the true bot/human labels</a:t>
-            </a:r>
-          </a:p>
-        </p:txBody>
-      </p:sp>
-    </p:spTree>
-  </p:cSld>
-</p:sld>
-</file>
-
 <file path=ppt/slides/slide42.xml><?xml version="1.0" encoding="utf-8"?>
 <p:sld xmlns:a="http://schemas.openxmlformats.org/drawingml/2006/main" xmlns:r="http://schemas.openxmlformats.org/officeDocument/2006/relationships" xmlns:p="http://schemas.openxmlformats.org/presentationml/2006/main">
   <p:cSld>
@@ -15296,7 +15468,7 @@
             </a:pPr>
             <a:r>
               <a:rPr/>
-              <a:t>No answer key this time</a:t>
+              <a:t>Notebook 2, live</a:t>
             </a:r>
           </a:p>
         </p:txBody>
@@ -15324,21 +15496,31 @@
             <a:pPr lvl="0"/>
             <a:r>
               <a:rPr/>
-              <a:t>Every check so far, ARI in sections 2 and 3, used a ground truth this lesson happens to have because the data is synthetic</a:t>
+              <a:t>Agglomerative clustering, all four linkage rules, and the dendrogram</a:t>
             </a:r>
           </a:p>
           <a:p>
             <a:pPr lvl="0"/>
             <a:r>
               <a:rPr/>
-              <a:t>Aurora’s actual analysts, on real customer or session data, will never have that</a:t>
+              <a:t>DBSCAN, the k-distance plot, and the </a:t>
+            </a:r>
+            <a:r>
+              <a:rPr>
+                <a:latin typeface="Courier"/>
+              </a:rPr>
+              <a:t>eps</a:t>
+            </a:r>
+            <a:r>
+              <a:rPr/>
+              <a:t> sweep</a:t>
             </a:r>
           </a:p>
           <a:p>
             <a:pPr lvl="0"/>
             <a:r>
               <a:rPr/>
-              <a:t>Two families of metric fill the gap, and it matters which one is available in a given situation</a:t>
+              <a:t>Every result checked against the true bot/human labels</a:t>
             </a:r>
           </a:p>
         </p:txBody>
@@ -15390,7 +15572,7 @@
             </a:pPr>
             <a:r>
               <a:rPr/>
-              <a:t>Internal metrics: only the clustering and the data</a:t>
+              <a:t>No answer key this time</a:t>
             </a:r>
           </a:p>
         </p:txBody>
@@ -15418,52 +15600,21 @@
             <a:pPr lvl="0"/>
             <a:r>
               <a:rPr/>
-              <a:t>Use </a:t>
-            </a:r>
-            <a:r>
-              <a:rPr b="1"/>
-              <a:t>no</a:t>
-            </a:r>
-            <a:r>
-              <a:rPr/>
-              <a:t> outside answer key: computed from the clustering and the points alone</a:t>
+              <a:t>Every check so far, ARI in sections 2 and 3, used a ground truth this lesson happens to have because the data is synthetic</a:t>
             </a:r>
           </a:p>
           <a:p>
             <a:pPr lvl="0"/>
             <a:r>
-              <a:rPr b="1"/>
-              <a:t>Silhouette</a:t>
-            </a:r>
-            <a:r>
-              <a:rPr/>
-              <a:t>: are points closer to their own cluster than to any other? Answerable from the clustering alone</a:t>
+              <a:rPr/>
+              <a:t>Aurora’s actual analysts, on real customer or session data, will never have that</a:t>
             </a:r>
           </a:p>
           <a:p>
             <a:pPr lvl="0"/>
             <a:r>
-              <a:rPr b="1"/>
-              <a:t>WCSS</a:t>
-            </a:r>
-            <a:r>
-              <a:rPr/>
-              <a:t>: usable, but weaker, only comparable across different k on the </a:t>
-            </a:r>
-            <a:r>
-              <a:rPr i="1"/>
-              <a:t>same</a:t>
-            </a:r>
-            <a:r>
-              <a:rPr/>
-              <a:t> algorithm, not across different methods</a:t>
-            </a:r>
-          </a:p>
-          <a:p>
-            <a:pPr lvl="0"/>
-            <a:r>
-              <a:rPr/>
-              <a:t>Always available, even when nothing else is</a:t>
+              <a:rPr/>
+              <a:t>Two families of metric fill the gap, and it matters which one is available in a given situation</a:t>
             </a:r>
           </a:p>
         </p:txBody>
@@ -15515,7 +15666,7 @@
             </a:pPr>
             <a:r>
               <a:rPr/>
-              <a:t>External metrics: an outside answer key</a:t>
+              <a:t>Internal metrics: only the clustering and the data</a:t>
             </a:r>
           </a:p>
         </p:txBody>
@@ -15543,56 +15694,52 @@
             <a:pPr lvl="0"/>
             <a:r>
               <a:rPr/>
-              <a:t>Compare a clustering against a </a:t>
+              <a:t>Use </a:t>
             </a:r>
             <a:r>
               <a:rPr b="1"/>
-              <a:t>separate</a:t>
-            </a:r>
-            <a:r>
-              <a:rPr/>
-              <a:t> labelling assumed correct, ARI and its relatives</a:t>
+              <a:t>no</a:t>
+            </a:r>
+            <a:r>
+              <a:rPr/>
+              <a:t> outside answer key: computed from the clustering and the points alone</a:t>
             </a:r>
           </a:p>
           <a:p>
             <a:pPr lvl="0"/>
             <a:r>
-              <a:rPr/>
-              <a:t>Here: the data generator’s </a:t>
-            </a:r>
-            <a:r>
-              <a:rPr>
-                <a:latin typeface="Courier"/>
-              </a:rPr>
-              <a:t>true_segment</a:t>
-            </a:r>
-            <a:r>
-              <a:rPr/>
-              <a:t> / </a:t>
-            </a:r>
-            <a:r>
-              <a:rPr>
-                <a:latin typeface="Courier"/>
-              </a:rPr>
-              <a:t>true_group</a:t>
+              <a:rPr b="1"/>
+              <a:t>Silhouette</a:t>
+            </a:r>
+            <a:r>
+              <a:rPr/>
+              <a:t>: are points closer to their own cluster than to any other? Answerable from the clustering alone</a:t>
             </a:r>
           </a:p>
           <a:p>
             <a:pPr lvl="0"/>
             <a:r>
-              <a:rPr/>
-              <a:t>In practice: a hand-labelled sample, a business rule, or a downstream outcome: did the “bot” cluster get blocked and never return?</a:t>
+              <a:rPr b="1"/>
+              <a:t>WCSS</a:t>
+            </a:r>
+            <a:r>
+              <a:rPr/>
+              <a:t>: usable, but weaker, only comparable across different k on the </a:t>
+            </a:r>
+            <a:r>
+              <a:rPr i="1"/>
+              <a:t>same</a:t>
+            </a:r>
+            <a:r>
+              <a:rPr/>
+              <a:t> algorithm, not across different methods</a:t>
             </a:r>
           </a:p>
           <a:p>
             <a:pPr lvl="0"/>
             <a:r>
               <a:rPr/>
-              <a:t>When such a signal exists, even partial or noisy, </a:t>
-            </a:r>
-            <a:r>
-              <a:rPr b="1"/>
-              <a:t>use it</a:t>
+              <a:t>Always available, even when nothing else is</a:t>
             </a:r>
           </a:p>
         </p:txBody>
@@ -15644,7 +15791,7 @@
             </a:pPr>
             <a:r>
               <a:rPr/>
-              <a:t>What silhouette can’t see</a:t>
+              <a:t>External metrics: an outside answer key</a:t>
             </a:r>
           </a:p>
         </p:txBody>
@@ -15672,44 +15819,56 @@
             <a:pPr lvl="0"/>
             <a:r>
               <a:rPr/>
-              <a:t>A silhouette of 0.69, reported alone, sounds like strong endorsement</a:t>
+              <a:t>Compare a clustering against a </a:t>
+            </a:r>
+            <a:r>
+              <a:rPr b="1"/>
+              <a:t>separate</a:t>
+            </a:r>
+            <a:r>
+              <a:rPr/>
+              <a:t> labelling assumed correct, ARI and its relatives</a:t>
             </a:r>
           </a:p>
           <a:p>
             <a:pPr lvl="0"/>
             <a:r>
               <a:rPr/>
-              <a:t>It endorses only </a:t>
+              <a:t>Here: the data generator’s </a:t>
+            </a:r>
+            <a:r>
+              <a:rPr>
+                <a:latin typeface="Courier"/>
+              </a:rPr>
+              <a:t>true_segment</a:t>
+            </a:r>
+            <a:r>
+              <a:rPr/>
+              <a:t> / </a:t>
+            </a:r>
+            <a:r>
+              <a:rPr>
+                <a:latin typeface="Courier"/>
+              </a:rPr>
+              <a:t>true_group</a:t>
+            </a:r>
+          </a:p>
+          <a:p>
+            <a:pPr lvl="0"/>
+            <a:r>
+              <a:rPr/>
+              <a:t>In practice: a hand-labelled sample, a business rule, or a downstream outcome: did the “bot” cluster get blocked and never return?</a:t>
+            </a:r>
+          </a:p>
+          <a:p>
+            <a:pPr lvl="0"/>
+            <a:r>
+              <a:rPr/>
+              <a:t>When such a signal exists, even partial or noisy, </a:t>
             </a:r>
             <a:r>
               <a:rPr b="1"/>
-              <a:t>what the metric can see</a:t>
-            </a:r>
-            <a:r>
-              <a:rPr/>
-              <a:t>: the shape, not the assumption behind it</a:t>
-            </a:r>
-          </a:p>
-          <a:p>
-            <a:pPr lvl="0"/>
-            <a:r>
-              <a:rPr/>
-              <a:t>k-means on the bot/human data (ARI ≈ -0.046) still scores positive</a:t>
-            </a:r>
-          </a:p>
-          <a:p>
-            <a:pPr lvl="0"/>
-            <a:r>
-              <a:rPr/>
-              <a:t>Silhouette measures </a:t>
-            </a:r>
-            <a:r>
-              <a:rPr b="1"/>
-              <a:t>roundness</a:t>
-            </a:r>
-            <a:r>
-              <a:rPr/>
-              <a:t>, not correctness, and k-means always looks round by construction</a:t>
+              <a:t>use it</a:t>
             </a:r>
           </a:p>
         </p:txBody>
@@ -15720,6 +15879,139 @@
 </file>
 
 <file path=ppt/slides/slide46.xml><?xml version="1.0" encoding="utf-8"?>
+<p:sld xmlns:a="http://schemas.openxmlformats.org/drawingml/2006/main" xmlns:r="http://schemas.openxmlformats.org/officeDocument/2006/relationships" xmlns:p="http://schemas.openxmlformats.org/presentationml/2006/main">
+  <p:cSld>
+    <p:spTree>
+      <p:nvGrpSpPr>
+        <p:cNvPr id="1" name=""/>
+        <p:cNvGrpSpPr/>
+        <p:nvPr/>
+      </p:nvGrpSpPr>
+      <p:grpSpPr>
+        <a:xfrm>
+          <a:off x="0" y="0"/>
+          <a:ext cx="0" cy="0"/>
+          <a:chOff x="0" y="0"/>
+          <a:chExt cx="0" cy="0"/>
+        </a:xfrm>
+      </p:grpSpPr>
+      <p:sp>
+        <p:nvSpPr>
+          <p:cNvPr id="2" name="Title 1"/>
+          <p:cNvSpPr>
+            <a:spLocks noGrp="1"/>
+          </p:cNvSpPr>
+          <p:nvPr>
+            <p:ph type="title"/>
+          </p:nvPr>
+        </p:nvSpPr>
+        <p:spPr>
+          <a:xfrm>
+            <a:off x="457200" y="205979"/>
+            <a:ext cx="8229600" cy="857250"/>
+          </a:xfrm>
+        </p:spPr>
+        <p:txBody>
+          <a:bodyPr/>
+          <a:lstStyle/>
+          <a:p>
+            <a:pPr lvl="0" indent="0" marL="0">
+              <a:buNone/>
+            </a:pPr>
+            <a:r>
+              <a:rPr/>
+              <a:t>What silhouette can’t see</a:t>
+            </a:r>
+          </a:p>
+        </p:txBody>
+      </p:sp>
+      <p:sp>
+        <p:nvSpPr>
+          <p:cNvPr id="3" name="Content Placeholder 2"/>
+          <p:cNvSpPr>
+            <a:spLocks noGrp="1"/>
+          </p:cNvSpPr>
+          <p:nvPr>
+            <p:ph idx="1"/>
+          </p:nvPr>
+        </p:nvSpPr>
+        <p:spPr>
+          <a:xfrm>
+            <a:off x="457200" y="1200151"/>
+            <a:ext cx="8229600" cy="3394472"/>
+          </a:xfrm>
+        </p:spPr>
+        <p:txBody>
+          <a:bodyPr/>
+          <a:lstStyle/>
+          <a:p>
+            <a:pPr lvl="0"/>
+            <a:r>
+              <a:rPr/>
+              <a:t>It endorses only </a:t>
+            </a:r>
+            <a:r>
+              <a:rPr b="1"/>
+              <a:t>what the metric can see</a:t>
+            </a:r>
+            <a:r>
+              <a:rPr/>
+              <a:t>: the shape</a:t>
+            </a:r>
+          </a:p>
+          <a:p>
+            <a:pPr lvl="0"/>
+            <a:r>
+              <a:rPr/>
+              <a:t>k-means on the sessions: silhouette </a:t>
+            </a:r>
+            <a:r>
+              <a:rPr b="1"/>
+              <a:t>0.401</a:t>
+            </a:r>
+            <a:r>
+              <a:rPr/>
+              <a:t>, ARI −0.046</a:t>
+            </a:r>
+          </a:p>
+          <a:p>
+            <a:pPr lvl="0"/>
+            <a:r>
+              <a:rPr/>
+              <a:t>DBSCAN, correct: silhouette </a:t>
+            </a:r>
+            <a:r>
+              <a:rPr b="1"/>
+              <a:t>−0.106</a:t>
+            </a:r>
+            <a:r>
+              <a:rPr/>
+              <a:t>, ARI 0.941</a:t>
+            </a:r>
+          </a:p>
+          <a:p>
+            <a:pPr lvl="0"/>
+            <a:r>
+              <a:rPr/>
+              <a:t>Silhouette measures </a:t>
+            </a:r>
+            <a:r>
+              <a:rPr b="1"/>
+              <a:t>roundness</a:t>
+            </a:r>
+            <a:r>
+              <a:rPr/>
+              <a:t>, not correctness</a:t>
+            </a:r>
+          </a:p>
+        </p:txBody>
+      </p:sp>
+    </p:spTree>
+  </p:cSld>
+</p:sld>
+</file>
+
+<file path=ppt/slides/slide47.xml><?xml version="1.0" encoding="utf-8"?>
 <p:sld xmlns:a="http://schemas.openxmlformats.org/drawingml/2006/main" xmlns:r="http://schemas.openxmlformats.org/officeDocument/2006/relationships" xmlns:p="http://schemas.openxmlformats.org/presentationml/2006/main">
   <p:cSld>
     <p:spTree>
@@ -15801,123 +16093,6 @@
 </p:sld>
 </file>
 
-<file path=ppt/slides/slide47.xml><?xml version="1.0" encoding="utf-8"?>
-<p:sld xmlns:a="http://schemas.openxmlformats.org/drawingml/2006/main" xmlns:r="http://schemas.openxmlformats.org/officeDocument/2006/relationships" xmlns:p="http://schemas.openxmlformats.org/presentationml/2006/main">
-  <p:cSld>
-    <p:spTree>
-      <p:nvGrpSpPr>
-        <p:cNvPr id="1" name=""/>
-        <p:cNvGrpSpPr/>
-        <p:nvPr/>
-      </p:nvGrpSpPr>
-      <p:grpSpPr>
-        <a:xfrm>
-          <a:off x="0" y="0"/>
-          <a:ext cx="0" cy="0"/>
-          <a:chOff x="0" y="0"/>
-          <a:chExt cx="0" cy="0"/>
-        </a:xfrm>
-      </p:grpSpPr>
-      <p:sp>
-        <p:nvSpPr>
-          <p:cNvPr id="2" name="Title 1"/>
-          <p:cNvSpPr>
-            <a:spLocks noGrp="1"/>
-          </p:cNvSpPr>
-          <p:nvPr>
-            <p:ph type="title"/>
-          </p:nvPr>
-        </p:nvSpPr>
-        <p:spPr>
-          <a:xfrm>
-            <a:off x="457200" y="205979"/>
-            <a:ext cx="8229600" cy="857250"/>
-          </a:xfrm>
-        </p:spPr>
-        <p:txBody>
-          <a:bodyPr/>
-          <a:lstStyle/>
-          <a:p>
-            <a:pPr lvl="0" indent="0" marL="0">
-              <a:buNone/>
-            </a:pPr>
-            <a:r>
-              <a:rPr/>
-              <a:t>PCA: the direction that varies most</a:t>
-            </a:r>
-          </a:p>
-        </p:txBody>
-      </p:sp>
-      <p:sp>
-        <p:nvSpPr>
-          <p:cNvPr id="3" name="Content Placeholder 2"/>
-          <p:cNvSpPr>
-            <a:spLocks noGrp="1"/>
-          </p:cNvSpPr>
-          <p:nvPr>
-            <p:ph idx="1"/>
-          </p:nvPr>
-        </p:nvSpPr>
-        <p:spPr>
-          <a:xfrm>
-            <a:off x="457200" y="1200151"/>
-            <a:ext cx="8229600" cy="3394472"/>
-          </a:xfrm>
-        </p:spPr>
-        <p:txBody>
-          <a:bodyPr/>
-          <a:lstStyle/>
-          <a:p>
-            <a:pPr lvl="0"/>
-            <a:r>
-              <a:rPr/>
-              <a:t>Finds the direction in feature space along which the data varies </a:t>
-            </a:r>
-            <a:r>
-              <a:rPr b="1"/>
-              <a:t>most</a:t>
-            </a:r>
-            <a:r>
-              <a:rPr/>
-              <a:t>: the first principal component</a:t>
-            </a:r>
-          </a:p>
-          <a:p>
-            <a:pPr lvl="0"/>
-            <a:r>
-              <a:rPr/>
-              <a:t>Then the next-most-varying direction, </a:t>
-            </a:r>
-            <a:r>
-              <a:rPr b="1"/>
-              <a:t>perpendicular</a:t>
-            </a:r>
-            <a:r>
-              <a:rPr/>
-              <a:t> to the first, and so on</a:t>
-            </a:r>
-          </a:p>
-          <a:p>
-            <a:pPr lvl="0"/>
-            <a:r>
-              <a:rPr/>
-              <a:t>“Varies the most” stands in for “carries the most information”: a direction where every point looks nearly identical tells points apart hardly at all</a:t>
-            </a:r>
-          </a:p>
-          <a:p>
-            <a:pPr lvl="0"/>
-            <a:r>
-              <a:rPr/>
-              <a:t>A direction like that is safe to discard</a:t>
-            </a:r>
-          </a:p>
-        </p:txBody>
-      </p:sp>
-    </p:spTree>
-  </p:cSld>
-</p:sld>
-</file>
-
 <file path=ppt/slides/slide48.xml><?xml version="1.0" encoding="utf-8"?>
 <p:sld xmlns:a="http://schemas.openxmlformats.org/drawingml/2006/main" xmlns:r="http://schemas.openxmlformats.org/officeDocument/2006/relationships" xmlns:p="http://schemas.openxmlformats.org/presentationml/2006/main">
   <p:cSld>
@@ -15960,7 +16135,7 @@
             </a:pPr>
             <a:r>
               <a:rPr/>
-              <a:t>Maximise variance, subject to unit length</a:t>
+              <a:t>PCA: the direction that varies most</a:t>
             </a:r>
           </a:p>
         </p:txBody>
@@ -15988,21 +16163,44 @@
             <a:pPr lvl="0"/>
             <a:r>
               <a:rPr/>
-              <a:t>The variance of standardised data projected onto a direction v, with ‖v‖ = 1, is what PCA maximises</a:t>
+              <a:t>Finds the direction in feature space along which the data varies </a:t>
+            </a:r>
+            <a:r>
+              <a:rPr b="1"/>
+              <a:t>most</a:t>
+            </a:r>
+            <a:r>
+              <a:rPr/>
+              <a:t>: the first principal component</a:t>
             </a:r>
           </a:p>
           <a:p>
             <a:pPr lvl="0"/>
             <a:r>
               <a:rPr/>
-              <a:t>Σ is the sample covariance matrix: diagonal 1, off-diagonal entries the correlations the previous figure showed as colours</a:t>
+              <a:t>Then the next-most-varying direction, </a:t>
+            </a:r>
+            <a:r>
+              <a:rPr b="1"/>
+              <a:t>perpendicular</a:t>
+            </a:r>
+            <a:r>
+              <a:rPr/>
+              <a:t> to the first, and so on</a:t>
             </a:r>
           </a:p>
           <a:p>
             <a:pPr lvl="0"/>
             <a:r>
               <a:rPr/>
-              <a:t>The unit-length constraint matters: without it, variance grows without bound simply by scaling v up</a:t>
+              <a:t>“Varies the most” stands in for “carries the most information”: a direction where every point looks nearly identical tells points apart hardly at all</a:t>
+            </a:r>
+          </a:p>
+          <a:p>
+            <a:pPr lvl="0"/>
+            <a:r>
+              <a:rPr/>
+              <a:t>A direction like that is safe to discard</a:t>
             </a:r>
           </a:p>
         </p:txBody>
@@ -16013,6 +16211,245 @@
 </file>
 
 <file path=ppt/slides/slide49.xml><?xml version="1.0" encoding="utf-8"?>
+<p:sld xmlns:a="http://schemas.openxmlformats.org/drawingml/2006/main" xmlns:r="http://schemas.openxmlformats.org/officeDocument/2006/relationships" xmlns:p="http://schemas.openxmlformats.org/presentationml/2006/main">
+  <p:cSld>
+    <p:spTree>
+      <p:nvGrpSpPr>
+        <p:cNvPr id="1" name=""/>
+        <p:cNvGrpSpPr/>
+        <p:nvPr/>
+      </p:nvGrpSpPr>
+      <p:grpSpPr>
+        <a:xfrm>
+          <a:off x="0" y="0"/>
+          <a:ext cx="0" cy="0"/>
+          <a:chOff x="0" y="0"/>
+          <a:chExt cx="0" cy="0"/>
+        </a:xfrm>
+      </p:grpSpPr>
+      <p:sp>
+        <p:nvSpPr>
+          <p:cNvPr id="2" name="Title 1"/>
+          <p:cNvSpPr>
+            <a:spLocks noGrp="1"/>
+          </p:cNvSpPr>
+          <p:nvPr>
+            <p:ph type="title"/>
+          </p:nvPr>
+        </p:nvSpPr>
+        <p:spPr>
+          <a:xfrm>
+            <a:off x="457200" y="205979"/>
+            <a:ext cx="8229600" cy="857250"/>
+          </a:xfrm>
+        </p:spPr>
+        <p:txBody>
+          <a:bodyPr/>
+          <a:lstStyle/>
+          <a:p>
+            <a:pPr lvl="0" indent="0" marL="0">
+              <a:buNone/>
+            </a:pPr>
+            <a:r>
+              <a:rPr/>
+              <a:t>Maximise variance, subject to unit length</a:t>
+            </a:r>
+          </a:p>
+        </p:txBody>
+      </p:sp>
+      <p:sp>
+        <p:nvSpPr>
+          <p:cNvPr id="3" name="Content Placeholder 2"/>
+          <p:cNvSpPr>
+            <a:spLocks noGrp="1"/>
+          </p:cNvSpPr>
+          <p:nvPr>
+            <p:ph idx="1"/>
+          </p:nvPr>
+        </p:nvSpPr>
+        <p:spPr>
+          <a:xfrm>
+            <a:off x="457200" y="1200151"/>
+            <a:ext cx="8229600" cy="3394472"/>
+          </a:xfrm>
+        </p:spPr>
+        <p:txBody>
+          <a:bodyPr/>
+          <a:lstStyle/>
+          <a:p>
+            <a:pPr lvl="0"/>
+            <a:r>
+              <a:rPr/>
+              <a:t>The variance of standardised data projected onto a direction v, with ‖v‖ = 1, is what PCA maximises</a:t>
+            </a:r>
+          </a:p>
+          <a:p>
+            <a:pPr lvl="0"/>
+            <a:r>
+              <a:rPr/>
+              <a:t>Σ is the sample covariance matrix: diagonal 1, off-diagonal entries the correlations the previous figure showed as colours</a:t>
+            </a:r>
+          </a:p>
+          <a:p>
+            <a:pPr lvl="0"/>
+            <a:r>
+              <a:rPr/>
+              <a:t>The unit-length constraint matters: without it, variance grows without bound simply by scaling v up</a:t>
+            </a:r>
+          </a:p>
+        </p:txBody>
+      </p:sp>
+    </p:spTree>
+  </p:cSld>
+</p:sld>
+</file>
+
+<file path=ppt/slides/slide5.xml><?xml version="1.0" encoding="utf-8"?>
+<p:sld xmlns:a="http://schemas.openxmlformats.org/drawingml/2006/main" xmlns:r="http://schemas.openxmlformats.org/officeDocument/2006/relationships" xmlns:p="http://schemas.openxmlformats.org/presentationml/2006/main">
+  <p:cSld>
+    <p:spTree>
+      <p:nvGrpSpPr>
+        <p:cNvPr id="1" name=""/>
+        <p:cNvGrpSpPr/>
+        <p:nvPr/>
+      </p:nvGrpSpPr>
+      <p:grpSpPr>
+        <a:xfrm>
+          <a:off x="0" y="0"/>
+          <a:ext cx="0" cy="0"/>
+          <a:chOff x="0" y="0"/>
+          <a:chExt cx="0" cy="0"/>
+        </a:xfrm>
+      </p:grpSpPr>
+      <p:sp>
+        <p:nvSpPr>
+          <p:cNvPr id="2" name="Title 1"/>
+          <p:cNvSpPr>
+            <a:spLocks noGrp="1"/>
+          </p:cNvSpPr>
+          <p:nvPr>
+            <p:ph type="title"/>
+          </p:nvPr>
+        </p:nvSpPr>
+        <p:spPr>
+          <a:xfrm>
+            <a:off x="457200" y="205979"/>
+            <a:ext cx="8229600" cy="857250"/>
+          </a:xfrm>
+        </p:spPr>
+        <p:txBody>
+          <a:bodyPr/>
+          <a:lstStyle/>
+          <a:p>
+            <a:pPr lvl="0" indent="0" marL="0">
+              <a:buNone/>
+            </a:pPr>
+            <a:r>
+              <a:rPr/>
+              <a:t>Aurora: three problems, no answer key</a:t>
+            </a:r>
+          </a:p>
+        </p:txBody>
+      </p:sp>
+      <p:sp>
+        <p:nvSpPr>
+          <p:cNvPr id="3" name="Content Placeholder 2"/>
+          <p:cNvSpPr>
+            <a:spLocks noGrp="1"/>
+          </p:cNvSpPr>
+          <p:nvPr>
+            <p:ph idx="1"/>
+          </p:nvPr>
+        </p:nvSpPr>
+        <p:spPr>
+          <a:xfrm>
+            <a:off x="457200" y="1200151"/>
+            <a:ext cx="8229600" cy="3394472"/>
+          </a:xfrm>
+        </p:spPr>
+        <p:txBody>
+          <a:bodyPr/>
+          <a:lstStyle/>
+          <a:p>
+            <a:pPr lvl="0"/>
+            <a:r>
+              <a:rPr b="1"/>
+              <a:t>Segment 2,000 customers</a:t>
+            </a:r>
+            <a:r>
+              <a:rPr/>
+              <a:t>, from spend and visits (</a:t>
+            </a:r>
+            <a:r>
+              <a:rPr b="1"/>
+              <a:t>k-means</a:t>
+            </a:r>
+            <a:r>
+              <a:rPr/>
+              <a:t>, nb. 01)</a:t>
+            </a:r>
+          </a:p>
+          <a:p>
+            <a:pPr lvl="0"/>
+            <a:r>
+              <a:rPr b="1"/>
+              <a:t>Tell bots from humans</a:t>
+            </a:r>
+            <a:r>
+              <a:rPr/>
+              <a:t> in 1,500 sessions, same </a:t>
+            </a:r>
+            <a:r>
+              <a:rPr i="1"/>
+              <a:t>average</a:t>
+            </a:r>
+            <a:r>
+              <a:rPr/>
+              <a:t> behaviour (</a:t>
+            </a:r>
+            <a:r>
+              <a:rPr b="1"/>
+              <a:t>hierarchical clustering, DBSCAN</a:t>
+            </a:r>
+            <a:r>
+              <a:rPr/>
+              <a:t>, nb. 02)</a:t>
+            </a:r>
+          </a:p>
+          <a:p>
+            <a:pPr lvl="0"/>
+            <a:r>
+              <a:rPr b="1"/>
+              <a:t>Catch disguised fraud</a:t>
+            </a:r>
+            <a:r>
+              <a:rPr/>
+              <a:t> in an 8-column table, ordinary on every column (</a:t>
+            </a:r>
+            <a:r>
+              <a:rPr b="1"/>
+              <a:t>PCA</a:t>
+            </a:r>
+            <a:r>
+              <a:rPr/>
+              <a:t>, nb. 03)</a:t>
+            </a:r>
+          </a:p>
+          <a:p>
+            <a:pPr lvl="0"/>
+            <a:r>
+              <a:rPr/>
+              <a:t>Every dataset is synthetic: its truth is normally hidden</a:t>
+            </a:r>
+          </a:p>
+        </p:txBody>
+      </p:sp>
+    </p:spTree>
+  </p:cSld>
+</p:sld>
+</file>
+
+<file path=ppt/slides/slide50.xml><?xml version="1.0" encoding="utf-8"?>
 <p:sld xmlns:a="http://schemas.openxmlformats.org/drawingml/2006/main" xmlns:r="http://schemas.openxmlformats.org/officeDocument/2006/relationships" xmlns:p="http://schemas.openxmlformats.org/presentationml/2006/main">
   <p:cSld>
     <p:spTree>
@@ -16094,152 +16531,7 @@
 </p:sld>
 </file>
 
-<file path=ppt/slides/slide5.xml><?xml version="1.0" encoding="utf-8"?>
-<p:sld xmlns:a="http://schemas.openxmlformats.org/drawingml/2006/main" xmlns:r="http://schemas.openxmlformats.org/officeDocument/2006/relationships" xmlns:p="http://schemas.openxmlformats.org/presentationml/2006/main">
-  <p:cSld>
-    <p:spTree>
-      <p:nvGrpSpPr>
-        <p:cNvPr id="1" name=""/>
-        <p:cNvGrpSpPr/>
-        <p:nvPr/>
-      </p:nvGrpSpPr>
-      <p:grpSpPr>
-        <a:xfrm>
-          <a:off x="0" y="0"/>
-          <a:ext cx="0" cy="0"/>
-          <a:chOff x="0" y="0"/>
-          <a:chExt cx="0" cy="0"/>
-        </a:xfrm>
-      </p:grpSpPr>
-      <p:sp>
-        <p:nvSpPr>
-          <p:cNvPr id="2" name="Title 1"/>
-          <p:cNvSpPr>
-            <a:spLocks noGrp="1"/>
-          </p:cNvSpPr>
-          <p:nvPr>
-            <p:ph type="title"/>
-          </p:nvPr>
-        </p:nvSpPr>
-        <p:spPr>
-          <a:xfrm>
-            <a:off x="457200" y="205979"/>
-            <a:ext cx="8229600" cy="857250"/>
-          </a:xfrm>
-        </p:spPr>
-        <p:txBody>
-          <a:bodyPr/>
-          <a:lstStyle/>
-          <a:p>
-            <a:pPr lvl="0" indent="0" marL="0">
-              <a:buNone/>
-            </a:pPr>
-            <a:r>
-              <a:rPr/>
-              <a:t>Aurora: three problems, no answer key</a:t>
-            </a:r>
-          </a:p>
-        </p:txBody>
-      </p:sp>
-      <p:sp>
-        <p:nvSpPr>
-          <p:cNvPr id="3" name="Content Placeholder 2"/>
-          <p:cNvSpPr>
-            <a:spLocks noGrp="1"/>
-          </p:cNvSpPr>
-          <p:nvPr>
-            <p:ph idx="1"/>
-          </p:nvPr>
-        </p:nvSpPr>
-        <p:spPr>
-          <a:xfrm>
-            <a:off x="457200" y="1200151"/>
-            <a:ext cx="8229600" cy="3394472"/>
-          </a:xfrm>
-        </p:spPr>
-        <p:txBody>
-          <a:bodyPr/>
-          <a:lstStyle/>
-          <a:p>
-            <a:pPr lvl="0"/>
-            <a:r>
-              <a:rPr b="1"/>
-              <a:t>Segment 2,000 customers</a:t>
-            </a:r>
-            <a:r>
-              <a:rPr/>
-              <a:t>, from spend and visits (</a:t>
-            </a:r>
-            <a:r>
-              <a:rPr b="1"/>
-              <a:t>k-means</a:t>
-            </a:r>
-            <a:r>
-              <a:rPr/>
-              <a:t>, nb. 01)</a:t>
-            </a:r>
-          </a:p>
-          <a:p>
-            <a:pPr lvl="0"/>
-            <a:r>
-              <a:rPr b="1"/>
-              <a:t>Tell bots from humans</a:t>
-            </a:r>
-            <a:r>
-              <a:rPr/>
-              <a:t> in 1,500 sessions, same </a:t>
-            </a:r>
-            <a:r>
-              <a:rPr i="1"/>
-              <a:t>average</a:t>
-            </a:r>
-            <a:r>
-              <a:rPr/>
-              <a:t> behaviour (</a:t>
-            </a:r>
-            <a:r>
-              <a:rPr b="1"/>
-              <a:t>hierarchical clustering, DBSCAN</a:t>
-            </a:r>
-            <a:r>
-              <a:rPr/>
-              <a:t>, nb. 02)</a:t>
-            </a:r>
-          </a:p>
-          <a:p>
-            <a:pPr lvl="0"/>
-            <a:r>
-              <a:rPr b="1"/>
-              <a:t>Catch disguised fraud</a:t>
-            </a:r>
-            <a:r>
-              <a:rPr/>
-              <a:t> in an 8-column table, ordinary on every column (</a:t>
-            </a:r>
-            <a:r>
-              <a:rPr b="1"/>
-              <a:t>PCA</a:t>
-            </a:r>
-            <a:r>
-              <a:rPr/>
-              <a:t>, nb. 03)</a:t>
-            </a:r>
-          </a:p>
-          <a:p>
-            <a:pPr lvl="0"/>
-            <a:r>
-              <a:rPr/>
-              <a:t>Every dataset is synthetic: its truth is normally hidden</a:t>
-            </a:r>
-          </a:p>
-        </p:txBody>
-      </p:sp>
-    </p:spTree>
-  </p:cSld>
-</p:sld>
-</file>
-
-<file path=ppt/slides/slide50.xml><?xml version="1.0" encoding="utf-8"?>
+<file path=ppt/slides/slide51.xml><?xml version="1.0" encoding="utf-8"?>
 <p:sld xmlns:a="http://schemas.openxmlformats.org/drawingml/2006/main" xmlns:r="http://schemas.openxmlformats.org/officeDocument/2006/relationships" xmlns:p="http://schemas.openxmlformats.org/presentationml/2006/main">
   <p:cSld>
     <p:spTree>
@@ -16321,7 +16613,7 @@
 </p:sld>
 </file>
 
-<file path=ppt/slides/slide51.xml><?xml version="1.0" encoding="utf-8"?>
+<file path=ppt/slides/slide52.xml><?xml version="1.0" encoding="utf-8"?>
 <p:sld xmlns:a="http://schemas.openxmlformats.org/drawingml/2006/main" xmlns:r="http://schemas.openxmlformats.org/officeDocument/2006/relationships" xmlns:p="http://schemas.openxmlformats.org/presentationml/2006/main">
   <p:cSld>
     <p:spTree>
@@ -16438,7 +16730,7 @@
 </p:sld>
 </file>
 
-<file path=ppt/slides/slide52.xml><?xml version="1.0" encoding="utf-8"?>
+<file path=ppt/slides/slide53.xml><?xml version="1.0" encoding="utf-8"?>
 <p:sld xmlns:a="http://schemas.openxmlformats.org/drawingml/2006/main" xmlns:r="http://schemas.openxmlformats.org/officeDocument/2006/relationships" xmlns:p="http://schemas.openxmlformats.org/presentationml/2006/main">
   <p:cSld>
     <p:spTree>
@@ -16580,7 +16872,7 @@
                       </a:pPr>
                       <a:r>
                         <a:rPr/>
-                        <a:t>Eigenvalues</a:t>
+                        <a:t>Eigenvalues, 1 ± r</a:t>
                       </a:r>
                     </a:p>
                   </a:txBody>
@@ -16642,7 +16934,7 @@
 </p:sld>
 </file>
 
-<file path=ppt/slides/slide53.xml><?xml version="1.0" encoding="utf-8"?>
+<file path=ppt/slides/slide54.xml><?xml version="1.0" encoding="utf-8"?>
 <p:sld xmlns:a="http://schemas.openxmlformats.org/drawingml/2006/main" xmlns:r="http://schemas.openxmlformats.org/officeDocument/2006/relationships" xmlns:p="http://schemas.openxmlformats.org/presentationml/2006/main">
   <p:cSld>
     <p:spTree>
@@ -16684,6 +16976,88 @@
             </a:pPr>
             <a:r>
               <a:rPr/>
+              <a:t>Two columns, drawn</a:t>
+            </a:r>
+          </a:p>
+        </p:txBody>
+      </p:sp>
+      <p:pic>
+        <p:nvPicPr>
+          <p:cNvPr descr="pca_two_columns.png" id="0" name="Picture 1"/>
+          <p:cNvPicPr>
+            <a:picLocks noGrp="1" noChangeAspect="1"/>
+          </p:cNvPicPr>
+          <p:nvPr/>
+        </p:nvPicPr>
+        <p:blipFill>
+          <a:blip r:embed="rId3"/>
+          <a:stretch>
+            <a:fillRect/>
+          </a:stretch>
+        </p:blipFill>
+        <p:spPr bwMode="auto">
+          <a:xfrm>
+            <a:off x="934950" y="1166099"/>
+            <a:ext cx="7274099" cy="3360181"/>
+          </a:xfrm>
+          <a:prstGeom prst="rect">
+            <a:avLst/>
+          </a:prstGeom>
+          <a:noFill/>
+          <a:ln w="9525">
+            <a:noFill/>
+            <a:headEnd/>
+            <a:tailEnd/>
+          </a:ln>
+        </p:spPr>
+      </p:pic>
+    </p:spTree>
+  </p:cSld>
+</p:sld>
+</file>
+
+<file path=ppt/slides/slide55.xml><?xml version="1.0" encoding="utf-8"?>
+<p:sld xmlns:a="http://schemas.openxmlformats.org/drawingml/2006/main" xmlns:r="http://schemas.openxmlformats.org/officeDocument/2006/relationships" xmlns:p="http://schemas.openxmlformats.org/presentationml/2006/main">
+  <p:cSld>
+    <p:spTree>
+      <p:nvGrpSpPr>
+        <p:cNvPr id="1" name=""/>
+        <p:cNvGrpSpPr/>
+        <p:nvPr/>
+      </p:nvGrpSpPr>
+      <p:grpSpPr>
+        <a:xfrm>
+          <a:off x="0" y="0"/>
+          <a:ext cx="0" cy="0"/>
+          <a:chOff x="0" y="0"/>
+          <a:chExt cx="0" cy="0"/>
+        </a:xfrm>
+      </p:grpSpPr>
+      <p:sp>
+        <p:nvSpPr>
+          <p:cNvPr id="2" name="Title 1"/>
+          <p:cNvSpPr>
+            <a:spLocks noGrp="1"/>
+          </p:cNvSpPr>
+          <p:nvPr>
+            <p:ph type="title"/>
+          </p:nvPr>
+        </p:nvSpPr>
+        <p:spPr>
+          <a:xfrm>
+            <a:off x="457200" y="205979"/>
+            <a:ext cx="8229600" cy="857250"/>
+          </a:xfrm>
+        </p:spPr>
+        <p:txBody>
+          <a:bodyPr/>
+          <a:lstStyle/>
+          <a:p>
+            <a:pPr lvl="0" indent="0" marL="0">
+              <a:buNone/>
+            </a:pPr>
+            <a:r>
+              <a:rPr/>
               <a:t>The same answer, more stably: the SVD</a:t>
             </a:r>
           </a:p>
@@ -16737,7 +17111,7 @@
 </p:sld>
 </file>
 
-<file path=ppt/slides/slide54.xml><?xml version="1.0" encoding="utf-8"?>
+<file path=ppt/slides/slide56.xml><?xml version="1.0" encoding="utf-8"?>
 <p:sld xmlns:a="http://schemas.openxmlformats.org/drawingml/2006/main" xmlns:r="http://schemas.openxmlformats.org/officeDocument/2006/relationships" xmlns:p="http://schemas.openxmlformats.org/presentationml/2006/main">
   <p:cSld>
     <p:spTree>
@@ -16819,7 +17193,7 @@
 </p:sld>
 </file>
 
-<file path=ppt/slides/slide55.xml><?xml version="1.0" encoding="utf-8"?>
+<file path=ppt/slides/slide57.xml><?xml version="1.0" encoding="utf-8"?>
 <p:sld xmlns:a="http://schemas.openxmlformats.org/drawingml/2006/main" xmlns:r="http://schemas.openxmlformats.org/officeDocument/2006/relationships" xmlns:p="http://schemas.openxmlformats.org/presentationml/2006/main">
   <p:cSld>
     <p:spTree>
@@ -16934,7 +17308,7 @@
 </p:sld>
 </file>
 
-<file path=ppt/slides/slide56.xml><?xml version="1.0" encoding="utf-8"?>
+<file path=ppt/slides/slide58.xml><?xml version="1.0" encoding="utf-8"?>
 <p:sld xmlns:a="http://schemas.openxmlformats.org/drawingml/2006/main" xmlns:r="http://schemas.openxmlformats.org/officeDocument/2006/relationships" xmlns:p="http://schemas.openxmlformats.org/presentationml/2006/main">
   <p:cSld>
     <p:spTree>
@@ -17016,7 +17390,7 @@
 </p:sld>
 </file>
 
-<file path=ppt/slides/slide57.xml><?xml version="1.0" encoding="utf-8"?>
+<file path=ppt/slides/slide59.xml><?xml version="1.0" encoding="utf-8"?>
 <p:sld xmlns:a="http://schemas.openxmlformats.org/drawingml/2006/main" xmlns:r="http://schemas.openxmlformats.org/officeDocument/2006/relationships" xmlns:p="http://schemas.openxmlformats.org/presentationml/2006/main">
   <p:cSld>
     <p:spTree>
@@ -17474,209 +17848,6 @@
 </p:sld>
 </file>
 
-<file path=ppt/slides/slide58.xml><?xml version="1.0" encoding="utf-8"?>
-<p:sld xmlns:a="http://schemas.openxmlformats.org/drawingml/2006/main" xmlns:r="http://schemas.openxmlformats.org/officeDocument/2006/relationships" xmlns:p="http://schemas.openxmlformats.org/presentationml/2006/main">
-  <p:cSld>
-    <p:spTree>
-      <p:nvGrpSpPr>
-        <p:cNvPr id="1" name=""/>
-        <p:cNvGrpSpPr/>
-        <p:nvPr/>
-      </p:nvGrpSpPr>
-      <p:grpSpPr>
-        <a:xfrm>
-          <a:off x="0" y="0"/>
-          <a:ext cx="0" cy="0"/>
-          <a:chOff x="0" y="0"/>
-          <a:chExt cx="0" cy="0"/>
-        </a:xfrm>
-      </p:grpSpPr>
-      <p:sp>
-        <p:nvSpPr>
-          <p:cNvPr id="2" name="Title 1"/>
-          <p:cNvSpPr>
-            <a:spLocks noGrp="1"/>
-          </p:cNvSpPr>
-          <p:nvPr>
-            <p:ph type="title"/>
-          </p:nvPr>
-        </p:nvSpPr>
-        <p:spPr>
-          <a:xfrm>
-            <a:off x="457200" y="205979"/>
-            <a:ext cx="8229600" cy="857250"/>
-          </a:xfrm>
-        </p:spPr>
-        <p:txBody>
-          <a:bodyPr/>
-          <a:lstStyle/>
-          <a:p>
-            <a:pPr lvl="0" indent="0" marL="0">
-              <a:buNone/>
-            </a:pPr>
-            <a:r>
-              <a:rPr/>
-              <a:t>What to do when the elbow is softer</a:t>
-            </a:r>
-          </a:p>
-        </p:txBody>
-      </p:sp>
-      <p:sp>
-        <p:nvSpPr>
-          <p:cNvPr id="3" name="Content Placeholder 2"/>
-          <p:cNvSpPr>
-            <a:spLocks noGrp="1"/>
-          </p:cNvSpPr>
-          <p:nvPr>
-            <p:ph idx="1"/>
-          </p:nvPr>
-        </p:nvSpPr>
-        <p:spPr>
-          <a:xfrm>
-            <a:off x="457200" y="1200151"/>
-            <a:ext cx="8229600" cy="3394472"/>
-          </a:xfrm>
-        </p:spPr>
-        <p:txBody>
-          <a:bodyPr/>
-          <a:lstStyle/>
-          <a:p>
-            <a:pPr lvl="0"/>
-            <a:r>
-              <a:rPr/>
-              <a:t>This dataset’s elbow is unusually clean; most real data is not</a:t>
-            </a:r>
-          </a:p>
-          <a:p>
-            <a:pPr lvl="0"/>
-            <a:r>
-              <a:rPr/>
-              <a:t>Common alternative: keep enough components for a chosen fraction of the variance, typically 90–95%</a:t>
-            </a:r>
-          </a:p>
-          <a:p>
-            <a:pPr lvl="0"/>
-            <a:r>
-              <a:rPr/>
-              <a:t>Or treat the number of components as a hyperparameter, and let cross-validation decide</a:t>
-            </a:r>
-          </a:p>
-          <a:p>
-            <a:pPr lvl="0"/>
-            <a:r>
-              <a:rPr/>
-              <a:t>The scree plot starts the judgement; it does not automate it</a:t>
-            </a:r>
-          </a:p>
-        </p:txBody>
-      </p:sp>
-    </p:spTree>
-  </p:cSld>
-</p:sld>
-</file>
-
-<file path=ppt/slides/slide59.xml><?xml version="1.0" encoding="utf-8"?>
-<p:sld xmlns:a="http://schemas.openxmlformats.org/drawingml/2006/main" xmlns:r="http://schemas.openxmlformats.org/officeDocument/2006/relationships" xmlns:p="http://schemas.openxmlformats.org/presentationml/2006/main">
-  <p:cSld>
-    <p:spTree>
-      <p:nvGrpSpPr>
-        <p:cNvPr id="1" name=""/>
-        <p:cNvGrpSpPr/>
-        <p:nvPr/>
-      </p:nvGrpSpPr>
-      <p:grpSpPr>
-        <a:xfrm>
-          <a:off x="0" y="0"/>
-          <a:ext cx="0" cy="0"/>
-          <a:chOff x="0" y="0"/>
-          <a:chExt cx="0" cy="0"/>
-        </a:xfrm>
-      </p:grpSpPr>
-      <p:sp>
-        <p:nvSpPr>
-          <p:cNvPr id="2" name="Title 1"/>
-          <p:cNvSpPr>
-            <a:spLocks noGrp="1"/>
-          </p:cNvSpPr>
-          <p:nvPr>
-            <p:ph type="title"/>
-          </p:nvPr>
-        </p:nvSpPr>
-        <p:spPr>
-          <a:xfrm>
-            <a:off x="457200" y="205979"/>
-            <a:ext cx="8229600" cy="857250"/>
-          </a:xfrm>
-        </p:spPr>
-        <p:txBody>
-          <a:bodyPr/>
-          <a:lstStyle/>
-          <a:p>
-            <a:pPr lvl="0" indent="0" marL="0">
-              <a:buNone/>
-            </a:pPr>
-            <a:r>
-              <a:rPr/>
-              <a:t>Notebook 3, live</a:t>
-            </a:r>
-          </a:p>
-        </p:txBody>
-      </p:sp>
-      <p:sp>
-        <p:nvSpPr>
-          <p:cNvPr id="3" name="Content Placeholder 2"/>
-          <p:cNvSpPr>
-            <a:spLocks noGrp="1"/>
-          </p:cNvSpPr>
-          <p:nvPr>
-            <p:ph idx="1"/>
-          </p:nvPr>
-        </p:nvSpPr>
-        <p:spPr>
-          <a:xfrm>
-            <a:off x="457200" y="1200151"/>
-            <a:ext cx="8229600" cy="3394472"/>
-          </a:xfrm>
-        </p:spPr>
-        <p:txBody>
-          <a:bodyPr/>
-          <a:lstStyle/>
-          <a:p>
-            <a:pPr lvl="0"/>
-            <a:r>
-              <a:rPr/>
-              <a:t>PCA on the 8-feature account table, checked three ways, to 5×10⁻¹⁵</a:t>
-            </a:r>
-          </a:p>
-          <a:p>
-            <a:pPr lvl="0"/>
-            <a:r>
-              <a:rPr/>
-              <a:t>Reconstruction error flags disguised fraud: </a:t>
-            </a:r>
-            <a:r>
-              <a:rPr b="1"/>
-              <a:t>37 of 40</a:t>
-            </a:r>
-            <a:r>
-              <a:rPr/>
-              <a:t> planted anomalies caught at the 98th-percentile threshold</a:t>
-            </a:r>
-          </a:p>
-          <a:p>
-            <a:pPr lvl="0"/>
-            <a:r>
-              <a:rPr/>
-              <a:t>A 2-D PCA and t-SNE scatter of the same accounts, and why neither shows the anomalies as outliers</a:t>
-            </a:r>
-          </a:p>
-        </p:txBody>
-      </p:sp>
-    </p:spTree>
-  </p:cSld>
-</p:sld>
-</file>
-
 <file path=ppt/slides/slide6.xml><?xml version="1.0" encoding="utf-8"?>
 <p:sld xmlns:a="http://schemas.openxmlformats.org/drawingml/2006/main" xmlns:r="http://schemas.openxmlformats.org/officeDocument/2006/relationships" xmlns:p="http://schemas.openxmlformats.org/presentationml/2006/main">
   <p:cSld>
@@ -17837,7 +18008,7 @@
             </a:pPr>
             <a:r>
               <a:rPr/>
-              <a:t>t-SNE: a tool built for looking, not for measuring</a:t>
+              <a:t>What to do when the elbow is softer</a:t>
             </a:r>
           </a:p>
         </p:txBody>
@@ -17864,41 +18035,29 @@
           <a:p>
             <a:pPr lvl="0"/>
             <a:r>
-              <a:rPr b="1"/>
-              <a:t>t-SNE</a:t>
-            </a:r>
-            <a:r>
-              <a:rPr/>
-              <a:t> (t-distributed stochastic neighbour embedding) arranges points so those close together </a:t>
-            </a:r>
-            <a:r>
-              <a:rPr b="1"/>
-              <a:t>stay</a:t>
-            </a:r>
-            <a:r>
-              <a:rPr/>
-              <a:t> close</a:t>
+              <a:rPr/>
+              <a:t>This dataset’s elbow is unusually clean; most real data is not</a:t>
             </a:r>
           </a:p>
           <a:p>
             <a:pPr lvl="0"/>
             <a:r>
               <a:rPr/>
-              <a:t>Distances between points that started far apart are not preserved</a:t>
+              <a:t>Common alternative: keep enough components for a chosen fraction of the variance, typically 90–95%</a:t>
             </a:r>
           </a:p>
           <a:p>
             <a:pPr lvl="0"/>
             <a:r>
               <a:rPr/>
-              <a:t>Excellent at making separate clusters visually obvious, more so than PCA’s first two components</a:t>
+              <a:t>Or treat the number of components as a hyperparameter, and let cross-validation decide</a:t>
             </a:r>
           </a:p>
           <a:p>
             <a:pPr lvl="0"/>
             <a:r>
-              <a:rPr b="1"/>
-              <a:t>Distances between clusters mean nothing</a:t>
+              <a:rPr/>
+              <a:t>The scree plot starts the judgement; it does not automate it</a:t>
             </a:r>
           </a:p>
         </p:txBody>
@@ -17950,7 +18109,7 @@
             </a:pPr>
             <a:r>
               <a:rPr/>
-              <a:t>What to take away</a:t>
+              <a:t>Notebook 3, live</a:t>
             </a:r>
           </a:p>
         </p:txBody>
@@ -17978,52 +18137,29 @@
             <a:pPr lvl="0"/>
             <a:r>
               <a:rPr/>
-              <a:t>k-means converges only to a </a:t>
+              <a:t>PCA on the 8-feature account table, checked three ways, to 5×10⁻¹⁵</a:t>
+            </a:r>
+          </a:p>
+          <a:p>
+            <a:pPr lvl="0"/>
+            <a:r>
+              <a:rPr/>
+              <a:t>Reconstruction error flags disguised fraud: </a:t>
             </a:r>
             <a:r>
               <a:rPr b="1"/>
-              <a:t>local</a:t>
-            </a:r>
-            <a:r>
-              <a:rPr/>
-              <a:t> minimum: 30 starts ranged WCSS 374.1 to 1,390.4</a:t>
+              <a:t>37 of 40</a:t>
+            </a:r>
+            <a:r>
+              <a:rPr/>
+              <a:t> planted anomalies caught at the 98th-percentile threshold</a:t>
             </a:r>
           </a:p>
           <a:p>
             <a:pPr lvl="0"/>
             <a:r>
               <a:rPr/>
-              <a:t>A core inside a ring defeats k-means </a:t>
-            </a:r>
-            <a:r>
-              <a:rPr b="1"/>
-              <a:t>and</a:t>
-            </a:r>
-            <a:r>
-              <a:rPr/>
-              <a:t> Ward; DBSCAN scored </a:t>
-            </a:r>
-            <a:r>
-              <a:rPr b="1"/>
-              <a:t>0.941</a:t>
-            </a:r>
-          </a:p>
-          <a:p>
-            <a:pPr lvl="0"/>
-            <a:r>
-              <a:rPr/>
-              <a:t>Internal metrics measure self-consistency, external (ARI) a truth real problems rarely have</a:t>
-            </a:r>
-          </a:p>
-          <a:p>
-            <a:pPr lvl="0"/>
-            <a:r>
-              <a:rPr b="1"/>
-              <a:t>37 of 40 disguised accounts</a:t>
-            </a:r>
-            <a:r>
-              <a:rPr/>
-              <a:t> caught by reconstruction error, invisible to a 2-D scatter</a:t>
+              <a:t>A 2-D PCA and t-SNE scatter of the same accounts, and why neither shows the anomalies as outliers</a:t>
             </a:r>
           </a:p>
         </p:txBody>
@@ -18034,6 +18170,244 @@
 </file>
 
 <file path=ppt/slides/slide62.xml><?xml version="1.0" encoding="utf-8"?>
+<p:sld xmlns:a="http://schemas.openxmlformats.org/drawingml/2006/main" xmlns:r="http://schemas.openxmlformats.org/officeDocument/2006/relationships" xmlns:p="http://schemas.openxmlformats.org/presentationml/2006/main">
+  <p:cSld>
+    <p:spTree>
+      <p:nvGrpSpPr>
+        <p:cNvPr id="1" name=""/>
+        <p:cNvGrpSpPr/>
+        <p:nvPr/>
+      </p:nvGrpSpPr>
+      <p:grpSpPr>
+        <a:xfrm>
+          <a:off x="0" y="0"/>
+          <a:ext cx="0" cy="0"/>
+          <a:chOff x="0" y="0"/>
+          <a:chExt cx="0" cy="0"/>
+        </a:xfrm>
+      </p:grpSpPr>
+      <p:sp>
+        <p:nvSpPr>
+          <p:cNvPr id="2" name="Title 1"/>
+          <p:cNvSpPr>
+            <a:spLocks noGrp="1"/>
+          </p:cNvSpPr>
+          <p:nvPr>
+            <p:ph type="title"/>
+          </p:nvPr>
+        </p:nvSpPr>
+        <p:spPr>
+          <a:xfrm>
+            <a:off x="457200" y="205979"/>
+            <a:ext cx="8229600" cy="857250"/>
+          </a:xfrm>
+        </p:spPr>
+        <p:txBody>
+          <a:bodyPr/>
+          <a:lstStyle/>
+          <a:p>
+            <a:pPr lvl="0" indent="0" marL="0">
+              <a:buNone/>
+            </a:pPr>
+            <a:r>
+              <a:rPr/>
+              <a:t>t-SNE: a tool built for looking, not for measuring</a:t>
+            </a:r>
+          </a:p>
+        </p:txBody>
+      </p:sp>
+      <p:sp>
+        <p:nvSpPr>
+          <p:cNvPr id="3" name="Content Placeholder 2"/>
+          <p:cNvSpPr>
+            <a:spLocks noGrp="1"/>
+          </p:cNvSpPr>
+          <p:nvPr>
+            <p:ph idx="1"/>
+          </p:nvPr>
+        </p:nvSpPr>
+        <p:spPr>
+          <a:xfrm>
+            <a:off x="457200" y="1200151"/>
+            <a:ext cx="8229600" cy="3394472"/>
+          </a:xfrm>
+        </p:spPr>
+        <p:txBody>
+          <a:bodyPr/>
+          <a:lstStyle/>
+          <a:p>
+            <a:pPr lvl="0"/>
+            <a:r>
+              <a:rPr b="1"/>
+              <a:t>t-SNE</a:t>
+            </a:r>
+            <a:r>
+              <a:rPr/>
+              <a:t> (t-distributed stochastic neighbour embedding) arranges points so those close together </a:t>
+            </a:r>
+            <a:r>
+              <a:rPr b="1"/>
+              <a:t>stay</a:t>
+            </a:r>
+            <a:r>
+              <a:rPr/>
+              <a:t> close</a:t>
+            </a:r>
+          </a:p>
+          <a:p>
+            <a:pPr lvl="0"/>
+            <a:r>
+              <a:rPr/>
+              <a:t>Distances between points that started far apart are not preserved</a:t>
+            </a:r>
+          </a:p>
+          <a:p>
+            <a:pPr lvl="0"/>
+            <a:r>
+              <a:rPr/>
+              <a:t>Excellent at making separate clusters visually obvious, more so than PCA’s first two components</a:t>
+            </a:r>
+          </a:p>
+          <a:p>
+            <a:pPr lvl="0"/>
+            <a:r>
+              <a:rPr b="1"/>
+              <a:t>Distances between clusters mean nothing</a:t>
+            </a:r>
+          </a:p>
+        </p:txBody>
+      </p:sp>
+    </p:spTree>
+  </p:cSld>
+</p:sld>
+</file>
+
+<file path=ppt/slides/slide63.xml><?xml version="1.0" encoding="utf-8"?>
+<p:sld xmlns:a="http://schemas.openxmlformats.org/drawingml/2006/main" xmlns:r="http://schemas.openxmlformats.org/officeDocument/2006/relationships" xmlns:p="http://schemas.openxmlformats.org/presentationml/2006/main">
+  <p:cSld>
+    <p:spTree>
+      <p:nvGrpSpPr>
+        <p:cNvPr id="1" name=""/>
+        <p:cNvGrpSpPr/>
+        <p:nvPr/>
+      </p:nvGrpSpPr>
+      <p:grpSpPr>
+        <a:xfrm>
+          <a:off x="0" y="0"/>
+          <a:ext cx="0" cy="0"/>
+          <a:chOff x="0" y="0"/>
+          <a:chExt cx="0" cy="0"/>
+        </a:xfrm>
+      </p:grpSpPr>
+      <p:sp>
+        <p:nvSpPr>
+          <p:cNvPr id="2" name="Title 1"/>
+          <p:cNvSpPr>
+            <a:spLocks noGrp="1"/>
+          </p:cNvSpPr>
+          <p:nvPr>
+            <p:ph type="title"/>
+          </p:nvPr>
+        </p:nvSpPr>
+        <p:spPr>
+          <a:xfrm>
+            <a:off x="457200" y="205979"/>
+            <a:ext cx="8229600" cy="857250"/>
+          </a:xfrm>
+        </p:spPr>
+        <p:txBody>
+          <a:bodyPr/>
+          <a:lstStyle/>
+          <a:p>
+            <a:pPr lvl="0" indent="0" marL="0">
+              <a:buNone/>
+            </a:pPr>
+            <a:r>
+              <a:rPr/>
+              <a:t>What to take away</a:t>
+            </a:r>
+          </a:p>
+        </p:txBody>
+      </p:sp>
+      <p:sp>
+        <p:nvSpPr>
+          <p:cNvPr id="3" name="Content Placeholder 2"/>
+          <p:cNvSpPr>
+            <a:spLocks noGrp="1"/>
+          </p:cNvSpPr>
+          <p:nvPr>
+            <p:ph idx="1"/>
+          </p:nvPr>
+        </p:nvSpPr>
+        <p:spPr>
+          <a:xfrm>
+            <a:off x="457200" y="1200151"/>
+            <a:ext cx="8229600" cy="3394472"/>
+          </a:xfrm>
+        </p:spPr>
+        <p:txBody>
+          <a:bodyPr/>
+          <a:lstStyle/>
+          <a:p>
+            <a:pPr lvl="0"/>
+            <a:r>
+              <a:rPr/>
+              <a:t>k-means converges only to a </a:t>
+            </a:r>
+            <a:r>
+              <a:rPr b="1"/>
+              <a:t>local</a:t>
+            </a:r>
+            <a:r>
+              <a:rPr/>
+              <a:t> minimum: 30 starts ranged WCSS 374.1 to 1,390.4</a:t>
+            </a:r>
+          </a:p>
+          <a:p>
+            <a:pPr lvl="0"/>
+            <a:r>
+              <a:rPr/>
+              <a:t>A core inside a ring defeats k-means </a:t>
+            </a:r>
+            <a:r>
+              <a:rPr b="1"/>
+              <a:t>and</a:t>
+            </a:r>
+            <a:r>
+              <a:rPr/>
+              <a:t> Ward; DBSCAN scored </a:t>
+            </a:r>
+            <a:r>
+              <a:rPr b="1"/>
+              <a:t>0.941</a:t>
+            </a:r>
+          </a:p>
+          <a:p>
+            <a:pPr lvl="0"/>
+            <a:r>
+              <a:rPr/>
+              <a:t>Internal metrics measure self-consistency, external (ARI) a truth real problems rarely have</a:t>
+            </a:r>
+          </a:p>
+          <a:p>
+            <a:pPr lvl="0"/>
+            <a:r>
+              <a:rPr b="1"/>
+              <a:t>37 of 40 disguised accounts</a:t>
+            </a:r>
+            <a:r>
+              <a:rPr/>
+              <a:t> caught by reconstruction error, invisible to a 2-D scatter</a:t>
+            </a:r>
+          </a:p>
+        </p:txBody>
+      </p:sp>
+    </p:spTree>
+  </p:cSld>
+</p:sld>
+</file>
+
+<file path=ppt/slides/slide64.xml><?xml version="1.0" encoding="utf-8"?>
 <p:sld xmlns:a="http://schemas.openxmlformats.org/drawingml/2006/main" xmlns:r="http://schemas.openxmlformats.org/officeDocument/2006/relationships" xmlns:p="http://schemas.openxmlformats.org/presentationml/2006/main">
   <p:cSld>
     <p:spTree>

--- a/Lessons/08_unsupervised_learning/Slides/unsupervised_learning_slides.pptx
+++ b/Lessons/08_unsupervised_learning/Slides/unsupervised_learning_slides.pptx
@@ -6137,7 +6137,7 @@
             </a:pPr>
             <a:r>
               <a:rPr/>
-              <a:t>Set it explicitly and say when it comes back: the first ten minutes of lesson 9, Friday 27 November. Nothing is collected; at the exam one of the ten exercises is drawn and the student talks through their own notebook.</a:t>
+              <a:t>Set it explicitly and say when it comes back: the first ten minutes of lesson 9, Friday 4 December. Nothing is collected; at the exam one of the ten exercises is drawn and the student talks through their own notebook.</a:t>
             </a:r>
           </a:p>
           <a:p>
@@ -9730,7 +9730,7 @@
             </a:pPr>
             <a:r>
               <a:rPr/>
-              <a:t>20 November 2026</a:t>
+              <a:t>27 November 2026</a:t>
             </a:r>
           </a:p>
         </p:txBody>
@@ -15862,7 +15862,7 @@
             </a:r>
             <a:r>
               <a:rPr b="1"/>
-              <a:t>Friday 27 November</a:t>
+              <a:t>Friday 4 December</a:t>
             </a:r>
           </a:p>
           <a:p>
